--- a/docs/pptx/auc3/jx-auc3-linsubhr-sens-aki2.pptx
+++ b/docs/pptx/auc3/jx-auc3-linsubhr-sens-aki2.pptx
@@ -5339,7 +5339,7 @@
           <p:spPr>
             <a:xfrm>
               <a:off x="817517" y="1896563"/>
-              <a:ext cx="6169365" cy="82021"/>
+              <a:ext cx="6833128" cy="82021"/>
             </a:xfrm>
             <a:prstGeom prst="rect">
               <a:avLst/>
@@ -5371,7 +5371,7 @@
                   <a:latin typeface="Helvetica"/>
                   <a:cs typeface="Helvetica"/>
                 </a:rPr>
-                <a:t>subHR per 0.1 ratio decline: 1.20 (0.97-1.49), p = 0.087  |  per IQR decline (Δ = 0.28): 1.68 (0.93-3.05)  |  IQR: [0.70, 0.98]</a:t>
+                <a:t>subHR per 0.1 ratio decline: 1.20 (0.97-1.49), p_Bonf = 0.525 (n = 6)  |  per IQR decline (Δ = 0.28): 1.68 (0.93-3.05)  |  IQR: [0.70, 0.98]</a:t>
               </a:r>
             </a:p>
           </p:txBody>

--- a/docs/pptx/auc3/jx-auc3-linsubhr-sens-aki2.pptx
+++ b/docs/pptx/auc3/jx-auc3-linsubhr-sens-aki2.pptx
@@ -5062,8 +5062,8 @@
           </p:nvSpPr>
           <p:spPr>
             <a:xfrm>
-              <a:off x="2137719" y="5785772"/>
-              <a:ext cx="155356" cy="80101"/>
+              <a:off x="2134610" y="5785772"/>
+              <a:ext cx="161574" cy="80101"/>
             </a:xfrm>
             <a:prstGeom prst="rect">
               <a:avLst/>
@@ -5095,7 +5095,7 @@
                   <a:latin typeface="Helvetica"/>
                   <a:cs typeface="Helvetica"/>
                 </a:rPr>
-                <a:t>0.6</a:t>
+                <a:t>-40</a:t>
               </a:r>
             </a:p>
           </p:txBody>
@@ -5108,8 +5108,8 @@
           </p:nvSpPr>
           <p:spPr>
             <a:xfrm>
-              <a:off x="3878840" y="5785772"/>
-              <a:ext cx="155356" cy="80101"/>
+              <a:off x="3875731" y="5785772"/>
+              <a:ext cx="161574" cy="80101"/>
             </a:xfrm>
             <a:prstGeom prst="rect">
               <a:avLst/>
@@ -5141,7 +5141,7 @@
                   <a:latin typeface="Helvetica"/>
                   <a:cs typeface="Helvetica"/>
                 </a:rPr>
-                <a:t>0.8</a:t>
+                <a:t>-20</a:t>
               </a:r>
             </a:p>
           </p:txBody>
@@ -5154,8 +5154,8 @@
           </p:nvSpPr>
           <p:spPr>
             <a:xfrm>
-              <a:off x="5619961" y="5785772"/>
-              <a:ext cx="155356" cy="80101"/>
+              <a:off x="5666549" y="5785772"/>
+              <a:ext cx="62179" cy="80101"/>
             </a:xfrm>
             <a:prstGeom prst="rect">
               <a:avLst/>
@@ -5187,7 +5187,7 @@
                   <a:latin typeface="Helvetica"/>
                   <a:cs typeface="Helvetica"/>
                 </a:rPr>
-                <a:t>1.0</a:t>
+                <a:t>0</a:t>
               </a:r>
             </a:p>
           </p:txBody>
@@ -5200,8 +5200,8 @@
           </p:nvSpPr>
           <p:spPr>
             <a:xfrm>
-              <a:off x="7361081" y="5785772"/>
-              <a:ext cx="155356" cy="80101"/>
+              <a:off x="7376580" y="5785772"/>
+              <a:ext cx="124358" cy="80101"/>
             </a:xfrm>
             <a:prstGeom prst="rect">
               <a:avLst/>
@@ -5233,7 +5233,7 @@
                   <a:latin typeface="Helvetica"/>
                   <a:cs typeface="Helvetica"/>
                 </a:rPr>
-                <a:t>1.2</a:t>
+                <a:t>20</a:t>
               </a:r>
             </a:p>
           </p:txBody>
@@ -5246,8 +5246,8 @@
           </p:nvSpPr>
           <p:spPr>
             <a:xfrm>
-              <a:off x="2691419" y="5925448"/>
-              <a:ext cx="4051889" cy="100218"/>
+              <a:off x="1561815" y="5925448"/>
+              <a:ext cx="6311097" cy="100218"/>
             </a:xfrm>
             <a:prstGeom prst="rect">
               <a:avLst/>
@@ -5279,7 +5279,7 @@
                   <a:latin typeface="Helvetica"/>
                   <a:cs typeface="Helvetica"/>
                 </a:rPr>
-                <a:t>Sensitivity eGFR Ratio (CKD-EPI 2012 CysC / CKD-EPI 2021 Cr)</a:t>
+                <a:t>Sensitivity eGFR Difference (%): 100 × (CKD-EPI 2012 CysC − CKD-EPI 2021 Cr) / CKD-EPI 2021 Cr</a:t>
               </a:r>
             </a:p>
           </p:txBody>
@@ -5339,7 +5339,7 @@
           <p:spPr>
             <a:xfrm>
               <a:off x="817517" y="1896563"/>
-              <a:ext cx="6833128" cy="82021"/>
+              <a:ext cx="6959864" cy="82021"/>
             </a:xfrm>
             <a:prstGeom prst="rect">
               <a:avLst/>
@@ -5371,7 +5371,7 @@
                   <a:latin typeface="Helvetica"/>
                   <a:cs typeface="Helvetica"/>
                 </a:rPr>
-                <a:t>subHR per 0.1 ratio decline: 1.20 (0.97-1.49), p_Bonf = 0.525 (n = 6)  |  per IQR decline (Δ = 0.28): 1.68 (0.93-3.05)  |  IQR: [0.70, 0.98]</a:t>
+                <a:t>subHR per 10 % decline: 1.20 (0.97-1.49), p_Bonf = 0.525 (n = 6)  |  per IQR decline (Δ = 28.1 %): 1.68 (0.93-3.05)  |  IQR: [-30.1, -2.1] %</a:t>
               </a:r>
             </a:p>
           </p:txBody>

--- a/docs/pptx/auc3/jx-auc3-linsubhr-sens-aki2.pptx
+++ b/docs/pptx/auc3/jx-auc3-linsubhr-sens-aki2.pptx
@@ -2265,34 +2265,26 @@
         </p:sp>
         <p:sp>
           <p:nvSpPr>
-            <p:cNvPr id="4" name="pl4"/>
+            <p:cNvPr id="4" name="rc4"/>
             <p:cNvSpPr/>
             <p:nvPr/>
           </p:nvSpPr>
           <p:spPr>
             <a:xfrm>
-              <a:off x="817517" y="5142518"/>
-              <a:ext cx="7799693" cy="0"/>
+              <a:off x="457200" y="1600200"/>
+              <a:ext cx="8229600" cy="4525962"/>
             </a:xfrm>
-            <a:custGeom>
+            <a:prstGeom prst="rect">
               <a:avLst/>
-              <a:pathLst>
-                <a:path w="7799693" h="0">
-                  <a:moveTo>
-                    <a:pt x="0" y="0"/>
-                  </a:moveTo>
-                  <a:lnTo>
-                    <a:pt x="7799693" y="0"/>
-                  </a:lnTo>
-                  <a:lnTo>
-                    <a:pt x="7799693" y="0"/>
-                  </a:lnTo>
-                </a:path>
-              </a:pathLst>
-            </a:custGeom>
-            <a:ln w="6775" cap="flat">
+            </a:prstGeom>
+            <a:solidFill>
+              <a:srgbClr val="FFFFFF">
+                <a:alpha val="100000"/>
+              </a:srgbClr>
+            </a:solidFill>
+            <a:ln w="13550" cap="rnd">
               <a:solidFill>
-                <a:srgbClr val="EBEBEB">
+                <a:srgbClr val="FFFFFF">
                   <a:alpha val="100000"/>
                 </a:srgbClr>
               </a:solidFill>
@@ -2314,21 +2306,21 @@
           </p:nvSpPr>
           <p:spPr>
             <a:xfrm>
-              <a:off x="817517" y="4313054"/>
-              <a:ext cx="7799693" cy="0"/>
+              <a:off x="887106" y="3250627"/>
+              <a:ext cx="7660515" cy="0"/>
             </a:xfrm>
             <a:custGeom>
               <a:avLst/>
               <a:pathLst>
-                <a:path w="7799693" h="0">
+                <a:path w="7660515" h="0">
                   <a:moveTo>
                     <a:pt x="0" y="0"/>
                   </a:moveTo>
                   <a:lnTo>
-                    <a:pt x="7799693" y="0"/>
-                  </a:lnTo>
-                  <a:lnTo>
-                    <a:pt x="7799693" y="0"/>
+                    <a:pt x="7660515" y="0"/>
+                  </a:lnTo>
+                  <a:lnTo>
+                    <a:pt x="7660515" y="0"/>
                   </a:lnTo>
                 </a:path>
               </a:pathLst>
@@ -2357,21 +2349,21 @@
           </p:nvSpPr>
           <p:spPr>
             <a:xfrm>
-              <a:off x="817517" y="3483591"/>
-              <a:ext cx="7799693" cy="0"/>
+              <a:off x="887106" y="2951293"/>
+              <a:ext cx="7660515" cy="0"/>
             </a:xfrm>
             <a:custGeom>
               <a:avLst/>
               <a:pathLst>
-                <a:path w="7799693" h="0">
+                <a:path w="7660515" h="0">
                   <a:moveTo>
                     <a:pt x="0" y="0"/>
                   </a:moveTo>
                   <a:lnTo>
-                    <a:pt x="7799693" y="0"/>
-                  </a:lnTo>
-                  <a:lnTo>
-                    <a:pt x="7799693" y="0"/>
+                    <a:pt x="7660515" y="0"/>
+                  </a:lnTo>
+                  <a:lnTo>
+                    <a:pt x="7660515" y="0"/>
                   </a:lnTo>
                 </a:path>
               </a:pathLst>
@@ -2400,21 +2392,21 @@
           </p:nvSpPr>
           <p:spPr>
             <a:xfrm>
-              <a:off x="817517" y="2654127"/>
-              <a:ext cx="7799693" cy="0"/>
+              <a:off x="887106" y="2651959"/>
+              <a:ext cx="7660515" cy="0"/>
             </a:xfrm>
             <a:custGeom>
               <a:avLst/>
               <a:pathLst>
-                <a:path w="7799693" h="0">
+                <a:path w="7660515" h="0">
                   <a:moveTo>
                     <a:pt x="0" y="0"/>
                   </a:moveTo>
                   <a:lnTo>
-                    <a:pt x="7799693" y="0"/>
-                  </a:lnTo>
-                  <a:lnTo>
-                    <a:pt x="7799693" y="0"/>
+                    <a:pt x="7660515" y="0"/>
+                  </a:lnTo>
+                  <a:lnTo>
+                    <a:pt x="7660515" y="0"/>
                   </a:lnTo>
                 </a:path>
               </a:pathLst>
@@ -2443,21 +2435,21 @@
           </p:nvSpPr>
           <p:spPr>
             <a:xfrm>
-              <a:off x="1344837" y="2073503"/>
-              <a:ext cx="0" cy="3649639"/>
+              <a:off x="887106" y="2352625"/>
+              <a:ext cx="7660515" cy="0"/>
             </a:xfrm>
             <a:custGeom>
               <a:avLst/>
               <a:pathLst>
-                <a:path w="0" h="3649639">
+                <a:path w="7660515" h="0">
                   <a:moveTo>
-                    <a:pt x="0" y="3649639"/>
+                    <a:pt x="0" y="0"/>
                   </a:moveTo>
                   <a:lnTo>
-                    <a:pt x="0" y="0"/>
-                  </a:lnTo>
-                  <a:lnTo>
-                    <a:pt x="0" y="0"/>
+                    <a:pt x="7660515" y="0"/>
+                  </a:lnTo>
+                  <a:lnTo>
+                    <a:pt x="7660515" y="0"/>
                   </a:lnTo>
                 </a:path>
               </a:pathLst>
@@ -2486,15 +2478,15 @@
           </p:nvSpPr>
           <p:spPr>
             <a:xfrm>
-              <a:off x="3085958" y="2073503"/>
-              <a:ext cx="0" cy="3649639"/>
+              <a:off x="1405017" y="2143092"/>
+              <a:ext cx="0" cy="1317069"/>
             </a:xfrm>
             <a:custGeom>
               <a:avLst/>
               <a:pathLst>
-                <a:path w="0" h="3649639">
+                <a:path w="0" h="1317069">
                   <a:moveTo>
-                    <a:pt x="0" y="3649639"/>
+                    <a:pt x="0" y="1317069"/>
                   </a:moveTo>
                   <a:lnTo>
                     <a:pt x="0" y="0"/>
@@ -2529,15 +2521,15 @@
           </p:nvSpPr>
           <p:spPr>
             <a:xfrm>
-              <a:off x="4827079" y="2073503"/>
-              <a:ext cx="0" cy="3649639"/>
+              <a:off x="3115069" y="2143092"/>
+              <a:ext cx="0" cy="1317069"/>
             </a:xfrm>
             <a:custGeom>
               <a:avLst/>
               <a:pathLst>
-                <a:path w="0" h="3649639">
+                <a:path w="0" h="1317069">
                   <a:moveTo>
-                    <a:pt x="0" y="3649639"/>
+                    <a:pt x="0" y="1317069"/>
                   </a:moveTo>
                   <a:lnTo>
                     <a:pt x="0" y="0"/>
@@ -2572,15 +2564,15 @@
           </p:nvSpPr>
           <p:spPr>
             <a:xfrm>
-              <a:off x="6568199" y="2073503"/>
-              <a:ext cx="0" cy="3649639"/>
+              <a:off x="4825121" y="2143092"/>
+              <a:ext cx="0" cy="1317069"/>
             </a:xfrm>
             <a:custGeom>
               <a:avLst/>
               <a:pathLst>
-                <a:path w="0" h="3649639">
+                <a:path w="0" h="1317069">
                   <a:moveTo>
-                    <a:pt x="0" y="3649639"/>
+                    <a:pt x="0" y="1317069"/>
                   </a:moveTo>
                   <a:lnTo>
                     <a:pt x="0" y="0"/>
@@ -2615,15 +2607,15 @@
           </p:nvSpPr>
           <p:spPr>
             <a:xfrm>
-              <a:off x="8309320" y="2073503"/>
-              <a:ext cx="0" cy="3649639"/>
+              <a:off x="6535173" y="2143092"/>
+              <a:ext cx="0" cy="1317069"/>
             </a:xfrm>
             <a:custGeom>
               <a:avLst/>
               <a:pathLst>
-                <a:path w="0" h="3649639">
+                <a:path w="0" h="1317069">
                   <a:moveTo>
-                    <a:pt x="0" y="3649639"/>
+                    <a:pt x="0" y="1317069"/>
                   </a:moveTo>
                   <a:lnTo>
                     <a:pt x="0" y="0"/>
@@ -2658,26 +2650,26 @@
           </p:nvSpPr>
           <p:spPr>
             <a:xfrm>
-              <a:off x="817517" y="5557249"/>
-              <a:ext cx="7799693" cy="0"/>
+              <a:off x="8245225" y="2143092"/>
+              <a:ext cx="0" cy="1317069"/>
             </a:xfrm>
             <a:custGeom>
               <a:avLst/>
               <a:pathLst>
-                <a:path w="7799693" h="0">
+                <a:path w="0" h="1317069">
                   <a:moveTo>
+                    <a:pt x="0" y="1317069"/>
+                  </a:moveTo>
+                  <a:lnTo>
                     <a:pt x="0" y="0"/>
-                  </a:moveTo>
-                  <a:lnTo>
-                    <a:pt x="7799693" y="0"/>
-                  </a:lnTo>
-                  <a:lnTo>
-                    <a:pt x="7799693" y="0"/>
+                  </a:lnTo>
+                  <a:lnTo>
+                    <a:pt x="0" y="0"/>
                   </a:lnTo>
                 </a:path>
               </a:pathLst>
             </a:custGeom>
-            <a:ln w="13550" cap="flat">
+            <a:ln w="6775" cap="flat">
               <a:solidFill>
                 <a:srgbClr val="EBEBEB">
                   <a:alpha val="100000"/>
@@ -2701,21 +2693,21 @@
           </p:nvSpPr>
           <p:spPr>
             <a:xfrm>
-              <a:off x="817517" y="4727786"/>
-              <a:ext cx="7799693" cy="0"/>
+              <a:off x="887106" y="3400294"/>
+              <a:ext cx="7660515" cy="0"/>
             </a:xfrm>
             <a:custGeom>
               <a:avLst/>
               <a:pathLst>
-                <a:path w="7799693" h="0">
+                <a:path w="7660515" h="0">
                   <a:moveTo>
                     <a:pt x="0" y="0"/>
                   </a:moveTo>
                   <a:lnTo>
-                    <a:pt x="7799693" y="0"/>
-                  </a:lnTo>
-                  <a:lnTo>
-                    <a:pt x="7799693" y="0"/>
+                    <a:pt x="7660515" y="0"/>
+                  </a:lnTo>
+                  <a:lnTo>
+                    <a:pt x="7660515" y="0"/>
                   </a:lnTo>
                 </a:path>
               </a:pathLst>
@@ -2744,21 +2736,21 @@
           </p:nvSpPr>
           <p:spPr>
             <a:xfrm>
-              <a:off x="817517" y="3898322"/>
-              <a:ext cx="7799693" cy="0"/>
+              <a:off x="887106" y="3100960"/>
+              <a:ext cx="7660515" cy="0"/>
             </a:xfrm>
             <a:custGeom>
               <a:avLst/>
               <a:pathLst>
-                <a:path w="7799693" h="0">
+                <a:path w="7660515" h="0">
                   <a:moveTo>
                     <a:pt x="0" y="0"/>
                   </a:moveTo>
                   <a:lnTo>
-                    <a:pt x="7799693" y="0"/>
-                  </a:lnTo>
-                  <a:lnTo>
-                    <a:pt x="7799693" y="0"/>
+                    <a:pt x="7660515" y="0"/>
+                  </a:lnTo>
+                  <a:lnTo>
+                    <a:pt x="7660515" y="0"/>
                   </a:lnTo>
                 </a:path>
               </a:pathLst>
@@ -2787,21 +2779,21 @@
           </p:nvSpPr>
           <p:spPr>
             <a:xfrm>
-              <a:off x="817517" y="3068859"/>
-              <a:ext cx="7799693" cy="0"/>
+              <a:off x="887106" y="2801626"/>
+              <a:ext cx="7660515" cy="0"/>
             </a:xfrm>
             <a:custGeom>
               <a:avLst/>
               <a:pathLst>
-                <a:path w="7799693" h="0">
+                <a:path w="7660515" h="0">
                   <a:moveTo>
                     <a:pt x="0" y="0"/>
                   </a:moveTo>
                   <a:lnTo>
-                    <a:pt x="7799693" y="0"/>
-                  </a:lnTo>
-                  <a:lnTo>
-                    <a:pt x="7799693" y="0"/>
+                    <a:pt x="7660515" y="0"/>
+                  </a:lnTo>
+                  <a:lnTo>
+                    <a:pt x="7660515" y="0"/>
                   </a:lnTo>
                 </a:path>
               </a:pathLst>
@@ -2830,21 +2822,21 @@
           </p:nvSpPr>
           <p:spPr>
             <a:xfrm>
-              <a:off x="817517" y="2239395"/>
-              <a:ext cx="7799693" cy="0"/>
+              <a:off x="887106" y="2502292"/>
+              <a:ext cx="7660515" cy="0"/>
             </a:xfrm>
             <a:custGeom>
               <a:avLst/>
               <a:pathLst>
-                <a:path w="7799693" h="0">
+                <a:path w="7660515" h="0">
                   <a:moveTo>
                     <a:pt x="0" y="0"/>
                   </a:moveTo>
                   <a:lnTo>
-                    <a:pt x="7799693" y="0"/>
-                  </a:lnTo>
-                  <a:lnTo>
-                    <a:pt x="7799693" y="0"/>
+                    <a:pt x="7660515" y="0"/>
+                  </a:lnTo>
+                  <a:lnTo>
+                    <a:pt x="7660515" y="0"/>
                   </a:lnTo>
                 </a:path>
               </a:pathLst>
@@ -2873,21 +2865,21 @@
           </p:nvSpPr>
           <p:spPr>
             <a:xfrm>
-              <a:off x="2215398" y="2073503"/>
-              <a:ext cx="0" cy="3649639"/>
+              <a:off x="887106" y="2202958"/>
+              <a:ext cx="7660515" cy="0"/>
             </a:xfrm>
             <a:custGeom>
               <a:avLst/>
               <a:pathLst>
-                <a:path w="0" h="3649639">
+                <a:path w="7660515" h="0">
                   <a:moveTo>
-                    <a:pt x="0" y="3649639"/>
+                    <a:pt x="0" y="0"/>
                   </a:moveTo>
                   <a:lnTo>
-                    <a:pt x="0" y="0"/>
-                  </a:lnTo>
-                  <a:lnTo>
-                    <a:pt x="0" y="0"/>
+                    <a:pt x="7660515" y="0"/>
+                  </a:lnTo>
+                  <a:lnTo>
+                    <a:pt x="7660515" y="0"/>
                   </a:lnTo>
                 </a:path>
               </a:pathLst>
@@ -2916,15 +2908,15 @@
           </p:nvSpPr>
           <p:spPr>
             <a:xfrm>
-              <a:off x="3956518" y="2073503"/>
-              <a:ext cx="0" cy="3649639"/>
+              <a:off x="2260043" y="2143092"/>
+              <a:ext cx="0" cy="1317069"/>
             </a:xfrm>
             <a:custGeom>
               <a:avLst/>
               <a:pathLst>
-                <a:path w="0" h="3649639">
+                <a:path w="0" h="1317069">
                   <a:moveTo>
-                    <a:pt x="0" y="3649639"/>
+                    <a:pt x="0" y="1317069"/>
                   </a:moveTo>
                   <a:lnTo>
                     <a:pt x="0" y="0"/>
@@ -2959,15 +2951,15 @@
           </p:nvSpPr>
           <p:spPr>
             <a:xfrm>
-              <a:off x="5697639" y="2073503"/>
-              <a:ext cx="0" cy="3649639"/>
+              <a:off x="3970095" y="2143092"/>
+              <a:ext cx="0" cy="1317069"/>
             </a:xfrm>
             <a:custGeom>
               <a:avLst/>
               <a:pathLst>
-                <a:path w="0" h="3649639">
+                <a:path w="0" h="1317069">
                   <a:moveTo>
-                    <a:pt x="0" y="3649639"/>
+                    <a:pt x="0" y="1317069"/>
                   </a:moveTo>
                   <a:lnTo>
                     <a:pt x="0" y="0"/>
@@ -3002,15 +2994,15 @@
           </p:nvSpPr>
           <p:spPr>
             <a:xfrm>
-              <a:off x="7438760" y="2073503"/>
-              <a:ext cx="0" cy="3649639"/>
+              <a:off x="5680147" y="2143092"/>
+              <a:ext cx="0" cy="1317069"/>
             </a:xfrm>
             <a:custGeom>
               <a:avLst/>
               <a:pathLst>
-                <a:path w="0" h="3649639">
+                <a:path w="0" h="1317069">
                   <a:moveTo>
-                    <a:pt x="0" y="3649639"/>
+                    <a:pt x="0" y="1317069"/>
                   </a:moveTo>
                   <a:lnTo>
                     <a:pt x="0" y="0"/>
@@ -3039,618 +3031,661 @@
         </p:sp>
         <p:sp>
           <p:nvSpPr>
-            <p:cNvPr id="22" name="pg22"/>
+            <p:cNvPr id="22" name="pl22"/>
             <p:cNvSpPr/>
             <p:nvPr/>
           </p:nvSpPr>
           <p:spPr>
             <a:xfrm>
-              <a:off x="1172049" y="2109537"/>
-              <a:ext cx="7090630" cy="3312235"/>
+              <a:off x="7390199" y="2143092"/>
+              <a:ext cx="0" cy="1317069"/>
             </a:xfrm>
             <a:custGeom>
               <a:avLst/>
               <a:pathLst>
-                <a:path w="7090630" h="3312235">
+                <a:path w="0" h="1317069">
+                  <a:moveTo>
+                    <a:pt x="0" y="1317069"/>
+                  </a:moveTo>
+                  <a:lnTo>
+                    <a:pt x="0" y="0"/>
+                  </a:lnTo>
+                  <a:lnTo>
+                    <a:pt x="0" y="0"/>
+                  </a:lnTo>
+                </a:path>
+              </a:pathLst>
+            </a:custGeom>
+            <a:ln w="13550" cap="flat">
+              <a:solidFill>
+                <a:srgbClr val="EBEBEB">
+                  <a:alpha val="100000"/>
+                </a:srgbClr>
+              </a:solidFill>
+              <a:prstDash val="solid"/>
+              <a:round/>
+            </a:ln>
+          </p:spPr>
+          <p:txBody>
+            <a:bodyPr/>
+            <a:lstStyle/>
+            <a:p/>
+          </p:txBody>
+        </p:sp>
+        <p:sp>
+          <p:nvSpPr>
+            <p:cNvPr id="23" name="pg23"/>
+            <p:cNvSpPr/>
+            <p:nvPr/>
+          </p:nvSpPr>
+          <p:spPr>
+            <a:xfrm>
+              <a:off x="1235312" y="2156095"/>
+              <a:ext cx="6964104" cy="1195307"/>
+            </a:xfrm>
+            <a:custGeom>
+              <a:avLst/>
+              <a:pathLst>
+                <a:path w="6964104" h="1195307">
                   <a:moveTo>
                     <a:pt x="0" y="0"/>
                   </a:moveTo>
                   <a:lnTo>
-                    <a:pt x="71622" y="110895"/>
-                  </a:lnTo>
-                  <a:lnTo>
-                    <a:pt x="143245" y="218223"/>
-                  </a:lnTo>
-                  <a:lnTo>
-                    <a:pt x="214867" y="322099"/>
-                  </a:lnTo>
-                  <a:lnTo>
-                    <a:pt x="286490" y="422634"/>
-                  </a:lnTo>
-                  <a:lnTo>
-                    <a:pt x="358112" y="519936"/>
-                  </a:lnTo>
-                  <a:lnTo>
-                    <a:pt x="429735" y="614107"/>
-                  </a:lnTo>
-                  <a:lnTo>
-                    <a:pt x="501357" y="705250"/>
-                  </a:lnTo>
-                  <a:lnTo>
-                    <a:pt x="572980" y="793461"/>
-                  </a:lnTo>
-                  <a:lnTo>
-                    <a:pt x="644602" y="878835"/>
-                  </a:lnTo>
-                  <a:lnTo>
-                    <a:pt x="716225" y="961462"/>
-                  </a:lnTo>
-                  <a:lnTo>
-                    <a:pt x="787847" y="1041432"/>
-                  </a:lnTo>
-                  <a:lnTo>
-                    <a:pt x="859470" y="1118830"/>
-                  </a:lnTo>
-                  <a:lnTo>
-                    <a:pt x="931092" y="1193738"/>
-                  </a:lnTo>
-                  <a:lnTo>
-                    <a:pt x="1002715" y="1266237"/>
-                  </a:lnTo>
-                  <a:lnTo>
-                    <a:pt x="1074337" y="1336404"/>
-                  </a:lnTo>
-                  <a:lnTo>
-                    <a:pt x="1145960" y="1404314"/>
-                  </a:lnTo>
-                  <a:lnTo>
-                    <a:pt x="1217582" y="1470040"/>
-                  </a:lnTo>
-                  <a:lnTo>
-                    <a:pt x="1289205" y="1533652"/>
-                  </a:lnTo>
-                  <a:lnTo>
-                    <a:pt x="1360827" y="1595217"/>
-                  </a:lnTo>
-                  <a:lnTo>
-                    <a:pt x="1432450" y="1654802"/>
-                  </a:lnTo>
-                  <a:lnTo>
-                    <a:pt x="1504073" y="1712471"/>
-                  </a:lnTo>
-                  <a:lnTo>
-                    <a:pt x="1575695" y="1768285"/>
-                  </a:lnTo>
-                  <a:lnTo>
-                    <a:pt x="1647318" y="1822304"/>
-                  </a:lnTo>
-                  <a:lnTo>
-                    <a:pt x="1718940" y="1874585"/>
-                  </a:lnTo>
-                  <a:lnTo>
-                    <a:pt x="1790563" y="1925184"/>
-                  </a:lnTo>
-                  <a:lnTo>
-                    <a:pt x="1862185" y="1974156"/>
-                  </a:lnTo>
-                  <a:lnTo>
-                    <a:pt x="1933808" y="2021553"/>
-                  </a:lnTo>
-                  <a:lnTo>
-                    <a:pt x="2005430" y="2067425"/>
-                  </a:lnTo>
-                  <a:lnTo>
-                    <a:pt x="2077053" y="2111822"/>
-                  </a:lnTo>
-                  <a:lnTo>
-                    <a:pt x="2148675" y="2154791"/>
-                  </a:lnTo>
-                  <a:lnTo>
-                    <a:pt x="2220298" y="2196378"/>
-                  </a:lnTo>
-                  <a:lnTo>
-                    <a:pt x="2291920" y="2236627"/>
-                  </a:lnTo>
-                  <a:lnTo>
-                    <a:pt x="2363543" y="2275581"/>
-                  </a:lnTo>
-                  <a:lnTo>
-                    <a:pt x="2435165" y="2313283"/>
-                  </a:lnTo>
-                  <a:lnTo>
-                    <a:pt x="2506788" y="2349771"/>
-                  </a:lnTo>
-                  <a:lnTo>
-                    <a:pt x="2578410" y="2385087"/>
-                  </a:lnTo>
-                  <a:lnTo>
-                    <a:pt x="2650033" y="2419266"/>
-                  </a:lnTo>
-                  <a:lnTo>
-                    <a:pt x="2721655" y="2452346"/>
-                  </a:lnTo>
-                  <a:lnTo>
-                    <a:pt x="2793278" y="2484362"/>
-                  </a:lnTo>
-                  <a:lnTo>
-                    <a:pt x="2864901" y="2515348"/>
-                  </a:lnTo>
-                  <a:lnTo>
-                    <a:pt x="2936523" y="2545337"/>
-                  </a:lnTo>
-                  <a:lnTo>
-                    <a:pt x="3008146" y="2574362"/>
-                  </a:lnTo>
-                  <a:lnTo>
-                    <a:pt x="3079768" y="2602453"/>
-                  </a:lnTo>
-                  <a:lnTo>
-                    <a:pt x="3151391" y="2617463"/>
-                  </a:lnTo>
-                  <a:lnTo>
-                    <a:pt x="3223013" y="2615602"/>
-                  </a:lnTo>
-                  <a:lnTo>
-                    <a:pt x="3294636" y="2613736"/>
-                  </a:lnTo>
-                  <a:lnTo>
-                    <a:pt x="3366258" y="2611867"/>
-                  </a:lnTo>
-                  <a:lnTo>
-                    <a:pt x="3437881" y="2609994"/>
-                  </a:lnTo>
-                  <a:lnTo>
-                    <a:pt x="3509503" y="2608116"/>
-                  </a:lnTo>
-                  <a:lnTo>
-                    <a:pt x="3581126" y="2606234"/>
-                  </a:lnTo>
-                  <a:lnTo>
-                    <a:pt x="3652748" y="2604348"/>
-                  </a:lnTo>
-                  <a:lnTo>
-                    <a:pt x="3724371" y="2602457"/>
-                  </a:lnTo>
-                  <a:lnTo>
-                    <a:pt x="3795993" y="2600562"/>
-                  </a:lnTo>
-                  <a:lnTo>
-                    <a:pt x="3867616" y="2598663"/>
-                  </a:lnTo>
-                  <a:lnTo>
-                    <a:pt x="3939238" y="2596760"/>
-                  </a:lnTo>
-                  <a:lnTo>
-                    <a:pt x="4010861" y="2594853"/>
-                  </a:lnTo>
-                  <a:lnTo>
-                    <a:pt x="4082483" y="2592941"/>
-                  </a:lnTo>
-                  <a:lnTo>
-                    <a:pt x="4154106" y="2591025"/>
-                  </a:lnTo>
-                  <a:lnTo>
-                    <a:pt x="4225729" y="2589105"/>
-                  </a:lnTo>
-                  <a:lnTo>
-                    <a:pt x="4297351" y="2587180"/>
-                  </a:lnTo>
-                  <a:lnTo>
-                    <a:pt x="4368974" y="2585251"/>
-                  </a:lnTo>
-                  <a:lnTo>
-                    <a:pt x="4440596" y="2583318"/>
-                  </a:lnTo>
-                  <a:lnTo>
-                    <a:pt x="4512219" y="2581380"/>
-                  </a:lnTo>
-                  <a:lnTo>
-                    <a:pt x="4583841" y="2579439"/>
-                  </a:lnTo>
-                  <a:lnTo>
-                    <a:pt x="4655464" y="2577492"/>
-                  </a:lnTo>
-                  <a:lnTo>
-                    <a:pt x="4727086" y="2575542"/>
-                  </a:lnTo>
-                  <a:lnTo>
-                    <a:pt x="4798709" y="2573587"/>
-                  </a:lnTo>
-                  <a:lnTo>
-                    <a:pt x="4870331" y="2571627"/>
-                  </a:lnTo>
-                  <a:lnTo>
-                    <a:pt x="4941954" y="2569663"/>
-                  </a:lnTo>
-                  <a:lnTo>
-                    <a:pt x="5013576" y="2567695"/>
-                  </a:lnTo>
-                  <a:lnTo>
-                    <a:pt x="5085199" y="2565723"/>
-                  </a:lnTo>
-                  <a:lnTo>
-                    <a:pt x="5156821" y="2563746"/>
-                  </a:lnTo>
-                  <a:lnTo>
-                    <a:pt x="5228444" y="2561764"/>
-                  </a:lnTo>
-                  <a:lnTo>
-                    <a:pt x="5300066" y="2559778"/>
-                  </a:lnTo>
-                  <a:lnTo>
-                    <a:pt x="5371689" y="2557788"/>
-                  </a:lnTo>
-                  <a:lnTo>
-                    <a:pt x="5443311" y="2555793"/>
-                  </a:lnTo>
-                  <a:lnTo>
-                    <a:pt x="5514934" y="2553794"/>
-                  </a:lnTo>
-                  <a:lnTo>
-                    <a:pt x="5586557" y="2551790"/>
-                  </a:lnTo>
-                  <a:lnTo>
-                    <a:pt x="5658179" y="2549782"/>
-                  </a:lnTo>
-                  <a:lnTo>
-                    <a:pt x="5729802" y="2547769"/>
-                  </a:lnTo>
-                  <a:lnTo>
-                    <a:pt x="5801424" y="2545752"/>
-                  </a:lnTo>
-                  <a:lnTo>
-                    <a:pt x="5873047" y="2543730"/>
-                  </a:lnTo>
-                  <a:lnTo>
-                    <a:pt x="5944669" y="2541704"/>
-                  </a:lnTo>
-                  <a:lnTo>
-                    <a:pt x="6016292" y="2539673"/>
-                  </a:lnTo>
-                  <a:lnTo>
-                    <a:pt x="6087914" y="2537638"/>
-                  </a:lnTo>
-                  <a:lnTo>
-                    <a:pt x="6159537" y="2535598"/>
-                  </a:lnTo>
-                  <a:lnTo>
-                    <a:pt x="6231159" y="2533553"/>
-                  </a:lnTo>
-                  <a:lnTo>
-                    <a:pt x="6302782" y="2531504"/>
-                  </a:lnTo>
-                  <a:lnTo>
-                    <a:pt x="6374404" y="2529450"/>
-                  </a:lnTo>
-                  <a:lnTo>
-                    <a:pt x="6446027" y="2527392"/>
-                  </a:lnTo>
-                  <a:lnTo>
-                    <a:pt x="6517649" y="2525329"/>
-                  </a:lnTo>
-                  <a:lnTo>
-                    <a:pt x="6589272" y="2523261"/>
-                  </a:lnTo>
-                  <a:lnTo>
-                    <a:pt x="6660894" y="2521189"/>
-                  </a:lnTo>
-                  <a:lnTo>
-                    <a:pt x="6732517" y="2519112"/>
-                  </a:lnTo>
-                  <a:lnTo>
-                    <a:pt x="6804139" y="2517031"/>
-                  </a:lnTo>
-                  <a:lnTo>
-                    <a:pt x="6875762" y="2514945"/>
-                  </a:lnTo>
-                  <a:lnTo>
-                    <a:pt x="6947385" y="2512854"/>
-                  </a:lnTo>
-                  <a:lnTo>
-                    <a:pt x="7019007" y="2510758"/>
-                  </a:lnTo>
-                  <a:lnTo>
-                    <a:pt x="7090630" y="2508658"/>
-                  </a:lnTo>
-                  <a:lnTo>
-                    <a:pt x="7090630" y="3312235"/>
-                  </a:lnTo>
-                  <a:lnTo>
-                    <a:pt x="7019007" y="3307733"/>
-                  </a:lnTo>
-                  <a:lnTo>
-                    <a:pt x="6947385" y="3303080"/>
-                  </a:lnTo>
-                  <a:lnTo>
-                    <a:pt x="6875762" y="3298274"/>
-                  </a:lnTo>
-                  <a:lnTo>
-                    <a:pt x="6804139" y="3293307"/>
-                  </a:lnTo>
-                  <a:lnTo>
-                    <a:pt x="6732517" y="3288176"/>
-                  </a:lnTo>
-                  <a:lnTo>
-                    <a:pt x="6660894" y="3282874"/>
-                  </a:lnTo>
-                  <a:lnTo>
-                    <a:pt x="6589272" y="3277396"/>
-                  </a:lnTo>
-                  <a:lnTo>
-                    <a:pt x="6517649" y="3271735"/>
-                  </a:lnTo>
-                  <a:lnTo>
-                    <a:pt x="6446027" y="3265887"/>
-                  </a:lnTo>
-                  <a:lnTo>
-                    <a:pt x="6374404" y="3259844"/>
-                  </a:lnTo>
-                  <a:lnTo>
-                    <a:pt x="6302782" y="3253601"/>
-                  </a:lnTo>
-                  <a:lnTo>
-                    <a:pt x="6231159" y="3247150"/>
-                  </a:lnTo>
-                  <a:lnTo>
-                    <a:pt x="6159537" y="3240484"/>
-                  </a:lnTo>
-                  <a:lnTo>
-                    <a:pt x="6087914" y="3233597"/>
-                  </a:lnTo>
-                  <a:lnTo>
-                    <a:pt x="6016292" y="3226481"/>
-                  </a:lnTo>
-                  <a:lnTo>
-                    <a:pt x="5944669" y="3219129"/>
-                  </a:lnTo>
-                  <a:lnTo>
-                    <a:pt x="5873047" y="3211532"/>
-                  </a:lnTo>
-                  <a:lnTo>
-                    <a:pt x="5801424" y="3203683"/>
-                  </a:lnTo>
-                  <a:lnTo>
-                    <a:pt x="5729802" y="3195573"/>
-                  </a:lnTo>
-                  <a:lnTo>
-                    <a:pt x="5658179" y="3187193"/>
-                  </a:lnTo>
-                  <a:lnTo>
-                    <a:pt x="5586557" y="3178535"/>
-                  </a:lnTo>
-                  <a:lnTo>
-                    <a:pt x="5514934" y="3169590"/>
-                  </a:lnTo>
-                  <a:lnTo>
-                    <a:pt x="5443311" y="3160346"/>
-                  </a:lnTo>
-                  <a:lnTo>
-                    <a:pt x="5371689" y="3150796"/>
-                  </a:lnTo>
-                  <a:lnTo>
-                    <a:pt x="5300066" y="3140929"/>
-                  </a:lnTo>
-                  <a:lnTo>
-                    <a:pt x="5228444" y="3130733"/>
-                  </a:lnTo>
-                  <a:lnTo>
-                    <a:pt x="5156821" y="3120198"/>
-                  </a:lnTo>
-                  <a:lnTo>
-                    <a:pt x="5085199" y="3109314"/>
-                  </a:lnTo>
-                  <a:lnTo>
-                    <a:pt x="5013576" y="3098068"/>
-                  </a:lnTo>
-                  <a:lnTo>
-                    <a:pt x="4941954" y="3086448"/>
-                  </a:lnTo>
-                  <a:lnTo>
-                    <a:pt x="4870331" y="3074441"/>
-                  </a:lnTo>
-                  <a:lnTo>
-                    <a:pt x="4798709" y="3062036"/>
-                  </a:lnTo>
-                  <a:lnTo>
-                    <a:pt x="4727086" y="3049219"/>
-                  </a:lnTo>
-                  <a:lnTo>
-                    <a:pt x="4655464" y="3035975"/>
-                  </a:lnTo>
-                  <a:lnTo>
-                    <a:pt x="4583841" y="3022292"/>
-                  </a:lnTo>
-                  <a:lnTo>
-                    <a:pt x="4512219" y="3008153"/>
-                  </a:lnTo>
-                  <a:lnTo>
-                    <a:pt x="4440596" y="2993545"/>
-                  </a:lnTo>
-                  <a:lnTo>
-                    <a:pt x="4368974" y="2978451"/>
-                  </a:lnTo>
-                  <a:lnTo>
-                    <a:pt x="4297351" y="2962856"/>
-                  </a:lnTo>
-                  <a:lnTo>
-                    <a:pt x="4225729" y="2946742"/>
-                  </a:lnTo>
-                  <a:lnTo>
-                    <a:pt x="4154106" y="2930093"/>
-                  </a:lnTo>
-                  <a:lnTo>
-                    <a:pt x="4082483" y="2912891"/>
-                  </a:lnTo>
-                  <a:lnTo>
-                    <a:pt x="4010861" y="2895116"/>
-                  </a:lnTo>
-                  <a:lnTo>
-                    <a:pt x="3939238" y="2876751"/>
-                  </a:lnTo>
-                  <a:lnTo>
-                    <a:pt x="3867616" y="2857776"/>
-                  </a:lnTo>
-                  <a:lnTo>
-                    <a:pt x="3795993" y="2838170"/>
-                  </a:lnTo>
-                  <a:lnTo>
-                    <a:pt x="3724371" y="2817913"/>
-                  </a:lnTo>
-                  <a:lnTo>
-                    <a:pt x="3652748" y="2796982"/>
-                  </a:lnTo>
-                  <a:lnTo>
-                    <a:pt x="3581126" y="2775356"/>
-                  </a:lnTo>
-                  <a:lnTo>
-                    <a:pt x="3509503" y="2753011"/>
-                  </a:lnTo>
-                  <a:lnTo>
-                    <a:pt x="3437881" y="2729923"/>
-                  </a:lnTo>
-                  <a:lnTo>
-                    <a:pt x="3366258" y="2706068"/>
-                  </a:lnTo>
-                  <a:lnTo>
-                    <a:pt x="3294636" y="2681421"/>
-                  </a:lnTo>
-                  <a:lnTo>
-                    <a:pt x="3223013" y="2655954"/>
-                  </a:lnTo>
-                  <a:lnTo>
-                    <a:pt x="3151391" y="2629641"/>
-                  </a:lnTo>
-                  <a:lnTo>
-                    <a:pt x="3079768" y="2619320"/>
-                  </a:lnTo>
-                  <a:lnTo>
-                    <a:pt x="3008146" y="2621172"/>
-                  </a:lnTo>
-                  <a:lnTo>
-                    <a:pt x="2936523" y="2623021"/>
-                  </a:lnTo>
-                  <a:lnTo>
-                    <a:pt x="2864901" y="2624865"/>
-                  </a:lnTo>
-                  <a:lnTo>
-                    <a:pt x="2793278" y="2626706"/>
-                  </a:lnTo>
-                  <a:lnTo>
-                    <a:pt x="2721655" y="2628542"/>
-                  </a:lnTo>
-                  <a:lnTo>
-                    <a:pt x="2650033" y="2630374"/>
-                  </a:lnTo>
-                  <a:lnTo>
-                    <a:pt x="2578410" y="2632202"/>
-                  </a:lnTo>
-                  <a:lnTo>
-                    <a:pt x="2506788" y="2634026"/>
-                  </a:lnTo>
-                  <a:lnTo>
-                    <a:pt x="2435165" y="2635846"/>
-                  </a:lnTo>
-                  <a:lnTo>
-                    <a:pt x="2363543" y="2637662"/>
-                  </a:lnTo>
-                  <a:lnTo>
-                    <a:pt x="2291920" y="2639473"/>
-                  </a:lnTo>
-                  <a:lnTo>
-                    <a:pt x="2220298" y="2641281"/>
-                  </a:lnTo>
-                  <a:lnTo>
-                    <a:pt x="2148675" y="2643084"/>
-                  </a:lnTo>
-                  <a:lnTo>
-                    <a:pt x="2077053" y="2644884"/>
-                  </a:lnTo>
-                  <a:lnTo>
-                    <a:pt x="2005430" y="2646680"/>
-                  </a:lnTo>
-                  <a:lnTo>
-                    <a:pt x="1933808" y="2648471"/>
-                  </a:lnTo>
-                  <a:lnTo>
-                    <a:pt x="1862185" y="2650259"/>
-                  </a:lnTo>
-                  <a:lnTo>
-                    <a:pt x="1790563" y="2652042"/>
-                  </a:lnTo>
-                  <a:lnTo>
-                    <a:pt x="1718940" y="2653822"/>
-                  </a:lnTo>
-                  <a:lnTo>
-                    <a:pt x="1647318" y="2655597"/>
-                  </a:lnTo>
-                  <a:lnTo>
-                    <a:pt x="1575695" y="2657369"/>
-                  </a:lnTo>
-                  <a:lnTo>
-                    <a:pt x="1504073" y="2659136"/>
-                  </a:lnTo>
-                  <a:lnTo>
-                    <a:pt x="1432450" y="2660900"/>
-                  </a:lnTo>
-                  <a:lnTo>
-                    <a:pt x="1360827" y="2662660"/>
-                  </a:lnTo>
-                  <a:lnTo>
-                    <a:pt x="1289205" y="2664416"/>
-                  </a:lnTo>
-                  <a:lnTo>
-                    <a:pt x="1217582" y="2666168"/>
-                  </a:lnTo>
-                  <a:lnTo>
-                    <a:pt x="1145960" y="2667915"/>
-                  </a:lnTo>
-                  <a:lnTo>
-                    <a:pt x="1074337" y="2669660"/>
-                  </a:lnTo>
-                  <a:lnTo>
-                    <a:pt x="1002715" y="2671400"/>
-                  </a:lnTo>
-                  <a:lnTo>
-                    <a:pt x="931092" y="2673136"/>
-                  </a:lnTo>
-                  <a:lnTo>
-                    <a:pt x="859470" y="2674868"/>
-                  </a:lnTo>
-                  <a:lnTo>
-                    <a:pt x="787847" y="2676597"/>
-                  </a:lnTo>
-                  <a:lnTo>
-                    <a:pt x="716225" y="2678321"/>
-                  </a:lnTo>
-                  <a:lnTo>
-                    <a:pt x="644602" y="2680042"/>
-                  </a:lnTo>
-                  <a:lnTo>
-                    <a:pt x="572980" y="2681759"/>
-                  </a:lnTo>
-                  <a:lnTo>
-                    <a:pt x="501357" y="2683472"/>
-                  </a:lnTo>
-                  <a:lnTo>
-                    <a:pt x="429735" y="2685181"/>
-                  </a:lnTo>
-                  <a:lnTo>
-                    <a:pt x="358112" y="2686887"/>
-                  </a:lnTo>
-                  <a:lnTo>
-                    <a:pt x="286490" y="2688588"/>
-                  </a:lnTo>
-                  <a:lnTo>
-                    <a:pt x="214867" y="2690286"/>
-                  </a:lnTo>
-                  <a:lnTo>
-                    <a:pt x="143245" y="2691980"/>
-                  </a:lnTo>
-                  <a:lnTo>
-                    <a:pt x="71622" y="2693670"/>
-                  </a:lnTo>
-                  <a:lnTo>
-                    <a:pt x="0" y="2695357"/>
+                    <a:pt x="70344" y="40019"/>
+                  </a:lnTo>
+                  <a:lnTo>
+                    <a:pt x="140688" y="78751"/>
+                  </a:lnTo>
+                  <a:lnTo>
+                    <a:pt x="211033" y="116238"/>
+                  </a:lnTo>
+                  <a:lnTo>
+                    <a:pt x="281377" y="152519"/>
+                  </a:lnTo>
+                  <a:lnTo>
+                    <a:pt x="351722" y="187632"/>
+                  </a:lnTo>
+                  <a:lnTo>
+                    <a:pt x="422066" y="221617"/>
+                  </a:lnTo>
+                  <a:lnTo>
+                    <a:pt x="492411" y="254508"/>
+                  </a:lnTo>
+                  <a:lnTo>
+                    <a:pt x="562755" y="286341"/>
+                  </a:lnTo>
+                  <a:lnTo>
+                    <a:pt x="633100" y="317150"/>
+                  </a:lnTo>
+                  <a:lnTo>
+                    <a:pt x="703444" y="346969"/>
+                  </a:lnTo>
+                  <a:lnTo>
+                    <a:pt x="773789" y="375828"/>
+                  </a:lnTo>
+                  <a:lnTo>
+                    <a:pt x="844133" y="403759"/>
+                  </a:lnTo>
+                  <a:lnTo>
+                    <a:pt x="914478" y="430792"/>
+                  </a:lnTo>
+                  <a:lnTo>
+                    <a:pt x="984822" y="456955"/>
+                  </a:lnTo>
+                  <a:lnTo>
+                    <a:pt x="1055167" y="482277"/>
+                  </a:lnTo>
+                  <a:lnTo>
+                    <a:pt x="1125511" y="506784"/>
+                  </a:lnTo>
+                  <a:lnTo>
+                    <a:pt x="1195856" y="530503"/>
+                  </a:lnTo>
+                  <a:lnTo>
+                    <a:pt x="1266200" y="553458"/>
+                  </a:lnTo>
+                  <a:lnTo>
+                    <a:pt x="1336545" y="575676"/>
+                  </a:lnTo>
+                  <a:lnTo>
+                    <a:pt x="1406889" y="597179"/>
+                  </a:lnTo>
+                  <a:lnTo>
+                    <a:pt x="1477234" y="617990"/>
+                  </a:lnTo>
+                  <a:lnTo>
+                    <a:pt x="1547578" y="638132"/>
+                  </a:lnTo>
+                  <a:lnTo>
+                    <a:pt x="1617923" y="657626"/>
+                  </a:lnTo>
+                  <a:lnTo>
+                    <a:pt x="1688267" y="676493"/>
+                  </a:lnTo>
+                  <a:lnTo>
+                    <a:pt x="1758612" y="694753"/>
+                  </a:lnTo>
+                  <a:lnTo>
+                    <a:pt x="1828956" y="712426"/>
+                  </a:lnTo>
+                  <a:lnTo>
+                    <a:pt x="1899301" y="729531"/>
+                  </a:lnTo>
+                  <a:lnTo>
+                    <a:pt x="1969645" y="746085"/>
+                  </a:lnTo>
+                  <a:lnTo>
+                    <a:pt x="2039990" y="762107"/>
+                  </a:lnTo>
+                  <a:lnTo>
+                    <a:pt x="2110334" y="777613"/>
+                  </a:lnTo>
+                  <a:lnTo>
+                    <a:pt x="2180679" y="792621"/>
+                  </a:lnTo>
+                  <a:lnTo>
+                    <a:pt x="2251023" y="807146"/>
+                  </a:lnTo>
+                  <a:lnTo>
+                    <a:pt x="2321368" y="821203"/>
+                  </a:lnTo>
+                  <a:lnTo>
+                    <a:pt x="2391712" y="834809"/>
+                  </a:lnTo>
+                  <a:lnTo>
+                    <a:pt x="2462057" y="847977"/>
+                  </a:lnTo>
+                  <a:lnTo>
+                    <a:pt x="2532401" y="860721"/>
+                  </a:lnTo>
+                  <a:lnTo>
+                    <a:pt x="2602746" y="873056"/>
+                  </a:lnTo>
+                  <a:lnTo>
+                    <a:pt x="2673090" y="884994"/>
+                  </a:lnTo>
+                  <a:lnTo>
+                    <a:pt x="2743435" y="896547"/>
+                  </a:lnTo>
+                  <a:lnTo>
+                    <a:pt x="2813779" y="907729"/>
+                  </a:lnTo>
+                  <a:lnTo>
+                    <a:pt x="2884124" y="918552"/>
+                  </a:lnTo>
+                  <a:lnTo>
+                    <a:pt x="2954468" y="929026"/>
+                  </a:lnTo>
+                  <a:lnTo>
+                    <a:pt x="3024813" y="939164"/>
+                  </a:lnTo>
+                  <a:lnTo>
+                    <a:pt x="3095157" y="944580"/>
+                  </a:lnTo>
+                  <a:lnTo>
+                    <a:pt x="3165502" y="943909"/>
+                  </a:lnTo>
+                  <a:lnTo>
+                    <a:pt x="3235846" y="943236"/>
+                  </a:lnTo>
+                  <a:lnTo>
+                    <a:pt x="3306191" y="942561"/>
+                  </a:lnTo>
+                  <a:lnTo>
+                    <a:pt x="3376535" y="941885"/>
+                  </a:lnTo>
+                  <a:lnTo>
+                    <a:pt x="3446880" y="941207"/>
+                  </a:lnTo>
+                  <a:lnTo>
+                    <a:pt x="3517224" y="940528"/>
+                  </a:lnTo>
+                  <a:lnTo>
+                    <a:pt x="3587569" y="939847"/>
+                  </a:lnTo>
+                  <a:lnTo>
+                    <a:pt x="3657913" y="939165"/>
+                  </a:lnTo>
+                  <a:lnTo>
+                    <a:pt x="3728257" y="938481"/>
+                  </a:lnTo>
+                  <a:lnTo>
+                    <a:pt x="3798602" y="937796"/>
+                  </a:lnTo>
+                  <a:lnTo>
+                    <a:pt x="3868946" y="937109"/>
+                  </a:lnTo>
+                  <a:lnTo>
+                    <a:pt x="3939291" y="936421"/>
+                  </a:lnTo>
+                  <a:lnTo>
+                    <a:pt x="4009635" y="935731"/>
+                  </a:lnTo>
+                  <a:lnTo>
+                    <a:pt x="4079980" y="935040"/>
+                  </a:lnTo>
+                  <a:lnTo>
+                    <a:pt x="4150324" y="934347"/>
+                  </a:lnTo>
+                  <a:lnTo>
+                    <a:pt x="4220669" y="933652"/>
+                  </a:lnTo>
+                  <a:lnTo>
+                    <a:pt x="4291013" y="932956"/>
+                  </a:lnTo>
+                  <a:lnTo>
+                    <a:pt x="4361358" y="932258"/>
+                  </a:lnTo>
+                  <a:lnTo>
+                    <a:pt x="4431702" y="931559"/>
+                  </a:lnTo>
+                  <a:lnTo>
+                    <a:pt x="4502047" y="930858"/>
+                  </a:lnTo>
+                  <a:lnTo>
+                    <a:pt x="4572391" y="930156"/>
+                  </a:lnTo>
+                  <a:lnTo>
+                    <a:pt x="4642736" y="929452"/>
+                  </a:lnTo>
+                  <a:lnTo>
+                    <a:pt x="4713080" y="928747"/>
+                  </a:lnTo>
+                  <a:lnTo>
+                    <a:pt x="4783425" y="928039"/>
+                  </a:lnTo>
+                  <a:lnTo>
+                    <a:pt x="4853769" y="927331"/>
+                  </a:lnTo>
+                  <a:lnTo>
+                    <a:pt x="4924114" y="926621"/>
+                  </a:lnTo>
+                  <a:lnTo>
+                    <a:pt x="4994458" y="925909"/>
+                  </a:lnTo>
+                  <a:lnTo>
+                    <a:pt x="5064803" y="925195"/>
+                  </a:lnTo>
+                  <a:lnTo>
+                    <a:pt x="5135147" y="924480"/>
+                  </a:lnTo>
+                  <a:lnTo>
+                    <a:pt x="5205492" y="923763"/>
+                  </a:lnTo>
+                  <a:lnTo>
+                    <a:pt x="5275836" y="923045"/>
+                  </a:lnTo>
+                  <a:lnTo>
+                    <a:pt x="5346181" y="922325"/>
+                  </a:lnTo>
+                  <a:lnTo>
+                    <a:pt x="5416525" y="921604"/>
+                  </a:lnTo>
+                  <a:lnTo>
+                    <a:pt x="5486870" y="920881"/>
+                  </a:lnTo>
+                  <a:lnTo>
+                    <a:pt x="5557214" y="920156"/>
+                  </a:lnTo>
+                  <a:lnTo>
+                    <a:pt x="5627559" y="919430"/>
+                  </a:lnTo>
+                  <a:lnTo>
+                    <a:pt x="5697903" y="918702"/>
+                  </a:lnTo>
+                  <a:lnTo>
+                    <a:pt x="5768248" y="917972"/>
+                  </a:lnTo>
+                  <a:lnTo>
+                    <a:pt x="5838592" y="917241"/>
+                  </a:lnTo>
+                  <a:lnTo>
+                    <a:pt x="5908937" y="916508"/>
+                  </a:lnTo>
+                  <a:lnTo>
+                    <a:pt x="5979281" y="915773"/>
+                  </a:lnTo>
+                  <a:lnTo>
+                    <a:pt x="6049626" y="915037"/>
+                  </a:lnTo>
+                  <a:lnTo>
+                    <a:pt x="6119970" y="914299"/>
+                  </a:lnTo>
+                  <a:lnTo>
+                    <a:pt x="6190315" y="913560"/>
+                  </a:lnTo>
+                  <a:lnTo>
+                    <a:pt x="6260659" y="912819"/>
+                  </a:lnTo>
+                  <a:lnTo>
+                    <a:pt x="6331004" y="912076"/>
+                  </a:lnTo>
+                  <a:lnTo>
+                    <a:pt x="6401348" y="911331"/>
+                  </a:lnTo>
+                  <a:lnTo>
+                    <a:pt x="6471693" y="910585"/>
+                  </a:lnTo>
+                  <a:lnTo>
+                    <a:pt x="6542037" y="909838"/>
+                  </a:lnTo>
+                  <a:lnTo>
+                    <a:pt x="6612382" y="909088"/>
+                  </a:lnTo>
+                  <a:lnTo>
+                    <a:pt x="6682726" y="908337"/>
+                  </a:lnTo>
+                  <a:lnTo>
+                    <a:pt x="6753071" y="907584"/>
+                  </a:lnTo>
+                  <a:lnTo>
+                    <a:pt x="6823415" y="906830"/>
+                  </a:lnTo>
+                  <a:lnTo>
+                    <a:pt x="6893760" y="906073"/>
+                  </a:lnTo>
+                  <a:lnTo>
+                    <a:pt x="6964104" y="905315"/>
+                  </a:lnTo>
+                  <a:lnTo>
+                    <a:pt x="6964104" y="1195307"/>
+                  </a:lnTo>
+                  <a:lnTo>
+                    <a:pt x="6893760" y="1193683"/>
+                  </a:lnTo>
+                  <a:lnTo>
+                    <a:pt x="6823415" y="1192004"/>
+                  </a:lnTo>
+                  <a:lnTo>
+                    <a:pt x="6753071" y="1190269"/>
+                  </a:lnTo>
+                  <a:lnTo>
+                    <a:pt x="6682726" y="1188477"/>
+                  </a:lnTo>
+                  <a:lnTo>
+                    <a:pt x="6612382" y="1186625"/>
+                  </a:lnTo>
+                  <a:lnTo>
+                    <a:pt x="6542037" y="1184712"/>
+                  </a:lnTo>
+                  <a:lnTo>
+                    <a:pt x="6471693" y="1182735"/>
+                  </a:lnTo>
+                  <a:lnTo>
+                    <a:pt x="6401348" y="1180692"/>
+                  </a:lnTo>
+                  <a:lnTo>
+                    <a:pt x="6331004" y="1178581"/>
+                  </a:lnTo>
+                  <a:lnTo>
+                    <a:pt x="6260659" y="1176401"/>
+                  </a:lnTo>
+                  <a:lnTo>
+                    <a:pt x="6190315" y="1174148"/>
+                  </a:lnTo>
+                  <a:lnTo>
+                    <a:pt x="6119970" y="1171820"/>
+                  </a:lnTo>
+                  <a:lnTo>
+                    <a:pt x="6049626" y="1169414"/>
+                  </a:lnTo>
+                  <a:lnTo>
+                    <a:pt x="5979281" y="1166929"/>
+                  </a:lnTo>
+                  <a:lnTo>
+                    <a:pt x="5908937" y="1164361"/>
+                  </a:lnTo>
+                  <a:lnTo>
+                    <a:pt x="5838592" y="1161708"/>
+                  </a:lnTo>
+                  <a:lnTo>
+                    <a:pt x="5768248" y="1158966"/>
+                  </a:lnTo>
+                  <a:lnTo>
+                    <a:pt x="5697903" y="1156134"/>
+                  </a:lnTo>
+                  <a:lnTo>
+                    <a:pt x="5627559" y="1153207"/>
+                  </a:lnTo>
+                  <a:lnTo>
+                    <a:pt x="5557214" y="1150183"/>
+                  </a:lnTo>
+                  <a:lnTo>
+                    <a:pt x="5486870" y="1147058"/>
+                  </a:lnTo>
+                  <a:lnTo>
+                    <a:pt x="5416525" y="1143830"/>
+                  </a:lnTo>
+                  <a:lnTo>
+                    <a:pt x="5346181" y="1140494"/>
+                  </a:lnTo>
+                  <a:lnTo>
+                    <a:pt x="5275836" y="1137048"/>
+                  </a:lnTo>
+                  <a:lnTo>
+                    <a:pt x="5205492" y="1133487"/>
+                  </a:lnTo>
+                  <a:lnTo>
+                    <a:pt x="5135147" y="1129808"/>
+                  </a:lnTo>
+                  <a:lnTo>
+                    <a:pt x="5064803" y="1126006"/>
+                  </a:lnTo>
+                  <a:lnTo>
+                    <a:pt x="4994458" y="1122078"/>
+                  </a:lnTo>
+                  <a:lnTo>
+                    <a:pt x="4924114" y="1118019"/>
+                  </a:lnTo>
+                  <a:lnTo>
+                    <a:pt x="4853769" y="1113826"/>
+                  </a:lnTo>
+                  <a:lnTo>
+                    <a:pt x="4783425" y="1109493"/>
+                  </a:lnTo>
+                  <a:lnTo>
+                    <a:pt x="4713080" y="1105016"/>
+                  </a:lnTo>
+                  <a:lnTo>
+                    <a:pt x="4642736" y="1100391"/>
+                  </a:lnTo>
+                  <a:lnTo>
+                    <a:pt x="4572391" y="1095612"/>
+                  </a:lnTo>
+                  <a:lnTo>
+                    <a:pt x="4502047" y="1090674"/>
+                  </a:lnTo>
+                  <a:lnTo>
+                    <a:pt x="4431702" y="1085571"/>
+                  </a:lnTo>
+                  <a:lnTo>
+                    <a:pt x="4361358" y="1080300"/>
+                  </a:lnTo>
+                  <a:lnTo>
+                    <a:pt x="4291013" y="1074853"/>
+                  </a:lnTo>
+                  <a:lnTo>
+                    <a:pt x="4220669" y="1069225"/>
+                  </a:lnTo>
+                  <a:lnTo>
+                    <a:pt x="4150324" y="1063410"/>
+                  </a:lnTo>
+                  <a:lnTo>
+                    <a:pt x="4079980" y="1057401"/>
+                  </a:lnTo>
+                  <a:lnTo>
+                    <a:pt x="4009635" y="1051193"/>
+                  </a:lnTo>
+                  <a:lnTo>
+                    <a:pt x="3939291" y="1044779"/>
+                  </a:lnTo>
+                  <a:lnTo>
+                    <a:pt x="3868946" y="1038152"/>
+                  </a:lnTo>
+                  <a:lnTo>
+                    <a:pt x="3798602" y="1031304"/>
+                  </a:lnTo>
+                  <a:lnTo>
+                    <a:pt x="3728257" y="1024229"/>
+                  </a:lnTo>
+                  <a:lnTo>
+                    <a:pt x="3657913" y="1016918"/>
+                  </a:lnTo>
+                  <a:lnTo>
+                    <a:pt x="3587569" y="1009365"/>
+                  </a:lnTo>
+                  <a:lnTo>
+                    <a:pt x="3517224" y="1001560"/>
+                  </a:lnTo>
+                  <a:lnTo>
+                    <a:pt x="3446880" y="993497"/>
+                  </a:lnTo>
+                  <a:lnTo>
+                    <a:pt x="3376535" y="985165"/>
+                  </a:lnTo>
+                  <a:lnTo>
+                    <a:pt x="3306191" y="976556"/>
+                  </a:lnTo>
+                  <a:lnTo>
+                    <a:pt x="3235846" y="967661"/>
+                  </a:lnTo>
+                  <a:lnTo>
+                    <a:pt x="3165502" y="958471"/>
+                  </a:lnTo>
+                  <a:lnTo>
+                    <a:pt x="3095157" y="948975"/>
+                  </a:lnTo>
+                  <a:lnTo>
+                    <a:pt x="3024813" y="945251"/>
+                  </a:lnTo>
+                  <a:lnTo>
+                    <a:pt x="2954468" y="945919"/>
+                  </a:lnTo>
+                  <a:lnTo>
+                    <a:pt x="2884124" y="946586"/>
+                  </a:lnTo>
+                  <a:lnTo>
+                    <a:pt x="2813779" y="947252"/>
+                  </a:lnTo>
+                  <a:lnTo>
+                    <a:pt x="2743435" y="947916"/>
+                  </a:lnTo>
+                  <a:lnTo>
+                    <a:pt x="2673090" y="948579"/>
+                  </a:lnTo>
+                  <a:lnTo>
+                    <a:pt x="2602746" y="949240"/>
+                  </a:lnTo>
+                  <a:lnTo>
+                    <a:pt x="2532401" y="949899"/>
+                  </a:lnTo>
+                  <a:lnTo>
+                    <a:pt x="2462057" y="950558"/>
+                  </a:lnTo>
+                  <a:lnTo>
+                    <a:pt x="2391712" y="951214"/>
+                  </a:lnTo>
+                  <a:lnTo>
+                    <a:pt x="2321368" y="951870"/>
+                  </a:lnTo>
+                  <a:lnTo>
+                    <a:pt x="2251023" y="952523"/>
+                  </a:lnTo>
+                  <a:lnTo>
+                    <a:pt x="2180679" y="953176"/>
+                  </a:lnTo>
+                  <a:lnTo>
+                    <a:pt x="2110334" y="953827"/>
+                  </a:lnTo>
+                  <a:lnTo>
+                    <a:pt x="2039990" y="954476"/>
+                  </a:lnTo>
+                  <a:lnTo>
+                    <a:pt x="1969645" y="955124"/>
+                  </a:lnTo>
+                  <a:lnTo>
+                    <a:pt x="1899301" y="955771"/>
+                  </a:lnTo>
+                  <a:lnTo>
+                    <a:pt x="1828956" y="956416"/>
+                  </a:lnTo>
+                  <a:lnTo>
+                    <a:pt x="1758612" y="957059"/>
+                  </a:lnTo>
+                  <a:lnTo>
+                    <a:pt x="1688267" y="957702"/>
+                  </a:lnTo>
+                  <a:lnTo>
+                    <a:pt x="1617923" y="958342"/>
+                  </a:lnTo>
+                  <a:lnTo>
+                    <a:pt x="1547578" y="958982"/>
+                  </a:lnTo>
+                  <a:lnTo>
+                    <a:pt x="1477234" y="959619"/>
+                  </a:lnTo>
+                  <a:lnTo>
+                    <a:pt x="1406889" y="960256"/>
+                  </a:lnTo>
+                  <a:lnTo>
+                    <a:pt x="1336545" y="960891"/>
+                  </a:lnTo>
+                  <a:lnTo>
+                    <a:pt x="1266200" y="961525"/>
+                  </a:lnTo>
+                  <a:lnTo>
+                    <a:pt x="1195856" y="962157"/>
+                  </a:lnTo>
+                  <a:lnTo>
+                    <a:pt x="1125511" y="962788"/>
+                  </a:lnTo>
+                  <a:lnTo>
+                    <a:pt x="1055167" y="963417"/>
+                  </a:lnTo>
+                  <a:lnTo>
+                    <a:pt x="984822" y="964045"/>
+                  </a:lnTo>
+                  <a:lnTo>
+                    <a:pt x="914478" y="964672"/>
+                  </a:lnTo>
+                  <a:lnTo>
+                    <a:pt x="844133" y="965297"/>
+                  </a:lnTo>
+                  <a:lnTo>
+                    <a:pt x="773789" y="965920"/>
+                  </a:lnTo>
+                  <a:lnTo>
+                    <a:pt x="703444" y="966543"/>
+                  </a:lnTo>
+                  <a:lnTo>
+                    <a:pt x="633100" y="967164"/>
+                  </a:lnTo>
+                  <a:lnTo>
+                    <a:pt x="562755" y="967783"/>
+                  </a:lnTo>
+                  <a:lnTo>
+                    <a:pt x="492411" y="968402"/>
+                  </a:lnTo>
+                  <a:lnTo>
+                    <a:pt x="422066" y="969018"/>
+                  </a:lnTo>
+                  <a:lnTo>
+                    <a:pt x="351722" y="969634"/>
+                  </a:lnTo>
+                  <a:lnTo>
+                    <a:pt x="281377" y="970248"/>
+                  </a:lnTo>
+                  <a:lnTo>
+                    <a:pt x="211033" y="970861"/>
+                  </a:lnTo>
+                  <a:lnTo>
+                    <a:pt x="140688" y="971472"/>
+                  </a:lnTo>
+                  <a:lnTo>
+                    <a:pt x="70344" y="972082"/>
+                  </a:lnTo>
+                  <a:lnTo>
+                    <a:pt x="0" y="972691"/>
                   </a:lnTo>
                   <a:close/>
                 </a:path>
@@ -3670,643 +3705,318 @@
         </p:sp>
         <p:sp>
           <p:nvSpPr>
-            <p:cNvPr id="23" name="pl23"/>
-            <p:cNvSpPr/>
-            <p:nvPr/>
-          </p:nvSpPr>
-          <p:spPr>
-            <a:xfrm>
-              <a:off x="1172049" y="2109537"/>
-              <a:ext cx="7090630" cy="2617463"/>
-            </a:xfrm>
-            <a:custGeom>
-              <a:avLst/>
-              <a:pathLst>
-                <a:path w="7090630" h="2617463">
-                  <a:moveTo>
-                    <a:pt x="0" y="0"/>
-                  </a:moveTo>
-                  <a:lnTo>
-                    <a:pt x="71622" y="110895"/>
-                  </a:lnTo>
-                  <a:lnTo>
-                    <a:pt x="143245" y="218223"/>
-                  </a:lnTo>
-                  <a:lnTo>
-                    <a:pt x="214867" y="322099"/>
-                  </a:lnTo>
-                  <a:lnTo>
-                    <a:pt x="286490" y="422634"/>
-                  </a:lnTo>
-                  <a:lnTo>
-                    <a:pt x="358112" y="519936"/>
-                  </a:lnTo>
-                  <a:lnTo>
-                    <a:pt x="429735" y="614107"/>
-                  </a:lnTo>
-                  <a:lnTo>
-                    <a:pt x="501357" y="705250"/>
-                  </a:lnTo>
-                  <a:lnTo>
-                    <a:pt x="572980" y="793461"/>
-                  </a:lnTo>
-                  <a:lnTo>
-                    <a:pt x="644602" y="878835"/>
-                  </a:lnTo>
-                  <a:lnTo>
-                    <a:pt x="716225" y="961462"/>
-                  </a:lnTo>
-                  <a:lnTo>
-                    <a:pt x="787847" y="1041432"/>
-                  </a:lnTo>
-                  <a:lnTo>
-                    <a:pt x="859470" y="1118830"/>
-                  </a:lnTo>
-                  <a:lnTo>
-                    <a:pt x="931092" y="1193738"/>
-                  </a:lnTo>
-                  <a:lnTo>
-                    <a:pt x="1002715" y="1266237"/>
-                  </a:lnTo>
-                  <a:lnTo>
-                    <a:pt x="1074337" y="1336404"/>
-                  </a:lnTo>
-                  <a:lnTo>
-                    <a:pt x="1145960" y="1404314"/>
-                  </a:lnTo>
-                  <a:lnTo>
-                    <a:pt x="1217582" y="1470040"/>
-                  </a:lnTo>
-                  <a:lnTo>
-                    <a:pt x="1289205" y="1533652"/>
-                  </a:lnTo>
-                  <a:lnTo>
-                    <a:pt x="1360827" y="1595217"/>
-                  </a:lnTo>
-                  <a:lnTo>
-                    <a:pt x="1432450" y="1654802"/>
-                  </a:lnTo>
-                  <a:lnTo>
-                    <a:pt x="1504073" y="1712471"/>
-                  </a:lnTo>
-                  <a:lnTo>
-                    <a:pt x="1575695" y="1768285"/>
-                  </a:lnTo>
-                  <a:lnTo>
-                    <a:pt x="1647318" y="1822304"/>
-                  </a:lnTo>
-                  <a:lnTo>
-                    <a:pt x="1718940" y="1874585"/>
-                  </a:lnTo>
-                  <a:lnTo>
-                    <a:pt x="1790563" y="1925184"/>
-                  </a:lnTo>
-                  <a:lnTo>
-                    <a:pt x="1862185" y="1974156"/>
-                  </a:lnTo>
-                  <a:lnTo>
-                    <a:pt x="1933808" y="2021553"/>
-                  </a:lnTo>
-                  <a:lnTo>
-                    <a:pt x="2005430" y="2067425"/>
-                  </a:lnTo>
-                  <a:lnTo>
-                    <a:pt x="2077053" y="2111822"/>
-                  </a:lnTo>
-                  <a:lnTo>
-                    <a:pt x="2148675" y="2154791"/>
-                  </a:lnTo>
-                  <a:lnTo>
-                    <a:pt x="2220298" y="2196378"/>
-                  </a:lnTo>
-                  <a:lnTo>
-                    <a:pt x="2291920" y="2236627"/>
-                  </a:lnTo>
-                  <a:lnTo>
-                    <a:pt x="2363543" y="2275581"/>
-                  </a:lnTo>
-                  <a:lnTo>
-                    <a:pt x="2435165" y="2313283"/>
-                  </a:lnTo>
-                  <a:lnTo>
-                    <a:pt x="2506788" y="2349771"/>
-                  </a:lnTo>
-                  <a:lnTo>
-                    <a:pt x="2578410" y="2385087"/>
-                  </a:lnTo>
-                  <a:lnTo>
-                    <a:pt x="2650033" y="2419266"/>
-                  </a:lnTo>
-                  <a:lnTo>
-                    <a:pt x="2721655" y="2452346"/>
-                  </a:lnTo>
-                  <a:lnTo>
-                    <a:pt x="2793278" y="2484362"/>
-                  </a:lnTo>
-                  <a:lnTo>
-                    <a:pt x="2864901" y="2515348"/>
-                  </a:lnTo>
-                  <a:lnTo>
-                    <a:pt x="2936523" y="2545337"/>
-                  </a:lnTo>
-                  <a:lnTo>
-                    <a:pt x="3008146" y="2574362"/>
-                  </a:lnTo>
-                  <a:lnTo>
-                    <a:pt x="3079768" y="2602453"/>
-                  </a:lnTo>
-                  <a:lnTo>
-                    <a:pt x="3151391" y="2617463"/>
-                  </a:lnTo>
-                  <a:lnTo>
-                    <a:pt x="3223013" y="2615602"/>
-                  </a:lnTo>
-                  <a:lnTo>
-                    <a:pt x="3294636" y="2613736"/>
-                  </a:lnTo>
-                  <a:lnTo>
-                    <a:pt x="3366258" y="2611867"/>
-                  </a:lnTo>
-                  <a:lnTo>
-                    <a:pt x="3437881" y="2609994"/>
-                  </a:lnTo>
-                  <a:lnTo>
-                    <a:pt x="3509503" y="2608116"/>
-                  </a:lnTo>
-                  <a:lnTo>
-                    <a:pt x="3581126" y="2606234"/>
-                  </a:lnTo>
-                  <a:lnTo>
-                    <a:pt x="3652748" y="2604348"/>
-                  </a:lnTo>
-                  <a:lnTo>
-                    <a:pt x="3724371" y="2602457"/>
-                  </a:lnTo>
-                  <a:lnTo>
-                    <a:pt x="3795993" y="2600562"/>
-                  </a:lnTo>
-                  <a:lnTo>
-                    <a:pt x="3867616" y="2598663"/>
-                  </a:lnTo>
-                  <a:lnTo>
-                    <a:pt x="3939238" y="2596760"/>
-                  </a:lnTo>
-                  <a:lnTo>
-                    <a:pt x="4010861" y="2594853"/>
-                  </a:lnTo>
-                  <a:lnTo>
-                    <a:pt x="4082483" y="2592941"/>
-                  </a:lnTo>
-                  <a:lnTo>
-                    <a:pt x="4154106" y="2591025"/>
-                  </a:lnTo>
-                  <a:lnTo>
-                    <a:pt x="4225729" y="2589105"/>
-                  </a:lnTo>
-                  <a:lnTo>
-                    <a:pt x="4297351" y="2587180"/>
-                  </a:lnTo>
-                  <a:lnTo>
-                    <a:pt x="4368974" y="2585251"/>
-                  </a:lnTo>
-                  <a:lnTo>
-                    <a:pt x="4440596" y="2583318"/>
-                  </a:lnTo>
-                  <a:lnTo>
-                    <a:pt x="4512219" y="2581380"/>
-                  </a:lnTo>
-                  <a:lnTo>
-                    <a:pt x="4583841" y="2579439"/>
-                  </a:lnTo>
-                  <a:lnTo>
-                    <a:pt x="4655464" y="2577492"/>
-                  </a:lnTo>
-                  <a:lnTo>
-                    <a:pt x="4727086" y="2575542"/>
-                  </a:lnTo>
-                  <a:lnTo>
-                    <a:pt x="4798709" y="2573587"/>
-                  </a:lnTo>
-                  <a:lnTo>
-                    <a:pt x="4870331" y="2571627"/>
-                  </a:lnTo>
-                  <a:lnTo>
-                    <a:pt x="4941954" y="2569663"/>
-                  </a:lnTo>
-                  <a:lnTo>
-                    <a:pt x="5013576" y="2567695"/>
-                  </a:lnTo>
-                  <a:lnTo>
-                    <a:pt x="5085199" y="2565723"/>
-                  </a:lnTo>
-                  <a:lnTo>
-                    <a:pt x="5156821" y="2563746"/>
-                  </a:lnTo>
-                  <a:lnTo>
-                    <a:pt x="5228444" y="2561764"/>
-                  </a:lnTo>
-                  <a:lnTo>
-                    <a:pt x="5300066" y="2559778"/>
-                  </a:lnTo>
-                  <a:lnTo>
-                    <a:pt x="5371689" y="2557788"/>
-                  </a:lnTo>
-                  <a:lnTo>
-                    <a:pt x="5443311" y="2555793"/>
-                  </a:lnTo>
-                  <a:lnTo>
-                    <a:pt x="5514934" y="2553794"/>
-                  </a:lnTo>
-                  <a:lnTo>
-                    <a:pt x="5586557" y="2551790"/>
-                  </a:lnTo>
-                  <a:lnTo>
-                    <a:pt x="5658179" y="2549782"/>
-                  </a:lnTo>
-                  <a:lnTo>
-                    <a:pt x="5729802" y="2547769"/>
-                  </a:lnTo>
-                  <a:lnTo>
-                    <a:pt x="5801424" y="2545752"/>
-                  </a:lnTo>
-                  <a:lnTo>
-                    <a:pt x="5873047" y="2543730"/>
-                  </a:lnTo>
-                  <a:lnTo>
-                    <a:pt x="5944669" y="2541704"/>
-                  </a:lnTo>
-                  <a:lnTo>
-                    <a:pt x="6016292" y="2539673"/>
-                  </a:lnTo>
-                  <a:lnTo>
-                    <a:pt x="6087914" y="2537638"/>
-                  </a:lnTo>
-                  <a:lnTo>
-                    <a:pt x="6159537" y="2535598"/>
-                  </a:lnTo>
-                  <a:lnTo>
-                    <a:pt x="6231159" y="2533553"/>
-                  </a:lnTo>
-                  <a:lnTo>
-                    <a:pt x="6302782" y="2531504"/>
-                  </a:lnTo>
-                  <a:lnTo>
-                    <a:pt x="6374404" y="2529450"/>
-                  </a:lnTo>
-                  <a:lnTo>
-                    <a:pt x="6446027" y="2527392"/>
-                  </a:lnTo>
-                  <a:lnTo>
-                    <a:pt x="6517649" y="2525329"/>
-                  </a:lnTo>
-                  <a:lnTo>
-                    <a:pt x="6589272" y="2523261"/>
-                  </a:lnTo>
-                  <a:lnTo>
-                    <a:pt x="6660894" y="2521189"/>
-                  </a:lnTo>
-                  <a:lnTo>
-                    <a:pt x="6732517" y="2519112"/>
-                  </a:lnTo>
-                  <a:lnTo>
-                    <a:pt x="6804139" y="2517031"/>
-                  </a:lnTo>
-                  <a:lnTo>
-                    <a:pt x="6875762" y="2514945"/>
-                  </a:lnTo>
-                  <a:lnTo>
-                    <a:pt x="6947385" y="2512854"/>
-                  </a:lnTo>
-                  <a:lnTo>
-                    <a:pt x="7019007" y="2510758"/>
-                  </a:lnTo>
-                  <a:lnTo>
-                    <a:pt x="7090630" y="2508658"/>
-                  </a:lnTo>
-                </a:path>
-              </a:pathLst>
-            </a:custGeom>
-          </p:spPr>
-          <p:txBody>
-            <a:bodyPr/>
-            <a:lstStyle/>
-            <a:p/>
-          </p:txBody>
-        </p:sp>
-        <p:sp>
-          <p:nvSpPr>
             <p:cNvPr id="24" name="pl24"/>
             <p:cNvSpPr/>
             <p:nvPr/>
           </p:nvSpPr>
           <p:spPr>
             <a:xfrm>
-              <a:off x="1172049" y="4728857"/>
-              <a:ext cx="7090630" cy="692915"/>
+              <a:off x="1235312" y="2156095"/>
+              <a:ext cx="6964104" cy="944580"/>
             </a:xfrm>
             <a:custGeom>
               <a:avLst/>
               <a:pathLst>
-                <a:path w="7090630" h="692915">
+                <a:path w="6964104" h="944580">
                   <a:moveTo>
-                    <a:pt x="7090630" y="692915"/>
+                    <a:pt x="0" y="0"/>
                   </a:moveTo>
                   <a:lnTo>
-                    <a:pt x="7019007" y="688412"/>
-                  </a:lnTo>
-                  <a:lnTo>
-                    <a:pt x="6947385" y="683760"/>
-                  </a:lnTo>
-                  <a:lnTo>
-                    <a:pt x="6875762" y="678954"/>
-                  </a:lnTo>
-                  <a:lnTo>
-                    <a:pt x="6804139" y="673987"/>
-                  </a:lnTo>
-                  <a:lnTo>
-                    <a:pt x="6732517" y="668856"/>
-                  </a:lnTo>
-                  <a:lnTo>
-                    <a:pt x="6660894" y="663554"/>
-                  </a:lnTo>
-                  <a:lnTo>
-                    <a:pt x="6589272" y="658076"/>
-                  </a:lnTo>
-                  <a:lnTo>
-                    <a:pt x="6517649" y="652415"/>
-                  </a:lnTo>
-                  <a:lnTo>
-                    <a:pt x="6446027" y="646567"/>
-                  </a:lnTo>
-                  <a:lnTo>
-                    <a:pt x="6374404" y="640524"/>
-                  </a:lnTo>
-                  <a:lnTo>
-                    <a:pt x="6302782" y="634281"/>
-                  </a:lnTo>
-                  <a:lnTo>
-                    <a:pt x="6231159" y="627829"/>
-                  </a:lnTo>
-                  <a:lnTo>
-                    <a:pt x="6159537" y="621164"/>
-                  </a:lnTo>
-                  <a:lnTo>
-                    <a:pt x="6087914" y="614277"/>
-                  </a:lnTo>
-                  <a:lnTo>
-                    <a:pt x="6016292" y="607161"/>
-                  </a:lnTo>
-                  <a:lnTo>
-                    <a:pt x="5944669" y="599809"/>
-                  </a:lnTo>
-                  <a:lnTo>
-                    <a:pt x="5873047" y="592212"/>
-                  </a:lnTo>
-                  <a:lnTo>
-                    <a:pt x="5801424" y="584363"/>
-                  </a:lnTo>
-                  <a:lnTo>
-                    <a:pt x="5729802" y="576253"/>
-                  </a:lnTo>
-                  <a:lnTo>
-                    <a:pt x="5658179" y="567873"/>
-                  </a:lnTo>
-                  <a:lnTo>
-                    <a:pt x="5586557" y="559215"/>
-                  </a:lnTo>
-                  <a:lnTo>
-                    <a:pt x="5514934" y="550269"/>
-                  </a:lnTo>
-                  <a:lnTo>
-                    <a:pt x="5443311" y="541026"/>
-                  </a:lnTo>
-                  <a:lnTo>
-                    <a:pt x="5371689" y="531476"/>
-                  </a:lnTo>
-                  <a:lnTo>
-                    <a:pt x="5300066" y="521608"/>
-                  </a:lnTo>
-                  <a:lnTo>
-                    <a:pt x="5228444" y="511413"/>
-                  </a:lnTo>
-                  <a:lnTo>
-                    <a:pt x="5156821" y="500878"/>
-                  </a:lnTo>
-                  <a:lnTo>
-                    <a:pt x="5085199" y="489994"/>
-                  </a:lnTo>
-                  <a:lnTo>
-                    <a:pt x="5013576" y="478748"/>
-                  </a:lnTo>
-                  <a:lnTo>
-                    <a:pt x="4941954" y="467127"/>
-                  </a:lnTo>
-                  <a:lnTo>
-                    <a:pt x="4870331" y="455121"/>
-                  </a:lnTo>
-                  <a:lnTo>
-                    <a:pt x="4798709" y="442716"/>
-                  </a:lnTo>
-                  <a:lnTo>
-                    <a:pt x="4727086" y="429899"/>
-                  </a:lnTo>
-                  <a:lnTo>
-                    <a:pt x="4655464" y="416655"/>
-                  </a:lnTo>
-                  <a:lnTo>
-                    <a:pt x="4583841" y="402971"/>
-                  </a:lnTo>
-                  <a:lnTo>
-                    <a:pt x="4512219" y="388833"/>
-                  </a:lnTo>
-                  <a:lnTo>
-                    <a:pt x="4440596" y="374225"/>
-                  </a:lnTo>
-                  <a:lnTo>
-                    <a:pt x="4368974" y="359131"/>
-                  </a:lnTo>
-                  <a:lnTo>
-                    <a:pt x="4297351" y="343536"/>
-                  </a:lnTo>
-                  <a:lnTo>
-                    <a:pt x="4225729" y="327422"/>
-                  </a:lnTo>
-                  <a:lnTo>
-                    <a:pt x="4154106" y="310773"/>
-                  </a:lnTo>
-                  <a:lnTo>
-                    <a:pt x="4082483" y="293570"/>
-                  </a:lnTo>
-                  <a:lnTo>
-                    <a:pt x="4010861" y="275796"/>
-                  </a:lnTo>
-                  <a:lnTo>
-                    <a:pt x="3939238" y="257431"/>
-                  </a:lnTo>
-                  <a:lnTo>
-                    <a:pt x="3867616" y="238456"/>
-                  </a:lnTo>
-                  <a:lnTo>
-                    <a:pt x="3795993" y="218850"/>
-                  </a:lnTo>
-                  <a:lnTo>
-                    <a:pt x="3724371" y="198593"/>
-                  </a:lnTo>
-                  <a:lnTo>
-                    <a:pt x="3652748" y="177662"/>
-                  </a:lnTo>
-                  <a:lnTo>
-                    <a:pt x="3581126" y="156036"/>
-                  </a:lnTo>
-                  <a:lnTo>
-                    <a:pt x="3509503" y="133691"/>
-                  </a:lnTo>
-                  <a:lnTo>
-                    <a:pt x="3437881" y="110603"/>
-                  </a:lnTo>
-                  <a:lnTo>
-                    <a:pt x="3366258" y="86748"/>
-                  </a:lnTo>
-                  <a:lnTo>
-                    <a:pt x="3294636" y="62101"/>
-                  </a:lnTo>
-                  <a:lnTo>
-                    <a:pt x="3223013" y="36634"/>
-                  </a:lnTo>
-                  <a:lnTo>
-                    <a:pt x="3151391" y="10321"/>
-                  </a:lnTo>
-                  <a:lnTo>
-                    <a:pt x="3079768" y="0"/>
-                  </a:lnTo>
-                  <a:lnTo>
-                    <a:pt x="3008146" y="1852"/>
-                  </a:lnTo>
-                  <a:lnTo>
-                    <a:pt x="2936523" y="3701"/>
-                  </a:lnTo>
-                  <a:lnTo>
-                    <a:pt x="2864901" y="5545"/>
-                  </a:lnTo>
-                  <a:lnTo>
-                    <a:pt x="2793278" y="7386"/>
-                  </a:lnTo>
-                  <a:lnTo>
-                    <a:pt x="2721655" y="9222"/>
-                  </a:lnTo>
-                  <a:lnTo>
-                    <a:pt x="2650033" y="11054"/>
-                  </a:lnTo>
-                  <a:lnTo>
-                    <a:pt x="2578410" y="12882"/>
-                  </a:lnTo>
-                  <a:lnTo>
-                    <a:pt x="2506788" y="14706"/>
-                  </a:lnTo>
-                  <a:lnTo>
-                    <a:pt x="2435165" y="16526"/>
-                  </a:lnTo>
-                  <a:lnTo>
-                    <a:pt x="2363543" y="18341"/>
-                  </a:lnTo>
-                  <a:lnTo>
-                    <a:pt x="2291920" y="20153"/>
-                  </a:lnTo>
-                  <a:lnTo>
-                    <a:pt x="2220298" y="21961"/>
-                  </a:lnTo>
-                  <a:lnTo>
-                    <a:pt x="2148675" y="23764"/>
-                  </a:lnTo>
-                  <a:lnTo>
-                    <a:pt x="2077053" y="25564"/>
-                  </a:lnTo>
-                  <a:lnTo>
-                    <a:pt x="2005430" y="27359"/>
-                  </a:lnTo>
-                  <a:lnTo>
-                    <a:pt x="1933808" y="29151"/>
-                  </a:lnTo>
-                  <a:lnTo>
-                    <a:pt x="1862185" y="30939"/>
-                  </a:lnTo>
-                  <a:lnTo>
-                    <a:pt x="1790563" y="32722"/>
-                  </a:lnTo>
-                  <a:lnTo>
-                    <a:pt x="1718940" y="34502"/>
-                  </a:lnTo>
-                  <a:lnTo>
-                    <a:pt x="1647318" y="36277"/>
-                  </a:lnTo>
-                  <a:lnTo>
-                    <a:pt x="1575695" y="38049"/>
-                  </a:lnTo>
-                  <a:lnTo>
-                    <a:pt x="1504073" y="39816"/>
-                  </a:lnTo>
-                  <a:lnTo>
-                    <a:pt x="1432450" y="41580"/>
-                  </a:lnTo>
-                  <a:lnTo>
-                    <a:pt x="1360827" y="43340"/>
-                  </a:lnTo>
-                  <a:lnTo>
-                    <a:pt x="1289205" y="45096"/>
-                  </a:lnTo>
-                  <a:lnTo>
-                    <a:pt x="1217582" y="46847"/>
-                  </a:lnTo>
-                  <a:lnTo>
-                    <a:pt x="1145960" y="48595"/>
-                  </a:lnTo>
-                  <a:lnTo>
-                    <a:pt x="1074337" y="50339"/>
-                  </a:lnTo>
-                  <a:lnTo>
-                    <a:pt x="1002715" y="52080"/>
-                  </a:lnTo>
-                  <a:lnTo>
-                    <a:pt x="931092" y="53816"/>
-                  </a:lnTo>
-                  <a:lnTo>
-                    <a:pt x="859470" y="55548"/>
-                  </a:lnTo>
-                  <a:lnTo>
-                    <a:pt x="787847" y="57277"/>
-                  </a:lnTo>
-                  <a:lnTo>
-                    <a:pt x="716225" y="59001"/>
-                  </a:lnTo>
-                  <a:lnTo>
-                    <a:pt x="644602" y="60722"/>
-                  </a:lnTo>
-                  <a:lnTo>
-                    <a:pt x="572980" y="62439"/>
-                  </a:lnTo>
-                  <a:lnTo>
-                    <a:pt x="501357" y="64152"/>
-                  </a:lnTo>
-                  <a:lnTo>
-                    <a:pt x="429735" y="65861"/>
-                  </a:lnTo>
-                  <a:lnTo>
-                    <a:pt x="358112" y="67567"/>
-                  </a:lnTo>
-                  <a:lnTo>
-                    <a:pt x="286490" y="69268"/>
-                  </a:lnTo>
-                  <a:lnTo>
-                    <a:pt x="214867" y="70966"/>
-                  </a:lnTo>
-                  <a:lnTo>
-                    <a:pt x="143245" y="72660"/>
-                  </a:lnTo>
-                  <a:lnTo>
-                    <a:pt x="71622" y="74350"/>
-                  </a:lnTo>
-                  <a:lnTo>
-                    <a:pt x="0" y="76037"/>
+                    <a:pt x="70344" y="40019"/>
+                  </a:lnTo>
+                  <a:lnTo>
+                    <a:pt x="140688" y="78751"/>
+                  </a:lnTo>
+                  <a:lnTo>
+                    <a:pt x="211033" y="116238"/>
+                  </a:lnTo>
+                  <a:lnTo>
+                    <a:pt x="281377" y="152519"/>
+                  </a:lnTo>
+                  <a:lnTo>
+                    <a:pt x="351722" y="187632"/>
+                  </a:lnTo>
+                  <a:lnTo>
+                    <a:pt x="422066" y="221617"/>
+                  </a:lnTo>
+                  <a:lnTo>
+                    <a:pt x="492411" y="254508"/>
+                  </a:lnTo>
+                  <a:lnTo>
+                    <a:pt x="562755" y="286341"/>
+                  </a:lnTo>
+                  <a:lnTo>
+                    <a:pt x="633100" y="317150"/>
+                  </a:lnTo>
+                  <a:lnTo>
+                    <a:pt x="703444" y="346969"/>
+                  </a:lnTo>
+                  <a:lnTo>
+                    <a:pt x="773789" y="375828"/>
+                  </a:lnTo>
+                  <a:lnTo>
+                    <a:pt x="844133" y="403759"/>
+                  </a:lnTo>
+                  <a:lnTo>
+                    <a:pt x="914478" y="430792"/>
+                  </a:lnTo>
+                  <a:lnTo>
+                    <a:pt x="984822" y="456955"/>
+                  </a:lnTo>
+                  <a:lnTo>
+                    <a:pt x="1055167" y="482277"/>
+                  </a:lnTo>
+                  <a:lnTo>
+                    <a:pt x="1125511" y="506784"/>
+                  </a:lnTo>
+                  <a:lnTo>
+                    <a:pt x="1195856" y="530503"/>
+                  </a:lnTo>
+                  <a:lnTo>
+                    <a:pt x="1266200" y="553458"/>
+                  </a:lnTo>
+                  <a:lnTo>
+                    <a:pt x="1336545" y="575676"/>
+                  </a:lnTo>
+                  <a:lnTo>
+                    <a:pt x="1406889" y="597179"/>
+                  </a:lnTo>
+                  <a:lnTo>
+                    <a:pt x="1477234" y="617990"/>
+                  </a:lnTo>
+                  <a:lnTo>
+                    <a:pt x="1547578" y="638132"/>
+                  </a:lnTo>
+                  <a:lnTo>
+                    <a:pt x="1617923" y="657626"/>
+                  </a:lnTo>
+                  <a:lnTo>
+                    <a:pt x="1688267" y="676493"/>
+                  </a:lnTo>
+                  <a:lnTo>
+                    <a:pt x="1758612" y="694753"/>
+                  </a:lnTo>
+                  <a:lnTo>
+                    <a:pt x="1828956" y="712426"/>
+                  </a:lnTo>
+                  <a:lnTo>
+                    <a:pt x="1899301" y="729531"/>
+                  </a:lnTo>
+                  <a:lnTo>
+                    <a:pt x="1969645" y="746085"/>
+                  </a:lnTo>
+                  <a:lnTo>
+                    <a:pt x="2039990" y="762107"/>
+                  </a:lnTo>
+                  <a:lnTo>
+                    <a:pt x="2110334" y="777613"/>
+                  </a:lnTo>
+                  <a:lnTo>
+                    <a:pt x="2180679" y="792621"/>
+                  </a:lnTo>
+                  <a:lnTo>
+                    <a:pt x="2251023" y="807146"/>
+                  </a:lnTo>
+                  <a:lnTo>
+                    <a:pt x="2321368" y="821203"/>
+                  </a:lnTo>
+                  <a:lnTo>
+                    <a:pt x="2391712" y="834809"/>
+                  </a:lnTo>
+                  <a:lnTo>
+                    <a:pt x="2462057" y="847977"/>
+                  </a:lnTo>
+                  <a:lnTo>
+                    <a:pt x="2532401" y="860721"/>
+                  </a:lnTo>
+                  <a:lnTo>
+                    <a:pt x="2602746" y="873056"/>
+                  </a:lnTo>
+                  <a:lnTo>
+                    <a:pt x="2673090" y="884994"/>
+                  </a:lnTo>
+                  <a:lnTo>
+                    <a:pt x="2743435" y="896547"/>
+                  </a:lnTo>
+                  <a:lnTo>
+                    <a:pt x="2813779" y="907729"/>
+                  </a:lnTo>
+                  <a:lnTo>
+                    <a:pt x="2884124" y="918552"/>
+                  </a:lnTo>
+                  <a:lnTo>
+                    <a:pt x="2954468" y="929026"/>
+                  </a:lnTo>
+                  <a:lnTo>
+                    <a:pt x="3024813" y="939164"/>
+                  </a:lnTo>
+                  <a:lnTo>
+                    <a:pt x="3095157" y="944580"/>
+                  </a:lnTo>
+                  <a:lnTo>
+                    <a:pt x="3165502" y="943909"/>
+                  </a:lnTo>
+                  <a:lnTo>
+                    <a:pt x="3235846" y="943236"/>
+                  </a:lnTo>
+                  <a:lnTo>
+                    <a:pt x="3306191" y="942561"/>
+                  </a:lnTo>
+                  <a:lnTo>
+                    <a:pt x="3376535" y="941885"/>
+                  </a:lnTo>
+                  <a:lnTo>
+                    <a:pt x="3446880" y="941207"/>
+                  </a:lnTo>
+                  <a:lnTo>
+                    <a:pt x="3517224" y="940528"/>
+                  </a:lnTo>
+                  <a:lnTo>
+                    <a:pt x="3587569" y="939847"/>
+                  </a:lnTo>
+                  <a:lnTo>
+                    <a:pt x="3657913" y="939165"/>
+                  </a:lnTo>
+                  <a:lnTo>
+                    <a:pt x="3728257" y="938481"/>
+                  </a:lnTo>
+                  <a:lnTo>
+                    <a:pt x="3798602" y="937796"/>
+                  </a:lnTo>
+                  <a:lnTo>
+                    <a:pt x="3868946" y="937109"/>
+                  </a:lnTo>
+                  <a:lnTo>
+                    <a:pt x="3939291" y="936421"/>
+                  </a:lnTo>
+                  <a:lnTo>
+                    <a:pt x="4009635" y="935731"/>
+                  </a:lnTo>
+                  <a:lnTo>
+                    <a:pt x="4079980" y="935040"/>
+                  </a:lnTo>
+                  <a:lnTo>
+                    <a:pt x="4150324" y="934347"/>
+                  </a:lnTo>
+                  <a:lnTo>
+                    <a:pt x="4220669" y="933652"/>
+                  </a:lnTo>
+                  <a:lnTo>
+                    <a:pt x="4291013" y="932956"/>
+                  </a:lnTo>
+                  <a:lnTo>
+                    <a:pt x="4361358" y="932258"/>
+                  </a:lnTo>
+                  <a:lnTo>
+                    <a:pt x="4431702" y="931559"/>
+                  </a:lnTo>
+                  <a:lnTo>
+                    <a:pt x="4502047" y="930858"/>
+                  </a:lnTo>
+                  <a:lnTo>
+                    <a:pt x="4572391" y="930156"/>
+                  </a:lnTo>
+                  <a:lnTo>
+                    <a:pt x="4642736" y="929452"/>
+                  </a:lnTo>
+                  <a:lnTo>
+                    <a:pt x="4713080" y="928747"/>
+                  </a:lnTo>
+                  <a:lnTo>
+                    <a:pt x="4783425" y="928039"/>
+                  </a:lnTo>
+                  <a:lnTo>
+                    <a:pt x="4853769" y="927331"/>
+                  </a:lnTo>
+                  <a:lnTo>
+                    <a:pt x="4924114" y="926621"/>
+                  </a:lnTo>
+                  <a:lnTo>
+                    <a:pt x="4994458" y="925909"/>
+                  </a:lnTo>
+                  <a:lnTo>
+                    <a:pt x="5064803" y="925195"/>
+                  </a:lnTo>
+                  <a:lnTo>
+                    <a:pt x="5135147" y="924480"/>
+                  </a:lnTo>
+                  <a:lnTo>
+                    <a:pt x="5205492" y="923763"/>
+                  </a:lnTo>
+                  <a:lnTo>
+                    <a:pt x="5275836" y="923045"/>
+                  </a:lnTo>
+                  <a:lnTo>
+                    <a:pt x="5346181" y="922325"/>
+                  </a:lnTo>
+                  <a:lnTo>
+                    <a:pt x="5416525" y="921604"/>
+                  </a:lnTo>
+                  <a:lnTo>
+                    <a:pt x="5486870" y="920881"/>
+                  </a:lnTo>
+                  <a:lnTo>
+                    <a:pt x="5557214" y="920156"/>
+                  </a:lnTo>
+                  <a:lnTo>
+                    <a:pt x="5627559" y="919430"/>
+                  </a:lnTo>
+                  <a:lnTo>
+                    <a:pt x="5697903" y="918702"/>
+                  </a:lnTo>
+                  <a:lnTo>
+                    <a:pt x="5768248" y="917972"/>
+                  </a:lnTo>
+                  <a:lnTo>
+                    <a:pt x="5838592" y="917241"/>
+                  </a:lnTo>
+                  <a:lnTo>
+                    <a:pt x="5908937" y="916508"/>
+                  </a:lnTo>
+                  <a:lnTo>
+                    <a:pt x="5979281" y="915773"/>
+                  </a:lnTo>
+                  <a:lnTo>
+                    <a:pt x="6049626" y="915037"/>
+                  </a:lnTo>
+                  <a:lnTo>
+                    <a:pt x="6119970" y="914299"/>
+                  </a:lnTo>
+                  <a:lnTo>
+                    <a:pt x="6190315" y="913560"/>
+                  </a:lnTo>
+                  <a:lnTo>
+                    <a:pt x="6260659" y="912819"/>
+                  </a:lnTo>
+                  <a:lnTo>
+                    <a:pt x="6331004" y="912076"/>
+                  </a:lnTo>
+                  <a:lnTo>
+                    <a:pt x="6401348" y="911331"/>
+                  </a:lnTo>
+                  <a:lnTo>
+                    <a:pt x="6471693" y="910585"/>
+                  </a:lnTo>
+                  <a:lnTo>
+                    <a:pt x="6542037" y="909838"/>
+                  </a:lnTo>
+                  <a:lnTo>
+                    <a:pt x="6612382" y="909088"/>
+                  </a:lnTo>
+                  <a:lnTo>
+                    <a:pt x="6682726" y="908337"/>
+                  </a:lnTo>
+                  <a:lnTo>
+                    <a:pt x="6753071" y="907584"/>
+                  </a:lnTo>
+                  <a:lnTo>
+                    <a:pt x="6823415" y="906830"/>
+                  </a:lnTo>
+                  <a:lnTo>
+                    <a:pt x="6893760" y="906073"/>
+                  </a:lnTo>
+                  <a:lnTo>
+                    <a:pt x="6964104" y="905315"/>
                   </a:lnTo>
                 </a:path>
               </a:pathLst>
@@ -4326,312 +4036,637 @@
           </p:nvSpPr>
           <p:spPr>
             <a:xfrm>
-              <a:off x="1172049" y="3946689"/>
-              <a:ext cx="7090630" cy="1253880"/>
+              <a:off x="1235312" y="3101346"/>
+              <a:ext cx="6964104" cy="250056"/>
             </a:xfrm>
             <a:custGeom>
               <a:avLst/>
               <a:pathLst>
-                <a:path w="7090630" h="1253880">
+                <a:path w="6964104" h="250056">
+                  <a:moveTo>
+                    <a:pt x="6964104" y="250056"/>
+                  </a:moveTo>
+                  <a:lnTo>
+                    <a:pt x="6893760" y="248432"/>
+                  </a:lnTo>
+                  <a:lnTo>
+                    <a:pt x="6823415" y="246753"/>
+                  </a:lnTo>
+                  <a:lnTo>
+                    <a:pt x="6753071" y="245018"/>
+                  </a:lnTo>
+                  <a:lnTo>
+                    <a:pt x="6682726" y="243226"/>
+                  </a:lnTo>
+                  <a:lnTo>
+                    <a:pt x="6612382" y="241374"/>
+                  </a:lnTo>
+                  <a:lnTo>
+                    <a:pt x="6542037" y="239461"/>
+                  </a:lnTo>
+                  <a:lnTo>
+                    <a:pt x="6471693" y="237484"/>
+                  </a:lnTo>
+                  <a:lnTo>
+                    <a:pt x="6401348" y="235441"/>
+                  </a:lnTo>
+                  <a:lnTo>
+                    <a:pt x="6331004" y="233330"/>
+                  </a:lnTo>
+                  <a:lnTo>
+                    <a:pt x="6260659" y="231150"/>
+                  </a:lnTo>
+                  <a:lnTo>
+                    <a:pt x="6190315" y="228897"/>
+                  </a:lnTo>
+                  <a:lnTo>
+                    <a:pt x="6119970" y="226569"/>
+                  </a:lnTo>
+                  <a:lnTo>
+                    <a:pt x="6049626" y="224163"/>
+                  </a:lnTo>
+                  <a:lnTo>
+                    <a:pt x="5979281" y="221678"/>
+                  </a:lnTo>
+                  <a:lnTo>
+                    <a:pt x="5908937" y="219110"/>
+                  </a:lnTo>
+                  <a:lnTo>
+                    <a:pt x="5838592" y="216457"/>
+                  </a:lnTo>
+                  <a:lnTo>
+                    <a:pt x="5768248" y="213715"/>
+                  </a:lnTo>
+                  <a:lnTo>
+                    <a:pt x="5697903" y="210883"/>
+                  </a:lnTo>
+                  <a:lnTo>
+                    <a:pt x="5627559" y="207956"/>
+                  </a:lnTo>
+                  <a:lnTo>
+                    <a:pt x="5557214" y="204932"/>
+                  </a:lnTo>
+                  <a:lnTo>
+                    <a:pt x="5486870" y="201807"/>
+                  </a:lnTo>
+                  <a:lnTo>
+                    <a:pt x="5416525" y="198579"/>
+                  </a:lnTo>
+                  <a:lnTo>
+                    <a:pt x="5346181" y="195243"/>
+                  </a:lnTo>
+                  <a:lnTo>
+                    <a:pt x="5275836" y="191797"/>
+                  </a:lnTo>
+                  <a:lnTo>
+                    <a:pt x="5205492" y="188236"/>
+                  </a:lnTo>
+                  <a:lnTo>
+                    <a:pt x="5135147" y="184557"/>
+                  </a:lnTo>
+                  <a:lnTo>
+                    <a:pt x="5064803" y="180755"/>
+                  </a:lnTo>
+                  <a:lnTo>
+                    <a:pt x="4994458" y="176827"/>
+                  </a:lnTo>
+                  <a:lnTo>
+                    <a:pt x="4924114" y="172768"/>
+                  </a:lnTo>
+                  <a:lnTo>
+                    <a:pt x="4853769" y="168575"/>
+                  </a:lnTo>
+                  <a:lnTo>
+                    <a:pt x="4783425" y="164242"/>
+                  </a:lnTo>
+                  <a:lnTo>
+                    <a:pt x="4713080" y="159765"/>
+                  </a:lnTo>
+                  <a:lnTo>
+                    <a:pt x="4642736" y="155140"/>
+                  </a:lnTo>
+                  <a:lnTo>
+                    <a:pt x="4572391" y="150361"/>
+                  </a:lnTo>
+                  <a:lnTo>
+                    <a:pt x="4502047" y="145423"/>
+                  </a:lnTo>
+                  <a:lnTo>
+                    <a:pt x="4431702" y="140320"/>
+                  </a:lnTo>
+                  <a:lnTo>
+                    <a:pt x="4361358" y="135049"/>
+                  </a:lnTo>
+                  <a:lnTo>
+                    <a:pt x="4291013" y="129602"/>
+                  </a:lnTo>
+                  <a:lnTo>
+                    <a:pt x="4220669" y="123974"/>
+                  </a:lnTo>
+                  <a:lnTo>
+                    <a:pt x="4150324" y="118159"/>
+                  </a:lnTo>
+                  <a:lnTo>
+                    <a:pt x="4079980" y="112150"/>
+                  </a:lnTo>
+                  <a:lnTo>
+                    <a:pt x="4009635" y="105942"/>
+                  </a:lnTo>
+                  <a:lnTo>
+                    <a:pt x="3939291" y="99528"/>
+                  </a:lnTo>
+                  <a:lnTo>
+                    <a:pt x="3868946" y="92901"/>
+                  </a:lnTo>
+                  <a:lnTo>
+                    <a:pt x="3798602" y="86053"/>
+                  </a:lnTo>
+                  <a:lnTo>
+                    <a:pt x="3728257" y="78978"/>
+                  </a:lnTo>
+                  <a:lnTo>
+                    <a:pt x="3657913" y="71667"/>
+                  </a:lnTo>
+                  <a:lnTo>
+                    <a:pt x="3587569" y="64114"/>
+                  </a:lnTo>
+                  <a:lnTo>
+                    <a:pt x="3517224" y="56309"/>
+                  </a:lnTo>
+                  <a:lnTo>
+                    <a:pt x="3446880" y="48246"/>
+                  </a:lnTo>
+                  <a:lnTo>
+                    <a:pt x="3376535" y="39914"/>
+                  </a:lnTo>
+                  <a:lnTo>
+                    <a:pt x="3306191" y="31305"/>
+                  </a:lnTo>
+                  <a:lnTo>
+                    <a:pt x="3235846" y="22410"/>
+                  </a:lnTo>
+                  <a:lnTo>
+                    <a:pt x="3165502" y="13220"/>
+                  </a:lnTo>
+                  <a:lnTo>
+                    <a:pt x="3095157" y="3724"/>
+                  </a:lnTo>
+                  <a:lnTo>
+                    <a:pt x="3024813" y="0"/>
+                  </a:lnTo>
+                  <a:lnTo>
+                    <a:pt x="2954468" y="668"/>
+                  </a:lnTo>
+                  <a:lnTo>
+                    <a:pt x="2884124" y="1335"/>
+                  </a:lnTo>
+                  <a:lnTo>
+                    <a:pt x="2813779" y="2001"/>
+                  </a:lnTo>
+                  <a:lnTo>
+                    <a:pt x="2743435" y="2665"/>
+                  </a:lnTo>
+                  <a:lnTo>
+                    <a:pt x="2673090" y="3328"/>
+                  </a:lnTo>
+                  <a:lnTo>
+                    <a:pt x="2602746" y="3989"/>
+                  </a:lnTo>
+                  <a:lnTo>
+                    <a:pt x="2532401" y="4648"/>
+                  </a:lnTo>
+                  <a:lnTo>
+                    <a:pt x="2462057" y="5307"/>
+                  </a:lnTo>
+                  <a:lnTo>
+                    <a:pt x="2391712" y="5963"/>
+                  </a:lnTo>
+                  <a:lnTo>
+                    <a:pt x="2321368" y="6619"/>
+                  </a:lnTo>
+                  <a:lnTo>
+                    <a:pt x="2251023" y="7272"/>
+                  </a:lnTo>
+                  <a:lnTo>
+                    <a:pt x="2180679" y="7925"/>
+                  </a:lnTo>
+                  <a:lnTo>
+                    <a:pt x="2110334" y="8576"/>
+                  </a:lnTo>
+                  <a:lnTo>
+                    <a:pt x="2039990" y="9225"/>
+                  </a:lnTo>
+                  <a:lnTo>
+                    <a:pt x="1969645" y="9873"/>
+                  </a:lnTo>
+                  <a:lnTo>
+                    <a:pt x="1899301" y="10520"/>
+                  </a:lnTo>
+                  <a:lnTo>
+                    <a:pt x="1828956" y="11165"/>
+                  </a:lnTo>
+                  <a:lnTo>
+                    <a:pt x="1758612" y="11808"/>
+                  </a:lnTo>
+                  <a:lnTo>
+                    <a:pt x="1688267" y="12450"/>
+                  </a:lnTo>
+                  <a:lnTo>
+                    <a:pt x="1617923" y="13091"/>
+                  </a:lnTo>
+                  <a:lnTo>
+                    <a:pt x="1547578" y="13731"/>
+                  </a:lnTo>
+                  <a:lnTo>
+                    <a:pt x="1477234" y="14368"/>
+                  </a:lnTo>
+                  <a:lnTo>
+                    <a:pt x="1406889" y="15005"/>
+                  </a:lnTo>
+                  <a:lnTo>
+                    <a:pt x="1336545" y="15640"/>
+                  </a:lnTo>
+                  <a:lnTo>
+                    <a:pt x="1266200" y="16274"/>
+                  </a:lnTo>
+                  <a:lnTo>
+                    <a:pt x="1195856" y="16906"/>
+                  </a:lnTo>
+                  <a:lnTo>
+                    <a:pt x="1125511" y="17537"/>
+                  </a:lnTo>
+                  <a:lnTo>
+                    <a:pt x="1055167" y="18166"/>
+                  </a:lnTo>
+                  <a:lnTo>
+                    <a:pt x="984822" y="18794"/>
+                  </a:lnTo>
+                  <a:lnTo>
+                    <a:pt x="914478" y="19421"/>
+                  </a:lnTo>
+                  <a:lnTo>
+                    <a:pt x="844133" y="20046"/>
+                  </a:lnTo>
+                  <a:lnTo>
+                    <a:pt x="773789" y="20669"/>
+                  </a:lnTo>
+                  <a:lnTo>
+                    <a:pt x="703444" y="21292"/>
+                  </a:lnTo>
+                  <a:lnTo>
+                    <a:pt x="633100" y="21913"/>
+                  </a:lnTo>
+                  <a:lnTo>
+                    <a:pt x="562755" y="22532"/>
+                  </a:lnTo>
+                  <a:lnTo>
+                    <a:pt x="492411" y="23151"/>
+                  </a:lnTo>
+                  <a:lnTo>
+                    <a:pt x="422066" y="23767"/>
+                  </a:lnTo>
+                  <a:lnTo>
+                    <a:pt x="351722" y="24383"/>
+                  </a:lnTo>
+                  <a:lnTo>
+                    <a:pt x="281377" y="24997"/>
+                  </a:lnTo>
+                  <a:lnTo>
+                    <a:pt x="211033" y="25610"/>
+                  </a:lnTo>
+                  <a:lnTo>
+                    <a:pt x="140688" y="26221"/>
+                  </a:lnTo>
+                  <a:lnTo>
+                    <a:pt x="70344" y="26831"/>
+                  </a:lnTo>
+                  <a:lnTo>
+                    <a:pt x="0" y="27440"/>
+                  </a:lnTo>
+                </a:path>
+              </a:pathLst>
+            </a:custGeom>
+          </p:spPr>
+          <p:txBody>
+            <a:bodyPr/>
+            <a:lstStyle/>
+            <a:p/>
+          </p:txBody>
+        </p:sp>
+        <p:sp>
+          <p:nvSpPr>
+            <p:cNvPr id="26" name="pl26"/>
+            <p:cNvSpPr/>
+            <p:nvPr/>
+          </p:nvSpPr>
+          <p:spPr>
+            <a:xfrm>
+              <a:off x="1235312" y="2819080"/>
+              <a:ext cx="6964104" cy="452496"/>
+            </a:xfrm>
+            <a:custGeom>
+              <a:avLst/>
+              <a:pathLst>
+                <a:path w="6964104" h="452496">
                   <a:moveTo>
                     <a:pt x="0" y="0"/>
                   </a:moveTo>
                   <a:lnTo>
-                    <a:pt x="71622" y="24338"/>
-                  </a:lnTo>
-                  <a:lnTo>
-                    <a:pt x="143245" y="48309"/>
-                  </a:lnTo>
-                  <a:lnTo>
-                    <a:pt x="214867" y="71918"/>
-                  </a:lnTo>
-                  <a:lnTo>
-                    <a:pt x="286490" y="95169"/>
-                  </a:lnTo>
-                  <a:lnTo>
-                    <a:pt x="358112" y="118070"/>
-                  </a:lnTo>
-                  <a:lnTo>
-                    <a:pt x="429735" y="140624"/>
-                  </a:lnTo>
-                  <a:lnTo>
-                    <a:pt x="501357" y="162838"/>
-                  </a:lnTo>
-                  <a:lnTo>
-                    <a:pt x="572980" y="184716"/>
-                  </a:lnTo>
-                  <a:lnTo>
-                    <a:pt x="644602" y="206263"/>
-                  </a:lnTo>
-                  <a:lnTo>
-                    <a:pt x="716225" y="227485"/>
-                  </a:lnTo>
-                  <a:lnTo>
-                    <a:pt x="787847" y="248385"/>
-                  </a:lnTo>
-                  <a:lnTo>
-                    <a:pt x="859470" y="268970"/>
-                  </a:lnTo>
-                  <a:lnTo>
-                    <a:pt x="931092" y="289244"/>
-                  </a:lnTo>
-                  <a:lnTo>
-                    <a:pt x="1002715" y="309212"/>
-                  </a:lnTo>
-                  <a:lnTo>
-                    <a:pt x="1074337" y="328878"/>
-                  </a:lnTo>
-                  <a:lnTo>
-                    <a:pt x="1145960" y="348247"/>
-                  </a:lnTo>
-                  <a:lnTo>
-                    <a:pt x="1217582" y="367323"/>
-                  </a:lnTo>
-                  <a:lnTo>
-                    <a:pt x="1289205" y="386110"/>
-                  </a:lnTo>
-                  <a:lnTo>
-                    <a:pt x="1360827" y="404614"/>
-                  </a:lnTo>
-                  <a:lnTo>
-                    <a:pt x="1432450" y="422838"/>
-                  </a:lnTo>
-                  <a:lnTo>
-                    <a:pt x="1504073" y="440787"/>
-                  </a:lnTo>
-                  <a:lnTo>
-                    <a:pt x="1575695" y="458464"/>
-                  </a:lnTo>
-                  <a:lnTo>
-                    <a:pt x="1647318" y="475875"/>
-                  </a:lnTo>
-                  <a:lnTo>
-                    <a:pt x="1718940" y="493022"/>
-                  </a:lnTo>
-                  <a:lnTo>
-                    <a:pt x="1790563" y="509910"/>
-                  </a:lnTo>
-                  <a:lnTo>
-                    <a:pt x="1862185" y="526543"/>
-                  </a:lnTo>
-                  <a:lnTo>
-                    <a:pt x="1933808" y="542925"/>
-                  </a:lnTo>
-                  <a:lnTo>
-                    <a:pt x="2005430" y="559059"/>
-                  </a:lnTo>
-                  <a:lnTo>
-                    <a:pt x="2077053" y="574949"/>
-                  </a:lnTo>
-                  <a:lnTo>
-                    <a:pt x="2148675" y="590599"/>
-                  </a:lnTo>
-                  <a:lnTo>
-                    <a:pt x="2220298" y="606013"/>
-                  </a:lnTo>
-                  <a:lnTo>
-                    <a:pt x="2291920" y="621193"/>
-                  </a:lnTo>
-                  <a:lnTo>
-                    <a:pt x="2363543" y="636144"/>
-                  </a:lnTo>
-                  <a:lnTo>
-                    <a:pt x="2435165" y="650870"/>
-                  </a:lnTo>
-                  <a:lnTo>
-                    <a:pt x="2506788" y="665372"/>
-                  </a:lnTo>
-                  <a:lnTo>
-                    <a:pt x="2578410" y="679656"/>
-                  </a:lnTo>
-                  <a:lnTo>
-                    <a:pt x="2650033" y="693724"/>
-                  </a:lnTo>
-                  <a:lnTo>
-                    <a:pt x="2721655" y="707579"/>
-                  </a:lnTo>
-                  <a:lnTo>
-                    <a:pt x="2793278" y="721225"/>
-                  </a:lnTo>
-                  <a:lnTo>
-                    <a:pt x="2864901" y="734664"/>
-                  </a:lnTo>
-                  <a:lnTo>
-                    <a:pt x="2936523" y="747901"/>
-                  </a:lnTo>
-                  <a:lnTo>
-                    <a:pt x="3008146" y="760937"/>
-                  </a:lnTo>
-                  <a:lnTo>
-                    <a:pt x="3079768" y="773777"/>
-                  </a:lnTo>
-                  <a:lnTo>
-                    <a:pt x="3151391" y="786422"/>
-                  </a:lnTo>
-                  <a:lnTo>
-                    <a:pt x="3223013" y="798876"/>
-                  </a:lnTo>
-                  <a:lnTo>
-                    <a:pt x="3294636" y="811142"/>
-                  </a:lnTo>
-                  <a:lnTo>
-                    <a:pt x="3366258" y="823223"/>
-                  </a:lnTo>
-                  <a:lnTo>
-                    <a:pt x="3437881" y="835121"/>
-                  </a:lnTo>
-                  <a:lnTo>
-                    <a:pt x="3509503" y="846840"/>
-                  </a:lnTo>
-                  <a:lnTo>
-                    <a:pt x="3581126" y="858381"/>
-                  </a:lnTo>
-                  <a:lnTo>
-                    <a:pt x="3652748" y="869748"/>
-                  </a:lnTo>
-                  <a:lnTo>
-                    <a:pt x="3724371" y="880943"/>
-                  </a:lnTo>
-                  <a:lnTo>
-                    <a:pt x="3795993" y="891969"/>
-                  </a:lnTo>
-                  <a:lnTo>
-                    <a:pt x="3867616" y="902828"/>
-                  </a:lnTo>
-                  <a:lnTo>
-                    <a:pt x="3939238" y="913523"/>
-                  </a:lnTo>
-                  <a:lnTo>
-                    <a:pt x="4010861" y="924057"/>
-                  </a:lnTo>
-                  <a:lnTo>
-                    <a:pt x="4082483" y="934431"/>
-                  </a:lnTo>
-                  <a:lnTo>
-                    <a:pt x="4154106" y="944649"/>
-                  </a:lnTo>
-                  <a:lnTo>
-                    <a:pt x="4225729" y="954712"/>
-                  </a:lnTo>
-                  <a:lnTo>
-                    <a:pt x="4297351" y="964623"/>
-                  </a:lnTo>
-                  <a:lnTo>
-                    <a:pt x="4368974" y="974384"/>
-                  </a:lnTo>
-                  <a:lnTo>
-                    <a:pt x="4440596" y="983998"/>
-                  </a:lnTo>
-                  <a:lnTo>
-                    <a:pt x="4512219" y="993467"/>
-                  </a:lnTo>
-                  <a:lnTo>
-                    <a:pt x="4583841" y="1002792"/>
-                  </a:lnTo>
-                  <a:lnTo>
-                    <a:pt x="4655464" y="1011977"/>
-                  </a:lnTo>
-                  <a:lnTo>
-                    <a:pt x="4727086" y="1021023"/>
-                  </a:lnTo>
-                  <a:lnTo>
-                    <a:pt x="4798709" y="1029932"/>
-                  </a:lnTo>
-                  <a:lnTo>
-                    <a:pt x="4870331" y="1038706"/>
-                  </a:lnTo>
-                  <a:lnTo>
-                    <a:pt x="4941954" y="1047348"/>
-                  </a:lnTo>
-                  <a:lnTo>
-                    <a:pt x="5013576" y="1055859"/>
-                  </a:lnTo>
-                  <a:lnTo>
-                    <a:pt x="5085199" y="1064242"/>
-                  </a:lnTo>
-                  <a:lnTo>
-                    <a:pt x="5156821" y="1072498"/>
-                  </a:lnTo>
-                  <a:lnTo>
-                    <a:pt x="5228444" y="1080629"/>
-                  </a:lnTo>
-                  <a:lnTo>
-                    <a:pt x="5300066" y="1088637"/>
-                  </a:lnTo>
-                  <a:lnTo>
-                    <a:pt x="5371689" y="1096524"/>
-                  </a:lnTo>
-                  <a:lnTo>
-                    <a:pt x="5443311" y="1104292"/>
-                  </a:lnTo>
-                  <a:lnTo>
-                    <a:pt x="5514934" y="1111943"/>
-                  </a:lnTo>
-                  <a:lnTo>
-                    <a:pt x="5586557" y="1119478"/>
-                  </a:lnTo>
-                  <a:lnTo>
-                    <a:pt x="5658179" y="1126899"/>
-                  </a:lnTo>
-                  <a:lnTo>
-                    <a:pt x="5729802" y="1134208"/>
-                  </a:lnTo>
-                  <a:lnTo>
-                    <a:pt x="5801424" y="1141407"/>
-                  </a:lnTo>
-                  <a:lnTo>
-                    <a:pt x="5873047" y="1148497"/>
-                  </a:lnTo>
-                  <a:lnTo>
-                    <a:pt x="5944669" y="1155479"/>
-                  </a:lnTo>
-                  <a:lnTo>
-                    <a:pt x="6016292" y="1162356"/>
-                  </a:lnTo>
-                  <a:lnTo>
-                    <a:pt x="6087914" y="1169130"/>
-                  </a:lnTo>
-                  <a:lnTo>
-                    <a:pt x="6159537" y="1175801"/>
-                  </a:lnTo>
-                  <a:lnTo>
-                    <a:pt x="6231159" y="1182371"/>
-                  </a:lnTo>
-                  <a:lnTo>
-                    <a:pt x="6302782" y="1188841"/>
-                  </a:lnTo>
-                  <a:lnTo>
-                    <a:pt x="6374404" y="1195214"/>
-                  </a:lnTo>
-                  <a:lnTo>
-                    <a:pt x="6446027" y="1201491"/>
-                  </a:lnTo>
-                  <a:lnTo>
-                    <a:pt x="6517649" y="1207673"/>
-                  </a:lnTo>
-                  <a:lnTo>
-                    <a:pt x="6589272" y="1213761"/>
-                  </a:lnTo>
-                  <a:lnTo>
-                    <a:pt x="6660894" y="1219758"/>
-                  </a:lnTo>
-                  <a:lnTo>
-                    <a:pt x="6732517" y="1225663"/>
-                  </a:lnTo>
-                  <a:lnTo>
-                    <a:pt x="6804139" y="1231480"/>
-                  </a:lnTo>
-                  <a:lnTo>
-                    <a:pt x="6875762" y="1237208"/>
-                  </a:lnTo>
-                  <a:lnTo>
-                    <a:pt x="6947385" y="1242851"/>
-                  </a:lnTo>
-                  <a:lnTo>
-                    <a:pt x="7019007" y="1248407"/>
-                  </a:lnTo>
-                  <a:lnTo>
-                    <a:pt x="7090630" y="1253880"/>
+                    <a:pt x="70344" y="8783"/>
+                  </a:lnTo>
+                  <a:lnTo>
+                    <a:pt x="140688" y="17433"/>
+                  </a:lnTo>
+                  <a:lnTo>
+                    <a:pt x="211033" y="25953"/>
+                  </a:lnTo>
+                  <a:lnTo>
+                    <a:pt x="281377" y="34344"/>
+                  </a:lnTo>
+                  <a:lnTo>
+                    <a:pt x="351722" y="42608"/>
+                  </a:lnTo>
+                  <a:lnTo>
+                    <a:pt x="422066" y="50748"/>
+                  </a:lnTo>
+                  <a:lnTo>
+                    <a:pt x="492411" y="58764"/>
+                  </a:lnTo>
+                  <a:lnTo>
+                    <a:pt x="562755" y="66659"/>
+                  </a:lnTo>
+                  <a:lnTo>
+                    <a:pt x="633100" y="74435"/>
+                  </a:lnTo>
+                  <a:lnTo>
+                    <a:pt x="703444" y="82093"/>
+                  </a:lnTo>
+                  <a:lnTo>
+                    <a:pt x="773789" y="89636"/>
+                  </a:lnTo>
+                  <a:lnTo>
+                    <a:pt x="844133" y="97065"/>
+                  </a:lnTo>
+                  <a:lnTo>
+                    <a:pt x="914478" y="104381"/>
+                  </a:lnTo>
+                  <a:lnTo>
+                    <a:pt x="984822" y="111587"/>
+                  </a:lnTo>
+                  <a:lnTo>
+                    <a:pt x="1055167" y="118684"/>
+                  </a:lnTo>
+                  <a:lnTo>
+                    <a:pt x="1125511" y="125674"/>
+                  </a:lnTo>
+                  <a:lnTo>
+                    <a:pt x="1195856" y="132558"/>
+                  </a:lnTo>
+                  <a:lnTo>
+                    <a:pt x="1266200" y="139338"/>
+                  </a:lnTo>
+                  <a:lnTo>
+                    <a:pt x="1336545" y="146015"/>
+                  </a:lnTo>
+                  <a:lnTo>
+                    <a:pt x="1406889" y="152592"/>
+                  </a:lnTo>
+                  <a:lnTo>
+                    <a:pt x="1477234" y="159069"/>
+                  </a:lnTo>
+                  <a:lnTo>
+                    <a:pt x="1547578" y="165449"/>
+                  </a:lnTo>
+                  <a:lnTo>
+                    <a:pt x="1617923" y="171732"/>
+                  </a:lnTo>
+                  <a:lnTo>
+                    <a:pt x="1688267" y="177920"/>
+                  </a:lnTo>
+                  <a:lnTo>
+                    <a:pt x="1758612" y="184014"/>
+                  </a:lnTo>
+                  <a:lnTo>
+                    <a:pt x="1828956" y="190017"/>
+                  </a:lnTo>
+                  <a:lnTo>
+                    <a:pt x="1899301" y="195928"/>
+                  </a:lnTo>
+                  <a:lnTo>
+                    <a:pt x="1969645" y="201751"/>
+                  </a:lnTo>
+                  <a:lnTo>
+                    <a:pt x="2039990" y="207485"/>
+                  </a:lnTo>
+                  <a:lnTo>
+                    <a:pt x="2110334" y="213133"/>
+                  </a:lnTo>
+                  <a:lnTo>
+                    <a:pt x="2180679" y="218695"/>
+                  </a:lnTo>
+                  <a:lnTo>
+                    <a:pt x="2251023" y="224174"/>
+                  </a:lnTo>
+                  <a:lnTo>
+                    <a:pt x="2321368" y="229569"/>
+                  </a:lnTo>
+                  <a:lnTo>
+                    <a:pt x="2391712" y="234883"/>
+                  </a:lnTo>
+                  <a:lnTo>
+                    <a:pt x="2462057" y="240117"/>
+                  </a:lnTo>
+                  <a:lnTo>
+                    <a:pt x="2532401" y="245272"/>
+                  </a:lnTo>
+                  <a:lnTo>
+                    <a:pt x="2602746" y="250348"/>
+                  </a:lnTo>
+                  <a:lnTo>
+                    <a:pt x="2673090" y="255348"/>
+                  </a:lnTo>
+                  <a:lnTo>
+                    <a:pt x="2743435" y="260273"/>
+                  </a:lnTo>
+                  <a:lnTo>
+                    <a:pt x="2813779" y="265123"/>
+                  </a:lnTo>
+                  <a:lnTo>
+                    <a:pt x="2884124" y="269899"/>
+                  </a:lnTo>
+                  <a:lnTo>
+                    <a:pt x="2954468" y="274604"/>
+                  </a:lnTo>
+                  <a:lnTo>
+                    <a:pt x="3024813" y="279237"/>
+                  </a:lnTo>
+                  <a:lnTo>
+                    <a:pt x="3095157" y="283801"/>
+                  </a:lnTo>
+                  <a:lnTo>
+                    <a:pt x="3165502" y="288295"/>
+                  </a:lnTo>
+                  <a:lnTo>
+                    <a:pt x="3235846" y="292722"/>
+                  </a:lnTo>
+                  <a:lnTo>
+                    <a:pt x="3306191" y="297082"/>
+                  </a:lnTo>
+                  <a:lnTo>
+                    <a:pt x="3376535" y="301375"/>
+                  </a:lnTo>
+                  <a:lnTo>
+                    <a:pt x="3446880" y="305604"/>
+                  </a:lnTo>
+                  <a:lnTo>
+                    <a:pt x="3517224" y="309769"/>
+                  </a:lnTo>
+                  <a:lnTo>
+                    <a:pt x="3587569" y="313871"/>
+                  </a:lnTo>
+                  <a:lnTo>
+                    <a:pt x="3657913" y="317911"/>
+                  </a:lnTo>
+                  <a:lnTo>
+                    <a:pt x="3728257" y="321890"/>
+                  </a:lnTo>
+                  <a:lnTo>
+                    <a:pt x="3798602" y="325809"/>
+                  </a:lnTo>
+                  <a:lnTo>
+                    <a:pt x="3868946" y="329669"/>
+                  </a:lnTo>
+                  <a:lnTo>
+                    <a:pt x="3939291" y="333470"/>
+                  </a:lnTo>
+                  <a:lnTo>
+                    <a:pt x="4009635" y="337214"/>
+                  </a:lnTo>
+                  <a:lnTo>
+                    <a:pt x="4079980" y="340901"/>
+                  </a:lnTo>
+                  <a:lnTo>
+                    <a:pt x="4150324" y="344533"/>
+                  </a:lnTo>
+                  <a:lnTo>
+                    <a:pt x="4220669" y="348109"/>
+                  </a:lnTo>
+                  <a:lnTo>
+                    <a:pt x="4291013" y="351632"/>
+                  </a:lnTo>
+                  <a:lnTo>
+                    <a:pt x="4361358" y="355102"/>
+                  </a:lnTo>
+                  <a:lnTo>
+                    <a:pt x="4431702" y="358518"/>
+                  </a:lnTo>
+                  <a:lnTo>
+                    <a:pt x="4502047" y="361884"/>
+                  </a:lnTo>
+                  <a:lnTo>
+                    <a:pt x="4572391" y="365198"/>
+                  </a:lnTo>
+                  <a:lnTo>
+                    <a:pt x="4642736" y="368463"/>
+                  </a:lnTo>
+                  <a:lnTo>
+                    <a:pt x="4713080" y="371678"/>
+                  </a:lnTo>
+                  <a:lnTo>
+                    <a:pt x="4783425" y="374844"/>
+                  </a:lnTo>
+                  <a:lnTo>
+                    <a:pt x="4853769" y="377963"/>
+                  </a:lnTo>
+                  <a:lnTo>
+                    <a:pt x="4924114" y="381034"/>
+                  </a:lnTo>
+                  <a:lnTo>
+                    <a:pt x="4994458" y="384059"/>
+                  </a:lnTo>
+                  <a:lnTo>
+                    <a:pt x="5064803" y="387039"/>
+                  </a:lnTo>
+                  <a:lnTo>
+                    <a:pt x="5135147" y="389973"/>
+                  </a:lnTo>
+                  <a:lnTo>
+                    <a:pt x="5205492" y="392863"/>
+                  </a:lnTo>
+                  <a:lnTo>
+                    <a:pt x="5275836" y="395709"/>
+                  </a:lnTo>
+                  <a:lnTo>
+                    <a:pt x="5346181" y="398513"/>
+                  </a:lnTo>
+                  <a:lnTo>
+                    <a:pt x="5416525" y="401274"/>
+                  </a:lnTo>
+                  <a:lnTo>
+                    <a:pt x="5486870" y="403993"/>
+                  </a:lnTo>
+                  <a:lnTo>
+                    <a:pt x="5557214" y="406671"/>
+                  </a:lnTo>
+                  <a:lnTo>
+                    <a:pt x="5627559" y="409309"/>
+                  </a:lnTo>
+                  <a:lnTo>
+                    <a:pt x="5697903" y="411907"/>
+                  </a:lnTo>
+                  <a:lnTo>
+                    <a:pt x="5768248" y="414465"/>
+                  </a:lnTo>
+                  <a:lnTo>
+                    <a:pt x="5838592" y="416985"/>
+                  </a:lnTo>
+                  <a:lnTo>
+                    <a:pt x="5908937" y="419467"/>
+                  </a:lnTo>
+                  <a:lnTo>
+                    <a:pt x="5979281" y="421911"/>
+                  </a:lnTo>
+                  <a:lnTo>
+                    <a:pt x="6049626" y="424318"/>
+                  </a:lnTo>
+                  <a:lnTo>
+                    <a:pt x="6119970" y="426689"/>
+                  </a:lnTo>
+                  <a:lnTo>
+                    <a:pt x="6190315" y="429025"/>
+                  </a:lnTo>
+                  <a:lnTo>
+                    <a:pt x="6260659" y="431324"/>
+                  </a:lnTo>
+                  <a:lnTo>
+                    <a:pt x="6331004" y="433589"/>
+                  </a:lnTo>
+                  <a:lnTo>
+                    <a:pt x="6401348" y="435820"/>
+                  </a:lnTo>
+                  <a:lnTo>
+                    <a:pt x="6471693" y="438018"/>
+                  </a:lnTo>
+                  <a:lnTo>
+                    <a:pt x="6542037" y="440181"/>
+                  </a:lnTo>
+                  <a:lnTo>
+                    <a:pt x="6612382" y="442313"/>
+                  </a:lnTo>
+                  <a:lnTo>
+                    <a:pt x="6682726" y="444412"/>
+                  </a:lnTo>
+                  <a:lnTo>
+                    <a:pt x="6753071" y="446479"/>
+                  </a:lnTo>
+                  <a:lnTo>
+                    <a:pt x="6823415" y="448515"/>
+                  </a:lnTo>
+                  <a:lnTo>
+                    <a:pt x="6893760" y="450521"/>
+                  </a:lnTo>
+                  <a:lnTo>
+                    <a:pt x="6964104" y="452496"/>
                   </a:lnTo>
                 </a:path>
               </a:pathLst>
@@ -4654,27 +4689,27 @@
         </p:sp>
         <p:sp>
           <p:nvSpPr>
-            <p:cNvPr id="26" name="pl26"/>
+            <p:cNvPr id="27" name="pl27"/>
             <p:cNvSpPr/>
             <p:nvPr/>
           </p:nvSpPr>
           <p:spPr>
             <a:xfrm>
-              <a:off x="817517" y="4727786"/>
-              <a:ext cx="7799693" cy="0"/>
+              <a:off x="887106" y="3100960"/>
+              <a:ext cx="7660515" cy="0"/>
             </a:xfrm>
             <a:custGeom>
               <a:avLst/>
               <a:pathLst>
-                <a:path w="7799693" h="0">
+                <a:path w="7660515" h="0">
                   <a:moveTo>
                     <a:pt x="0" y="0"/>
                   </a:moveTo>
                   <a:lnTo>
-                    <a:pt x="7799693" y="0"/>
-                  </a:lnTo>
-                  <a:lnTo>
-                    <a:pt x="7799693" y="0"/>
+                    <a:pt x="7660515" y="0"/>
+                  </a:lnTo>
+                  <a:lnTo>
+                    <a:pt x="7660515" y="0"/>
                   </a:lnTo>
                 </a:path>
               </a:pathLst>
@@ -4697,21 +4732,21 @@
         </p:sp>
         <p:sp>
           <p:nvSpPr>
-            <p:cNvPr id="27" name="pl27"/>
+            <p:cNvPr id="28" name="pl28"/>
             <p:cNvSpPr/>
             <p:nvPr/>
           </p:nvSpPr>
           <p:spPr>
             <a:xfrm>
-              <a:off x="4293144" y="2073503"/>
-              <a:ext cx="0" cy="3649639"/>
+              <a:off x="4300713" y="2143092"/>
+              <a:ext cx="0" cy="1317069"/>
             </a:xfrm>
             <a:custGeom>
               <a:avLst/>
               <a:pathLst>
-                <a:path w="0" h="3649639">
+                <a:path w="0" h="1317069">
                   <a:moveTo>
-                    <a:pt x="0" y="3649639"/>
+                    <a:pt x="0" y="1317069"/>
                   </a:moveTo>
                   <a:lnTo>
                     <a:pt x="0" y="0"/>
@@ -4740,21 +4775,21 @@
         </p:sp>
         <p:sp>
           <p:nvSpPr>
-            <p:cNvPr id="28" name="pl28"/>
+            <p:cNvPr id="29" name="pl29"/>
             <p:cNvSpPr/>
             <p:nvPr/>
           </p:nvSpPr>
           <p:spPr>
             <a:xfrm>
-              <a:off x="3074393" y="2073503"/>
-              <a:ext cx="0" cy="3649639"/>
+              <a:off x="3103710" y="2143092"/>
+              <a:ext cx="0" cy="1317069"/>
             </a:xfrm>
             <a:custGeom>
               <a:avLst/>
               <a:pathLst>
-                <a:path w="0" h="3649639">
+                <a:path w="0" h="1317069">
                   <a:moveTo>
-                    <a:pt x="0" y="3649639"/>
+                    <a:pt x="0" y="1317069"/>
                   </a:moveTo>
                   <a:lnTo>
                     <a:pt x="0" y="0"/>
@@ -4783,21 +4818,21 @@
         </p:sp>
         <p:sp>
           <p:nvSpPr>
-            <p:cNvPr id="29" name="pl29"/>
+            <p:cNvPr id="30" name="pl30"/>
             <p:cNvSpPr/>
             <p:nvPr/>
           </p:nvSpPr>
           <p:spPr>
             <a:xfrm>
-              <a:off x="5518580" y="2073503"/>
-              <a:ext cx="0" cy="3649639"/>
+              <a:off x="5504283" y="2143092"/>
+              <a:ext cx="0" cy="1317069"/>
             </a:xfrm>
             <a:custGeom>
               <a:avLst/>
               <a:pathLst>
-                <a:path w="0" h="3649639">
+                <a:path w="0" h="1317069">
                   <a:moveTo>
-                    <a:pt x="0" y="3649639"/>
+                    <a:pt x="0" y="1317069"/>
                   </a:moveTo>
                   <a:lnTo>
                     <a:pt x="0" y="0"/>
@@ -4826,13 +4861,13 @@
         </p:sp>
         <p:sp>
           <p:nvSpPr>
-            <p:cNvPr id="30" name="tx30"/>
+            <p:cNvPr id="31" name="tx31"/>
             <p:cNvSpPr/>
             <p:nvPr/>
           </p:nvSpPr>
           <p:spPr>
             <a:xfrm>
-              <a:off x="692708" y="5517199"/>
+              <a:off x="762297" y="3360243"/>
               <a:ext cx="62179" cy="80101"/>
             </a:xfrm>
             <a:prstGeom prst="rect">
@@ -4872,13 +4907,13 @@
         </p:sp>
         <p:sp>
           <p:nvSpPr>
-            <p:cNvPr id="31" name="tx31"/>
+            <p:cNvPr id="32" name="tx32"/>
             <p:cNvSpPr/>
             <p:nvPr/>
           </p:nvSpPr>
           <p:spPr>
             <a:xfrm>
-              <a:off x="692708" y="4687735"/>
+              <a:off x="762297" y="3060909"/>
               <a:ext cx="62179" cy="80101"/>
             </a:xfrm>
             <a:prstGeom prst="rect">
@@ -4918,13 +4953,13 @@
         </p:sp>
         <p:sp>
           <p:nvSpPr>
-            <p:cNvPr id="32" name="tx32"/>
+            <p:cNvPr id="33" name="tx33"/>
             <p:cNvSpPr/>
             <p:nvPr/>
           </p:nvSpPr>
           <p:spPr>
             <a:xfrm>
-              <a:off x="692708" y="3858272"/>
+              <a:off x="762297" y="2761575"/>
               <a:ext cx="62179" cy="80101"/>
             </a:xfrm>
             <a:prstGeom prst="rect">
@@ -4964,13 +4999,13 @@
         </p:sp>
         <p:sp>
           <p:nvSpPr>
-            <p:cNvPr id="33" name="tx33"/>
+            <p:cNvPr id="34" name="tx34"/>
             <p:cNvSpPr/>
             <p:nvPr/>
           </p:nvSpPr>
           <p:spPr>
             <a:xfrm>
-              <a:off x="692708" y="3028808"/>
+              <a:off x="762297" y="2462242"/>
               <a:ext cx="62179" cy="80101"/>
             </a:xfrm>
             <a:prstGeom prst="rect">
@@ -5010,13 +5045,13 @@
         </p:sp>
         <p:sp>
           <p:nvSpPr>
-            <p:cNvPr id="34" name="tx34"/>
+            <p:cNvPr id="35" name="tx35"/>
             <p:cNvSpPr/>
             <p:nvPr/>
           </p:nvSpPr>
           <p:spPr>
             <a:xfrm>
-              <a:off x="692708" y="2199345"/>
+              <a:off x="762297" y="2162908"/>
               <a:ext cx="62179" cy="80101"/>
             </a:xfrm>
             <a:prstGeom prst="rect">
@@ -5056,13 +5091,13 @@
         </p:sp>
         <p:sp>
           <p:nvSpPr>
-            <p:cNvPr id="35" name="tx35"/>
+            <p:cNvPr id="36" name="tx36"/>
             <p:cNvSpPr/>
             <p:nvPr/>
           </p:nvSpPr>
           <p:spPr>
             <a:xfrm>
-              <a:off x="2134610" y="5785772"/>
+              <a:off x="2179256" y="3522791"/>
               <a:ext cx="161574" cy="80101"/>
             </a:xfrm>
             <a:prstGeom prst="rect">
@@ -5102,13 +5137,13 @@
         </p:sp>
         <p:sp>
           <p:nvSpPr>
-            <p:cNvPr id="36" name="tx36"/>
+            <p:cNvPr id="37" name="tx37"/>
             <p:cNvSpPr/>
             <p:nvPr/>
           </p:nvSpPr>
           <p:spPr>
             <a:xfrm>
-              <a:off x="3875731" y="5785772"/>
+              <a:off x="3889308" y="3522791"/>
               <a:ext cx="161574" cy="80101"/>
             </a:xfrm>
             <a:prstGeom prst="rect">
@@ -5148,13 +5183,13 @@
         </p:sp>
         <p:sp>
           <p:nvSpPr>
-            <p:cNvPr id="37" name="tx37"/>
+            <p:cNvPr id="38" name="tx38"/>
             <p:cNvSpPr/>
             <p:nvPr/>
           </p:nvSpPr>
           <p:spPr>
             <a:xfrm>
-              <a:off x="5666549" y="5785772"/>
+              <a:off x="5649057" y="3522791"/>
               <a:ext cx="62179" cy="80101"/>
             </a:xfrm>
             <a:prstGeom prst="rect">
@@ -5194,13 +5229,13 @@
         </p:sp>
         <p:sp>
           <p:nvSpPr>
-            <p:cNvPr id="38" name="tx38"/>
+            <p:cNvPr id="39" name="tx39"/>
             <p:cNvSpPr/>
             <p:nvPr/>
           </p:nvSpPr>
           <p:spPr>
             <a:xfrm>
-              <a:off x="7376580" y="5785772"/>
+              <a:off x="7328020" y="3522791"/>
               <a:ext cx="124358" cy="80101"/>
             </a:xfrm>
             <a:prstGeom prst="rect">
@@ -5240,13 +5275,13 @@
         </p:sp>
         <p:sp>
           <p:nvSpPr>
-            <p:cNvPr id="39" name="tx39"/>
+            <p:cNvPr id="40" name="tx40"/>
             <p:cNvSpPr/>
             <p:nvPr/>
           </p:nvSpPr>
           <p:spPr>
             <a:xfrm>
-              <a:off x="1561815" y="5925448"/>
+              <a:off x="1561815" y="3662467"/>
               <a:ext cx="6311097" cy="100218"/>
             </a:xfrm>
             <a:prstGeom prst="rect">
@@ -5286,13 +5321,13 @@
         </p:sp>
         <p:sp>
           <p:nvSpPr>
-            <p:cNvPr id="40" name="tx40"/>
+            <p:cNvPr id="41" name="tx41"/>
             <p:cNvSpPr/>
             <p:nvPr/>
           </p:nvSpPr>
           <p:spPr>
             <a:xfrm rot="-5400000">
-              <a:off x="68446" y="3848213"/>
+              <a:off x="138035" y="2751517"/>
               <a:ext cx="1016904" cy="100218"/>
             </a:xfrm>
             <a:prstGeom prst="rect">
@@ -5332,13 +5367,13 @@
         </p:sp>
         <p:sp>
           <p:nvSpPr>
-            <p:cNvPr id="41" name="tx41"/>
+            <p:cNvPr id="42" name="tx42"/>
             <p:cNvSpPr/>
             <p:nvPr/>
           </p:nvSpPr>
           <p:spPr>
             <a:xfrm>
-              <a:off x="817517" y="1896563"/>
+              <a:off x="887106" y="1966152"/>
               <a:ext cx="6959864" cy="82021"/>
             </a:xfrm>
             <a:prstGeom prst="rect">
@@ -5378,13 +5413,3789 @@
         </p:sp>
         <p:sp>
           <p:nvSpPr>
-            <p:cNvPr id="42" name="tx42"/>
+            <p:cNvPr id="43" name="tx43"/>
             <p:cNvSpPr/>
             <p:nvPr/>
           </p:nvSpPr>
           <p:spPr>
             <a:xfrm>
-              <a:off x="817517" y="1669789"/>
+              <a:off x="887106" y="1739378"/>
+              <a:ext cx="3462375" cy="120152"/>
+            </a:xfrm>
+            <a:prstGeom prst="rect">
+              <a:avLst/>
+            </a:prstGeom>
+            <a:noFill/>
+          </p:spPr>
+          <p:txBody>
+            <a:bodyPr lIns="0" rIns="0" tIns="0" bIns="0" anchorCtr="1" anchor="ctr" wrap="none"/>
+            <a:lstStyle/>
+            <a:p>
+              <a:pPr algn="l" marL="0" marR="0" indent="0">
+                <a:lnSpc>
+                  <a:spcPts val="1320"/>
+                </a:lnSpc>
+                <a:spcBef>
+                  <a:spcPts val="0"/>
+                </a:spcBef>
+                <a:spcAft>
+                  <a:spcPts val="0"/>
+                </a:spcAft>
+              </a:pPr>
+              <a:r>
+                <a:rPr sz="1320">
+                  <a:solidFill>
+                    <a:srgbClr val="000000">
+                      <a:alpha val="100000"/>
+                    </a:srgbClr>
+                  </a:solidFill>
+                  <a:latin typeface="Helvetica"/>
+                  <a:cs typeface="Helvetica"/>
+                </a:rPr>
+                <a:t>AKI Grade 2 (Sensitivity, Carboplatin AUC ≥ 3)</a:t>
+              </a:r>
+            </a:p>
+          </p:txBody>
+        </p:sp>
+        <p:sp>
+          <p:nvSpPr>
+            <p:cNvPr id="44" name="pl44"/>
+            <p:cNvSpPr/>
+            <p:nvPr/>
+          </p:nvSpPr>
+          <p:spPr>
+            <a:xfrm>
+              <a:off x="887106" y="5444019"/>
+              <a:ext cx="7660515" cy="0"/>
+            </a:xfrm>
+            <a:custGeom>
+              <a:avLst/>
+              <a:pathLst>
+                <a:path w="7660515" h="0">
+                  <a:moveTo>
+                    <a:pt x="0" y="0"/>
+                  </a:moveTo>
+                  <a:lnTo>
+                    <a:pt x="7660515" y="0"/>
+                  </a:lnTo>
+                  <a:lnTo>
+                    <a:pt x="7660515" y="0"/>
+                  </a:lnTo>
+                </a:path>
+              </a:pathLst>
+            </a:custGeom>
+            <a:ln w="6775" cap="flat">
+              <a:solidFill>
+                <a:srgbClr val="EBEBEB">
+                  <a:alpha val="100000"/>
+                </a:srgbClr>
+              </a:solidFill>
+              <a:prstDash val="solid"/>
+              <a:round/>
+            </a:ln>
+          </p:spPr>
+          <p:txBody>
+            <a:bodyPr/>
+            <a:lstStyle/>
+            <a:p/>
+          </p:txBody>
+        </p:sp>
+        <p:sp>
+          <p:nvSpPr>
+            <p:cNvPr id="45" name="pl45"/>
+            <p:cNvSpPr/>
+            <p:nvPr/>
+          </p:nvSpPr>
+          <p:spPr>
+            <a:xfrm>
+              <a:off x="887106" y="5144686"/>
+              <a:ext cx="7660515" cy="0"/>
+            </a:xfrm>
+            <a:custGeom>
+              <a:avLst/>
+              <a:pathLst>
+                <a:path w="7660515" h="0">
+                  <a:moveTo>
+                    <a:pt x="0" y="0"/>
+                  </a:moveTo>
+                  <a:lnTo>
+                    <a:pt x="7660515" y="0"/>
+                  </a:lnTo>
+                  <a:lnTo>
+                    <a:pt x="7660515" y="0"/>
+                  </a:lnTo>
+                </a:path>
+              </a:pathLst>
+            </a:custGeom>
+            <a:ln w="6775" cap="flat">
+              <a:solidFill>
+                <a:srgbClr val="EBEBEB">
+                  <a:alpha val="100000"/>
+                </a:srgbClr>
+              </a:solidFill>
+              <a:prstDash val="solid"/>
+              <a:round/>
+            </a:ln>
+          </p:spPr>
+          <p:txBody>
+            <a:bodyPr/>
+            <a:lstStyle/>
+            <a:p/>
+          </p:txBody>
+        </p:sp>
+        <p:sp>
+          <p:nvSpPr>
+            <p:cNvPr id="46" name="pl46"/>
+            <p:cNvSpPr/>
+            <p:nvPr/>
+          </p:nvSpPr>
+          <p:spPr>
+            <a:xfrm>
+              <a:off x="887106" y="4845352"/>
+              <a:ext cx="7660515" cy="0"/>
+            </a:xfrm>
+            <a:custGeom>
+              <a:avLst/>
+              <a:pathLst>
+                <a:path w="7660515" h="0">
+                  <a:moveTo>
+                    <a:pt x="0" y="0"/>
+                  </a:moveTo>
+                  <a:lnTo>
+                    <a:pt x="7660515" y="0"/>
+                  </a:lnTo>
+                  <a:lnTo>
+                    <a:pt x="7660515" y="0"/>
+                  </a:lnTo>
+                </a:path>
+              </a:pathLst>
+            </a:custGeom>
+            <a:ln w="6775" cap="flat">
+              <a:solidFill>
+                <a:srgbClr val="EBEBEB">
+                  <a:alpha val="100000"/>
+                </a:srgbClr>
+              </a:solidFill>
+              <a:prstDash val="solid"/>
+              <a:round/>
+            </a:ln>
+          </p:spPr>
+          <p:txBody>
+            <a:bodyPr/>
+            <a:lstStyle/>
+            <a:p/>
+          </p:txBody>
+        </p:sp>
+        <p:sp>
+          <p:nvSpPr>
+            <p:cNvPr id="47" name="pl47"/>
+            <p:cNvSpPr/>
+            <p:nvPr/>
+          </p:nvSpPr>
+          <p:spPr>
+            <a:xfrm>
+              <a:off x="887106" y="4546018"/>
+              <a:ext cx="7660515" cy="0"/>
+            </a:xfrm>
+            <a:custGeom>
+              <a:avLst/>
+              <a:pathLst>
+                <a:path w="7660515" h="0">
+                  <a:moveTo>
+                    <a:pt x="0" y="0"/>
+                  </a:moveTo>
+                  <a:lnTo>
+                    <a:pt x="7660515" y="0"/>
+                  </a:lnTo>
+                  <a:lnTo>
+                    <a:pt x="7660515" y="0"/>
+                  </a:lnTo>
+                </a:path>
+              </a:pathLst>
+            </a:custGeom>
+            <a:ln w="6775" cap="flat">
+              <a:solidFill>
+                <a:srgbClr val="EBEBEB">
+                  <a:alpha val="100000"/>
+                </a:srgbClr>
+              </a:solidFill>
+              <a:prstDash val="solid"/>
+              <a:round/>
+            </a:ln>
+          </p:spPr>
+          <p:txBody>
+            <a:bodyPr/>
+            <a:lstStyle/>
+            <a:p/>
+          </p:txBody>
+        </p:sp>
+        <p:sp>
+          <p:nvSpPr>
+            <p:cNvPr id="48" name="pl48"/>
+            <p:cNvSpPr/>
+            <p:nvPr/>
+          </p:nvSpPr>
+          <p:spPr>
+            <a:xfrm>
+              <a:off x="977504" y="4336484"/>
+              <a:ext cx="0" cy="1317069"/>
+            </a:xfrm>
+            <a:custGeom>
+              <a:avLst/>
+              <a:pathLst>
+                <a:path w="0" h="1317069">
+                  <a:moveTo>
+                    <a:pt x="0" y="1317069"/>
+                  </a:moveTo>
+                  <a:lnTo>
+                    <a:pt x="0" y="0"/>
+                  </a:lnTo>
+                  <a:lnTo>
+                    <a:pt x="0" y="0"/>
+                  </a:lnTo>
+                </a:path>
+              </a:pathLst>
+            </a:custGeom>
+            <a:ln w="6775" cap="flat">
+              <a:solidFill>
+                <a:srgbClr val="EBEBEB">
+                  <a:alpha val="100000"/>
+                </a:srgbClr>
+              </a:solidFill>
+              <a:prstDash val="solid"/>
+              <a:round/>
+            </a:ln>
+          </p:spPr>
+          <p:txBody>
+            <a:bodyPr/>
+            <a:lstStyle/>
+            <a:p/>
+          </p:txBody>
+        </p:sp>
+        <p:sp>
+          <p:nvSpPr>
+            <p:cNvPr id="49" name="pl49"/>
+            <p:cNvSpPr/>
+            <p:nvPr/>
+          </p:nvSpPr>
+          <p:spPr>
+            <a:xfrm>
+              <a:off x="1832530" y="4336484"/>
+              <a:ext cx="0" cy="1317069"/>
+            </a:xfrm>
+            <a:custGeom>
+              <a:avLst/>
+              <a:pathLst>
+                <a:path w="0" h="1317069">
+                  <a:moveTo>
+                    <a:pt x="0" y="1317069"/>
+                  </a:moveTo>
+                  <a:lnTo>
+                    <a:pt x="0" y="0"/>
+                  </a:lnTo>
+                  <a:lnTo>
+                    <a:pt x="0" y="0"/>
+                  </a:lnTo>
+                </a:path>
+              </a:pathLst>
+            </a:custGeom>
+            <a:ln w="6775" cap="flat">
+              <a:solidFill>
+                <a:srgbClr val="EBEBEB">
+                  <a:alpha val="100000"/>
+                </a:srgbClr>
+              </a:solidFill>
+              <a:prstDash val="solid"/>
+              <a:round/>
+            </a:ln>
+          </p:spPr>
+          <p:txBody>
+            <a:bodyPr/>
+            <a:lstStyle/>
+            <a:p/>
+          </p:txBody>
+        </p:sp>
+        <p:sp>
+          <p:nvSpPr>
+            <p:cNvPr id="50" name="pl50"/>
+            <p:cNvSpPr/>
+            <p:nvPr/>
+          </p:nvSpPr>
+          <p:spPr>
+            <a:xfrm>
+              <a:off x="2687556" y="4336484"/>
+              <a:ext cx="0" cy="1317069"/>
+            </a:xfrm>
+            <a:custGeom>
+              <a:avLst/>
+              <a:pathLst>
+                <a:path w="0" h="1317069">
+                  <a:moveTo>
+                    <a:pt x="0" y="1317069"/>
+                  </a:moveTo>
+                  <a:lnTo>
+                    <a:pt x="0" y="0"/>
+                  </a:lnTo>
+                  <a:lnTo>
+                    <a:pt x="0" y="0"/>
+                  </a:lnTo>
+                </a:path>
+              </a:pathLst>
+            </a:custGeom>
+            <a:ln w="6775" cap="flat">
+              <a:solidFill>
+                <a:srgbClr val="EBEBEB">
+                  <a:alpha val="100000"/>
+                </a:srgbClr>
+              </a:solidFill>
+              <a:prstDash val="solid"/>
+              <a:round/>
+            </a:ln>
+          </p:spPr>
+          <p:txBody>
+            <a:bodyPr/>
+            <a:lstStyle/>
+            <a:p/>
+          </p:txBody>
+        </p:sp>
+        <p:sp>
+          <p:nvSpPr>
+            <p:cNvPr id="51" name="pl51"/>
+            <p:cNvSpPr/>
+            <p:nvPr/>
+          </p:nvSpPr>
+          <p:spPr>
+            <a:xfrm>
+              <a:off x="3542582" y="4336484"/>
+              <a:ext cx="0" cy="1317069"/>
+            </a:xfrm>
+            <a:custGeom>
+              <a:avLst/>
+              <a:pathLst>
+                <a:path w="0" h="1317069">
+                  <a:moveTo>
+                    <a:pt x="0" y="1317069"/>
+                  </a:moveTo>
+                  <a:lnTo>
+                    <a:pt x="0" y="0"/>
+                  </a:lnTo>
+                  <a:lnTo>
+                    <a:pt x="0" y="0"/>
+                  </a:lnTo>
+                </a:path>
+              </a:pathLst>
+            </a:custGeom>
+            <a:ln w="6775" cap="flat">
+              <a:solidFill>
+                <a:srgbClr val="EBEBEB">
+                  <a:alpha val="100000"/>
+                </a:srgbClr>
+              </a:solidFill>
+              <a:prstDash val="solid"/>
+              <a:round/>
+            </a:ln>
+          </p:spPr>
+          <p:txBody>
+            <a:bodyPr/>
+            <a:lstStyle/>
+            <a:p/>
+          </p:txBody>
+        </p:sp>
+        <p:sp>
+          <p:nvSpPr>
+            <p:cNvPr id="52" name="pl52"/>
+            <p:cNvSpPr/>
+            <p:nvPr/>
+          </p:nvSpPr>
+          <p:spPr>
+            <a:xfrm>
+              <a:off x="4397608" y="4336484"/>
+              <a:ext cx="0" cy="1317069"/>
+            </a:xfrm>
+            <a:custGeom>
+              <a:avLst/>
+              <a:pathLst>
+                <a:path w="0" h="1317069">
+                  <a:moveTo>
+                    <a:pt x="0" y="1317069"/>
+                  </a:moveTo>
+                  <a:lnTo>
+                    <a:pt x="0" y="0"/>
+                  </a:lnTo>
+                  <a:lnTo>
+                    <a:pt x="0" y="0"/>
+                  </a:lnTo>
+                </a:path>
+              </a:pathLst>
+            </a:custGeom>
+            <a:ln w="6775" cap="flat">
+              <a:solidFill>
+                <a:srgbClr val="EBEBEB">
+                  <a:alpha val="100000"/>
+                </a:srgbClr>
+              </a:solidFill>
+              <a:prstDash val="solid"/>
+              <a:round/>
+            </a:ln>
+          </p:spPr>
+          <p:txBody>
+            <a:bodyPr/>
+            <a:lstStyle/>
+            <a:p/>
+          </p:txBody>
+        </p:sp>
+        <p:sp>
+          <p:nvSpPr>
+            <p:cNvPr id="53" name="pl53"/>
+            <p:cNvSpPr/>
+            <p:nvPr/>
+          </p:nvSpPr>
+          <p:spPr>
+            <a:xfrm>
+              <a:off x="5252634" y="4336484"/>
+              <a:ext cx="0" cy="1317069"/>
+            </a:xfrm>
+            <a:custGeom>
+              <a:avLst/>
+              <a:pathLst>
+                <a:path w="0" h="1317069">
+                  <a:moveTo>
+                    <a:pt x="0" y="1317069"/>
+                  </a:moveTo>
+                  <a:lnTo>
+                    <a:pt x="0" y="0"/>
+                  </a:lnTo>
+                  <a:lnTo>
+                    <a:pt x="0" y="0"/>
+                  </a:lnTo>
+                </a:path>
+              </a:pathLst>
+            </a:custGeom>
+            <a:ln w="6775" cap="flat">
+              <a:solidFill>
+                <a:srgbClr val="EBEBEB">
+                  <a:alpha val="100000"/>
+                </a:srgbClr>
+              </a:solidFill>
+              <a:prstDash val="solid"/>
+              <a:round/>
+            </a:ln>
+          </p:spPr>
+          <p:txBody>
+            <a:bodyPr/>
+            <a:lstStyle/>
+            <a:p/>
+          </p:txBody>
+        </p:sp>
+        <p:sp>
+          <p:nvSpPr>
+            <p:cNvPr id="54" name="pl54"/>
+            <p:cNvSpPr/>
+            <p:nvPr/>
+          </p:nvSpPr>
+          <p:spPr>
+            <a:xfrm>
+              <a:off x="6107660" y="4336484"/>
+              <a:ext cx="0" cy="1317069"/>
+            </a:xfrm>
+            <a:custGeom>
+              <a:avLst/>
+              <a:pathLst>
+                <a:path w="0" h="1317069">
+                  <a:moveTo>
+                    <a:pt x="0" y="1317069"/>
+                  </a:moveTo>
+                  <a:lnTo>
+                    <a:pt x="0" y="0"/>
+                  </a:lnTo>
+                  <a:lnTo>
+                    <a:pt x="0" y="0"/>
+                  </a:lnTo>
+                </a:path>
+              </a:pathLst>
+            </a:custGeom>
+            <a:ln w="6775" cap="flat">
+              <a:solidFill>
+                <a:srgbClr val="EBEBEB">
+                  <a:alpha val="100000"/>
+                </a:srgbClr>
+              </a:solidFill>
+              <a:prstDash val="solid"/>
+              <a:round/>
+            </a:ln>
+          </p:spPr>
+          <p:txBody>
+            <a:bodyPr/>
+            <a:lstStyle/>
+            <a:p/>
+          </p:txBody>
+        </p:sp>
+        <p:sp>
+          <p:nvSpPr>
+            <p:cNvPr id="55" name="pl55"/>
+            <p:cNvSpPr/>
+            <p:nvPr/>
+          </p:nvSpPr>
+          <p:spPr>
+            <a:xfrm>
+              <a:off x="6962686" y="4336484"/>
+              <a:ext cx="0" cy="1317069"/>
+            </a:xfrm>
+            <a:custGeom>
+              <a:avLst/>
+              <a:pathLst>
+                <a:path w="0" h="1317069">
+                  <a:moveTo>
+                    <a:pt x="0" y="1317069"/>
+                  </a:moveTo>
+                  <a:lnTo>
+                    <a:pt x="0" y="0"/>
+                  </a:lnTo>
+                  <a:lnTo>
+                    <a:pt x="0" y="0"/>
+                  </a:lnTo>
+                </a:path>
+              </a:pathLst>
+            </a:custGeom>
+            <a:ln w="6775" cap="flat">
+              <a:solidFill>
+                <a:srgbClr val="EBEBEB">
+                  <a:alpha val="100000"/>
+                </a:srgbClr>
+              </a:solidFill>
+              <a:prstDash val="solid"/>
+              <a:round/>
+            </a:ln>
+          </p:spPr>
+          <p:txBody>
+            <a:bodyPr/>
+            <a:lstStyle/>
+            <a:p/>
+          </p:txBody>
+        </p:sp>
+        <p:sp>
+          <p:nvSpPr>
+            <p:cNvPr id="56" name="pl56"/>
+            <p:cNvSpPr/>
+            <p:nvPr/>
+          </p:nvSpPr>
+          <p:spPr>
+            <a:xfrm>
+              <a:off x="7817712" y="4336484"/>
+              <a:ext cx="0" cy="1317069"/>
+            </a:xfrm>
+            <a:custGeom>
+              <a:avLst/>
+              <a:pathLst>
+                <a:path w="0" h="1317069">
+                  <a:moveTo>
+                    <a:pt x="0" y="1317069"/>
+                  </a:moveTo>
+                  <a:lnTo>
+                    <a:pt x="0" y="0"/>
+                  </a:lnTo>
+                  <a:lnTo>
+                    <a:pt x="0" y="0"/>
+                  </a:lnTo>
+                </a:path>
+              </a:pathLst>
+            </a:custGeom>
+            <a:ln w="6775" cap="flat">
+              <a:solidFill>
+                <a:srgbClr val="EBEBEB">
+                  <a:alpha val="100000"/>
+                </a:srgbClr>
+              </a:solidFill>
+              <a:prstDash val="solid"/>
+              <a:round/>
+            </a:ln>
+          </p:spPr>
+          <p:txBody>
+            <a:bodyPr/>
+            <a:lstStyle/>
+            <a:p/>
+          </p:txBody>
+        </p:sp>
+        <p:sp>
+          <p:nvSpPr>
+            <p:cNvPr id="57" name="pl57"/>
+            <p:cNvSpPr/>
+            <p:nvPr/>
+          </p:nvSpPr>
+          <p:spPr>
+            <a:xfrm>
+              <a:off x="887106" y="5593686"/>
+              <a:ext cx="7660515" cy="0"/>
+            </a:xfrm>
+            <a:custGeom>
+              <a:avLst/>
+              <a:pathLst>
+                <a:path w="7660515" h="0">
+                  <a:moveTo>
+                    <a:pt x="0" y="0"/>
+                  </a:moveTo>
+                  <a:lnTo>
+                    <a:pt x="7660515" y="0"/>
+                  </a:lnTo>
+                  <a:lnTo>
+                    <a:pt x="7660515" y="0"/>
+                  </a:lnTo>
+                </a:path>
+              </a:pathLst>
+            </a:custGeom>
+            <a:ln w="13550" cap="flat">
+              <a:solidFill>
+                <a:srgbClr val="EBEBEB">
+                  <a:alpha val="100000"/>
+                </a:srgbClr>
+              </a:solidFill>
+              <a:prstDash val="solid"/>
+              <a:round/>
+            </a:ln>
+          </p:spPr>
+          <p:txBody>
+            <a:bodyPr/>
+            <a:lstStyle/>
+            <a:p/>
+          </p:txBody>
+        </p:sp>
+        <p:sp>
+          <p:nvSpPr>
+            <p:cNvPr id="58" name="pl58"/>
+            <p:cNvSpPr/>
+            <p:nvPr/>
+          </p:nvSpPr>
+          <p:spPr>
+            <a:xfrm>
+              <a:off x="887106" y="5294352"/>
+              <a:ext cx="7660515" cy="0"/>
+            </a:xfrm>
+            <a:custGeom>
+              <a:avLst/>
+              <a:pathLst>
+                <a:path w="7660515" h="0">
+                  <a:moveTo>
+                    <a:pt x="0" y="0"/>
+                  </a:moveTo>
+                  <a:lnTo>
+                    <a:pt x="7660515" y="0"/>
+                  </a:lnTo>
+                  <a:lnTo>
+                    <a:pt x="7660515" y="0"/>
+                  </a:lnTo>
+                </a:path>
+              </a:pathLst>
+            </a:custGeom>
+            <a:ln w="13550" cap="flat">
+              <a:solidFill>
+                <a:srgbClr val="EBEBEB">
+                  <a:alpha val="100000"/>
+                </a:srgbClr>
+              </a:solidFill>
+              <a:prstDash val="solid"/>
+              <a:round/>
+            </a:ln>
+          </p:spPr>
+          <p:txBody>
+            <a:bodyPr/>
+            <a:lstStyle/>
+            <a:p/>
+          </p:txBody>
+        </p:sp>
+        <p:sp>
+          <p:nvSpPr>
+            <p:cNvPr id="59" name="pl59"/>
+            <p:cNvSpPr/>
+            <p:nvPr/>
+          </p:nvSpPr>
+          <p:spPr>
+            <a:xfrm>
+              <a:off x="887106" y="4995019"/>
+              <a:ext cx="7660515" cy="0"/>
+            </a:xfrm>
+            <a:custGeom>
+              <a:avLst/>
+              <a:pathLst>
+                <a:path w="7660515" h="0">
+                  <a:moveTo>
+                    <a:pt x="0" y="0"/>
+                  </a:moveTo>
+                  <a:lnTo>
+                    <a:pt x="7660515" y="0"/>
+                  </a:lnTo>
+                  <a:lnTo>
+                    <a:pt x="7660515" y="0"/>
+                  </a:lnTo>
+                </a:path>
+              </a:pathLst>
+            </a:custGeom>
+            <a:ln w="13550" cap="flat">
+              <a:solidFill>
+                <a:srgbClr val="EBEBEB">
+                  <a:alpha val="100000"/>
+                </a:srgbClr>
+              </a:solidFill>
+              <a:prstDash val="solid"/>
+              <a:round/>
+            </a:ln>
+          </p:spPr>
+          <p:txBody>
+            <a:bodyPr/>
+            <a:lstStyle/>
+            <a:p/>
+          </p:txBody>
+        </p:sp>
+        <p:sp>
+          <p:nvSpPr>
+            <p:cNvPr id="60" name="pl60"/>
+            <p:cNvSpPr/>
+            <p:nvPr/>
+          </p:nvSpPr>
+          <p:spPr>
+            <a:xfrm>
+              <a:off x="887106" y="4695685"/>
+              <a:ext cx="7660515" cy="0"/>
+            </a:xfrm>
+            <a:custGeom>
+              <a:avLst/>
+              <a:pathLst>
+                <a:path w="7660515" h="0">
+                  <a:moveTo>
+                    <a:pt x="0" y="0"/>
+                  </a:moveTo>
+                  <a:lnTo>
+                    <a:pt x="7660515" y="0"/>
+                  </a:lnTo>
+                  <a:lnTo>
+                    <a:pt x="7660515" y="0"/>
+                  </a:lnTo>
+                </a:path>
+              </a:pathLst>
+            </a:custGeom>
+            <a:ln w="13550" cap="flat">
+              <a:solidFill>
+                <a:srgbClr val="EBEBEB">
+                  <a:alpha val="100000"/>
+                </a:srgbClr>
+              </a:solidFill>
+              <a:prstDash val="solid"/>
+              <a:round/>
+            </a:ln>
+          </p:spPr>
+          <p:txBody>
+            <a:bodyPr/>
+            <a:lstStyle/>
+            <a:p/>
+          </p:txBody>
+        </p:sp>
+        <p:sp>
+          <p:nvSpPr>
+            <p:cNvPr id="61" name="pl61"/>
+            <p:cNvSpPr/>
+            <p:nvPr/>
+          </p:nvSpPr>
+          <p:spPr>
+            <a:xfrm>
+              <a:off x="887106" y="4396351"/>
+              <a:ext cx="7660515" cy="0"/>
+            </a:xfrm>
+            <a:custGeom>
+              <a:avLst/>
+              <a:pathLst>
+                <a:path w="7660515" h="0">
+                  <a:moveTo>
+                    <a:pt x="0" y="0"/>
+                  </a:moveTo>
+                  <a:lnTo>
+                    <a:pt x="7660515" y="0"/>
+                  </a:lnTo>
+                  <a:lnTo>
+                    <a:pt x="7660515" y="0"/>
+                  </a:lnTo>
+                </a:path>
+              </a:pathLst>
+            </a:custGeom>
+            <a:ln w="13550" cap="flat">
+              <a:solidFill>
+                <a:srgbClr val="EBEBEB">
+                  <a:alpha val="100000"/>
+                </a:srgbClr>
+              </a:solidFill>
+              <a:prstDash val="solid"/>
+              <a:round/>
+            </a:ln>
+          </p:spPr>
+          <p:txBody>
+            <a:bodyPr/>
+            <a:lstStyle/>
+            <a:p/>
+          </p:txBody>
+        </p:sp>
+        <p:sp>
+          <p:nvSpPr>
+            <p:cNvPr id="62" name="pl62"/>
+            <p:cNvSpPr/>
+            <p:nvPr/>
+          </p:nvSpPr>
+          <p:spPr>
+            <a:xfrm>
+              <a:off x="1405017" y="4336484"/>
+              <a:ext cx="0" cy="1317069"/>
+            </a:xfrm>
+            <a:custGeom>
+              <a:avLst/>
+              <a:pathLst>
+                <a:path w="0" h="1317069">
+                  <a:moveTo>
+                    <a:pt x="0" y="1317069"/>
+                  </a:moveTo>
+                  <a:lnTo>
+                    <a:pt x="0" y="0"/>
+                  </a:lnTo>
+                  <a:lnTo>
+                    <a:pt x="0" y="0"/>
+                  </a:lnTo>
+                </a:path>
+              </a:pathLst>
+            </a:custGeom>
+            <a:ln w="13550" cap="flat">
+              <a:solidFill>
+                <a:srgbClr val="EBEBEB">
+                  <a:alpha val="100000"/>
+                </a:srgbClr>
+              </a:solidFill>
+              <a:prstDash val="solid"/>
+              <a:round/>
+            </a:ln>
+          </p:spPr>
+          <p:txBody>
+            <a:bodyPr/>
+            <a:lstStyle/>
+            <a:p/>
+          </p:txBody>
+        </p:sp>
+        <p:sp>
+          <p:nvSpPr>
+            <p:cNvPr id="63" name="pl63"/>
+            <p:cNvSpPr/>
+            <p:nvPr/>
+          </p:nvSpPr>
+          <p:spPr>
+            <a:xfrm>
+              <a:off x="2260043" y="4336484"/>
+              <a:ext cx="0" cy="1317069"/>
+            </a:xfrm>
+            <a:custGeom>
+              <a:avLst/>
+              <a:pathLst>
+                <a:path w="0" h="1317069">
+                  <a:moveTo>
+                    <a:pt x="0" y="1317069"/>
+                  </a:moveTo>
+                  <a:lnTo>
+                    <a:pt x="0" y="0"/>
+                  </a:lnTo>
+                  <a:lnTo>
+                    <a:pt x="0" y="0"/>
+                  </a:lnTo>
+                </a:path>
+              </a:pathLst>
+            </a:custGeom>
+            <a:ln w="13550" cap="flat">
+              <a:solidFill>
+                <a:srgbClr val="EBEBEB">
+                  <a:alpha val="100000"/>
+                </a:srgbClr>
+              </a:solidFill>
+              <a:prstDash val="solid"/>
+              <a:round/>
+            </a:ln>
+          </p:spPr>
+          <p:txBody>
+            <a:bodyPr/>
+            <a:lstStyle/>
+            <a:p/>
+          </p:txBody>
+        </p:sp>
+        <p:sp>
+          <p:nvSpPr>
+            <p:cNvPr id="64" name="pl64"/>
+            <p:cNvSpPr/>
+            <p:nvPr/>
+          </p:nvSpPr>
+          <p:spPr>
+            <a:xfrm>
+              <a:off x="3115069" y="4336484"/>
+              <a:ext cx="0" cy="1317069"/>
+            </a:xfrm>
+            <a:custGeom>
+              <a:avLst/>
+              <a:pathLst>
+                <a:path w="0" h="1317069">
+                  <a:moveTo>
+                    <a:pt x="0" y="1317069"/>
+                  </a:moveTo>
+                  <a:lnTo>
+                    <a:pt x="0" y="0"/>
+                  </a:lnTo>
+                  <a:lnTo>
+                    <a:pt x="0" y="0"/>
+                  </a:lnTo>
+                </a:path>
+              </a:pathLst>
+            </a:custGeom>
+            <a:ln w="13550" cap="flat">
+              <a:solidFill>
+                <a:srgbClr val="EBEBEB">
+                  <a:alpha val="100000"/>
+                </a:srgbClr>
+              </a:solidFill>
+              <a:prstDash val="solid"/>
+              <a:round/>
+            </a:ln>
+          </p:spPr>
+          <p:txBody>
+            <a:bodyPr/>
+            <a:lstStyle/>
+            <a:p/>
+          </p:txBody>
+        </p:sp>
+        <p:sp>
+          <p:nvSpPr>
+            <p:cNvPr id="65" name="pl65"/>
+            <p:cNvSpPr/>
+            <p:nvPr/>
+          </p:nvSpPr>
+          <p:spPr>
+            <a:xfrm>
+              <a:off x="3970095" y="4336484"/>
+              <a:ext cx="0" cy="1317069"/>
+            </a:xfrm>
+            <a:custGeom>
+              <a:avLst/>
+              <a:pathLst>
+                <a:path w="0" h="1317069">
+                  <a:moveTo>
+                    <a:pt x="0" y="1317069"/>
+                  </a:moveTo>
+                  <a:lnTo>
+                    <a:pt x="0" y="0"/>
+                  </a:lnTo>
+                  <a:lnTo>
+                    <a:pt x="0" y="0"/>
+                  </a:lnTo>
+                </a:path>
+              </a:pathLst>
+            </a:custGeom>
+            <a:ln w="13550" cap="flat">
+              <a:solidFill>
+                <a:srgbClr val="EBEBEB">
+                  <a:alpha val="100000"/>
+                </a:srgbClr>
+              </a:solidFill>
+              <a:prstDash val="solid"/>
+              <a:round/>
+            </a:ln>
+          </p:spPr>
+          <p:txBody>
+            <a:bodyPr/>
+            <a:lstStyle/>
+            <a:p/>
+          </p:txBody>
+        </p:sp>
+        <p:sp>
+          <p:nvSpPr>
+            <p:cNvPr id="66" name="pl66"/>
+            <p:cNvSpPr/>
+            <p:nvPr/>
+          </p:nvSpPr>
+          <p:spPr>
+            <a:xfrm>
+              <a:off x="4825121" y="4336484"/>
+              <a:ext cx="0" cy="1317069"/>
+            </a:xfrm>
+            <a:custGeom>
+              <a:avLst/>
+              <a:pathLst>
+                <a:path w="0" h="1317069">
+                  <a:moveTo>
+                    <a:pt x="0" y="1317069"/>
+                  </a:moveTo>
+                  <a:lnTo>
+                    <a:pt x="0" y="0"/>
+                  </a:lnTo>
+                  <a:lnTo>
+                    <a:pt x="0" y="0"/>
+                  </a:lnTo>
+                </a:path>
+              </a:pathLst>
+            </a:custGeom>
+            <a:ln w="13550" cap="flat">
+              <a:solidFill>
+                <a:srgbClr val="EBEBEB">
+                  <a:alpha val="100000"/>
+                </a:srgbClr>
+              </a:solidFill>
+              <a:prstDash val="solid"/>
+              <a:round/>
+            </a:ln>
+          </p:spPr>
+          <p:txBody>
+            <a:bodyPr/>
+            <a:lstStyle/>
+            <a:p/>
+          </p:txBody>
+        </p:sp>
+        <p:sp>
+          <p:nvSpPr>
+            <p:cNvPr id="67" name="pl67"/>
+            <p:cNvSpPr/>
+            <p:nvPr/>
+          </p:nvSpPr>
+          <p:spPr>
+            <a:xfrm>
+              <a:off x="5680147" y="4336484"/>
+              <a:ext cx="0" cy="1317069"/>
+            </a:xfrm>
+            <a:custGeom>
+              <a:avLst/>
+              <a:pathLst>
+                <a:path w="0" h="1317069">
+                  <a:moveTo>
+                    <a:pt x="0" y="1317069"/>
+                  </a:moveTo>
+                  <a:lnTo>
+                    <a:pt x="0" y="0"/>
+                  </a:lnTo>
+                  <a:lnTo>
+                    <a:pt x="0" y="0"/>
+                  </a:lnTo>
+                </a:path>
+              </a:pathLst>
+            </a:custGeom>
+            <a:ln w="13550" cap="flat">
+              <a:solidFill>
+                <a:srgbClr val="EBEBEB">
+                  <a:alpha val="100000"/>
+                </a:srgbClr>
+              </a:solidFill>
+              <a:prstDash val="solid"/>
+              <a:round/>
+            </a:ln>
+          </p:spPr>
+          <p:txBody>
+            <a:bodyPr/>
+            <a:lstStyle/>
+            <a:p/>
+          </p:txBody>
+        </p:sp>
+        <p:sp>
+          <p:nvSpPr>
+            <p:cNvPr id="68" name="pl68"/>
+            <p:cNvSpPr/>
+            <p:nvPr/>
+          </p:nvSpPr>
+          <p:spPr>
+            <a:xfrm>
+              <a:off x="6535173" y="4336484"/>
+              <a:ext cx="0" cy="1317069"/>
+            </a:xfrm>
+            <a:custGeom>
+              <a:avLst/>
+              <a:pathLst>
+                <a:path w="0" h="1317069">
+                  <a:moveTo>
+                    <a:pt x="0" y="1317069"/>
+                  </a:moveTo>
+                  <a:lnTo>
+                    <a:pt x="0" y="0"/>
+                  </a:lnTo>
+                  <a:lnTo>
+                    <a:pt x="0" y="0"/>
+                  </a:lnTo>
+                </a:path>
+              </a:pathLst>
+            </a:custGeom>
+            <a:ln w="13550" cap="flat">
+              <a:solidFill>
+                <a:srgbClr val="EBEBEB">
+                  <a:alpha val="100000"/>
+                </a:srgbClr>
+              </a:solidFill>
+              <a:prstDash val="solid"/>
+              <a:round/>
+            </a:ln>
+          </p:spPr>
+          <p:txBody>
+            <a:bodyPr/>
+            <a:lstStyle/>
+            <a:p/>
+          </p:txBody>
+        </p:sp>
+        <p:sp>
+          <p:nvSpPr>
+            <p:cNvPr id="69" name="pl69"/>
+            <p:cNvSpPr/>
+            <p:nvPr/>
+          </p:nvSpPr>
+          <p:spPr>
+            <a:xfrm>
+              <a:off x="7390199" y="4336484"/>
+              <a:ext cx="0" cy="1317069"/>
+            </a:xfrm>
+            <a:custGeom>
+              <a:avLst/>
+              <a:pathLst>
+                <a:path w="0" h="1317069">
+                  <a:moveTo>
+                    <a:pt x="0" y="1317069"/>
+                  </a:moveTo>
+                  <a:lnTo>
+                    <a:pt x="0" y="0"/>
+                  </a:lnTo>
+                  <a:lnTo>
+                    <a:pt x="0" y="0"/>
+                  </a:lnTo>
+                </a:path>
+              </a:pathLst>
+            </a:custGeom>
+            <a:ln w="13550" cap="flat">
+              <a:solidFill>
+                <a:srgbClr val="EBEBEB">
+                  <a:alpha val="100000"/>
+                </a:srgbClr>
+              </a:solidFill>
+              <a:prstDash val="solid"/>
+              <a:round/>
+            </a:ln>
+          </p:spPr>
+          <p:txBody>
+            <a:bodyPr/>
+            <a:lstStyle/>
+            <a:p/>
+          </p:txBody>
+        </p:sp>
+        <p:sp>
+          <p:nvSpPr>
+            <p:cNvPr id="70" name="pl70"/>
+            <p:cNvSpPr/>
+            <p:nvPr/>
+          </p:nvSpPr>
+          <p:spPr>
+            <a:xfrm>
+              <a:off x="8245225" y="4336484"/>
+              <a:ext cx="0" cy="1317069"/>
+            </a:xfrm>
+            <a:custGeom>
+              <a:avLst/>
+              <a:pathLst>
+                <a:path w="0" h="1317069">
+                  <a:moveTo>
+                    <a:pt x="0" y="1317069"/>
+                  </a:moveTo>
+                  <a:lnTo>
+                    <a:pt x="0" y="0"/>
+                  </a:lnTo>
+                  <a:lnTo>
+                    <a:pt x="0" y="0"/>
+                  </a:lnTo>
+                </a:path>
+              </a:pathLst>
+            </a:custGeom>
+            <a:ln w="13550" cap="flat">
+              <a:solidFill>
+                <a:srgbClr val="EBEBEB">
+                  <a:alpha val="100000"/>
+                </a:srgbClr>
+              </a:solidFill>
+              <a:prstDash val="solid"/>
+              <a:round/>
+            </a:ln>
+          </p:spPr>
+          <p:txBody>
+            <a:bodyPr/>
+            <a:lstStyle/>
+            <a:p/>
+          </p:txBody>
+        </p:sp>
+        <p:sp>
+          <p:nvSpPr>
+            <p:cNvPr id="71" name="pg71"/>
+            <p:cNvSpPr/>
+            <p:nvPr/>
+          </p:nvSpPr>
+          <p:spPr>
+            <a:xfrm>
+              <a:off x="1235312" y="4349488"/>
+              <a:ext cx="6964104" cy="1195307"/>
+            </a:xfrm>
+            <a:custGeom>
+              <a:avLst/>
+              <a:pathLst>
+                <a:path w="6964104" h="1195307">
+                  <a:moveTo>
+                    <a:pt x="0" y="0"/>
+                  </a:moveTo>
+                  <a:lnTo>
+                    <a:pt x="70344" y="40019"/>
+                  </a:lnTo>
+                  <a:lnTo>
+                    <a:pt x="140688" y="78751"/>
+                  </a:lnTo>
+                  <a:lnTo>
+                    <a:pt x="211033" y="116238"/>
+                  </a:lnTo>
+                  <a:lnTo>
+                    <a:pt x="281377" y="152519"/>
+                  </a:lnTo>
+                  <a:lnTo>
+                    <a:pt x="351722" y="187632"/>
+                  </a:lnTo>
+                  <a:lnTo>
+                    <a:pt x="422066" y="221617"/>
+                  </a:lnTo>
+                  <a:lnTo>
+                    <a:pt x="492411" y="254508"/>
+                  </a:lnTo>
+                  <a:lnTo>
+                    <a:pt x="562755" y="286341"/>
+                  </a:lnTo>
+                  <a:lnTo>
+                    <a:pt x="633100" y="317150"/>
+                  </a:lnTo>
+                  <a:lnTo>
+                    <a:pt x="703444" y="346969"/>
+                  </a:lnTo>
+                  <a:lnTo>
+                    <a:pt x="773789" y="375828"/>
+                  </a:lnTo>
+                  <a:lnTo>
+                    <a:pt x="844133" y="403759"/>
+                  </a:lnTo>
+                  <a:lnTo>
+                    <a:pt x="914478" y="430792"/>
+                  </a:lnTo>
+                  <a:lnTo>
+                    <a:pt x="984822" y="456955"/>
+                  </a:lnTo>
+                  <a:lnTo>
+                    <a:pt x="1055167" y="482277"/>
+                  </a:lnTo>
+                  <a:lnTo>
+                    <a:pt x="1125511" y="506784"/>
+                  </a:lnTo>
+                  <a:lnTo>
+                    <a:pt x="1195856" y="530503"/>
+                  </a:lnTo>
+                  <a:lnTo>
+                    <a:pt x="1266200" y="553458"/>
+                  </a:lnTo>
+                  <a:lnTo>
+                    <a:pt x="1336545" y="575676"/>
+                  </a:lnTo>
+                  <a:lnTo>
+                    <a:pt x="1406889" y="597179"/>
+                  </a:lnTo>
+                  <a:lnTo>
+                    <a:pt x="1477234" y="617990"/>
+                  </a:lnTo>
+                  <a:lnTo>
+                    <a:pt x="1547578" y="638132"/>
+                  </a:lnTo>
+                  <a:lnTo>
+                    <a:pt x="1617923" y="657626"/>
+                  </a:lnTo>
+                  <a:lnTo>
+                    <a:pt x="1688267" y="676493"/>
+                  </a:lnTo>
+                  <a:lnTo>
+                    <a:pt x="1758612" y="694753"/>
+                  </a:lnTo>
+                  <a:lnTo>
+                    <a:pt x="1828956" y="712426"/>
+                  </a:lnTo>
+                  <a:lnTo>
+                    <a:pt x="1899301" y="729531"/>
+                  </a:lnTo>
+                  <a:lnTo>
+                    <a:pt x="1969645" y="746085"/>
+                  </a:lnTo>
+                  <a:lnTo>
+                    <a:pt x="2039990" y="762107"/>
+                  </a:lnTo>
+                  <a:lnTo>
+                    <a:pt x="2110334" y="777613"/>
+                  </a:lnTo>
+                  <a:lnTo>
+                    <a:pt x="2180679" y="792621"/>
+                  </a:lnTo>
+                  <a:lnTo>
+                    <a:pt x="2251023" y="807146"/>
+                  </a:lnTo>
+                  <a:lnTo>
+                    <a:pt x="2321368" y="821203"/>
+                  </a:lnTo>
+                  <a:lnTo>
+                    <a:pt x="2391712" y="834809"/>
+                  </a:lnTo>
+                  <a:lnTo>
+                    <a:pt x="2462057" y="847977"/>
+                  </a:lnTo>
+                  <a:lnTo>
+                    <a:pt x="2532401" y="860721"/>
+                  </a:lnTo>
+                  <a:lnTo>
+                    <a:pt x="2602746" y="873056"/>
+                  </a:lnTo>
+                  <a:lnTo>
+                    <a:pt x="2673090" y="884994"/>
+                  </a:lnTo>
+                  <a:lnTo>
+                    <a:pt x="2743435" y="896547"/>
+                  </a:lnTo>
+                  <a:lnTo>
+                    <a:pt x="2813779" y="907729"/>
+                  </a:lnTo>
+                  <a:lnTo>
+                    <a:pt x="2884124" y="918552"/>
+                  </a:lnTo>
+                  <a:lnTo>
+                    <a:pt x="2954468" y="929026"/>
+                  </a:lnTo>
+                  <a:lnTo>
+                    <a:pt x="3024813" y="939164"/>
+                  </a:lnTo>
+                  <a:lnTo>
+                    <a:pt x="3095157" y="944580"/>
+                  </a:lnTo>
+                  <a:lnTo>
+                    <a:pt x="3165502" y="943909"/>
+                  </a:lnTo>
+                  <a:lnTo>
+                    <a:pt x="3235846" y="943236"/>
+                  </a:lnTo>
+                  <a:lnTo>
+                    <a:pt x="3306191" y="942561"/>
+                  </a:lnTo>
+                  <a:lnTo>
+                    <a:pt x="3376535" y="941885"/>
+                  </a:lnTo>
+                  <a:lnTo>
+                    <a:pt x="3446880" y="941207"/>
+                  </a:lnTo>
+                  <a:lnTo>
+                    <a:pt x="3517224" y="940528"/>
+                  </a:lnTo>
+                  <a:lnTo>
+                    <a:pt x="3587569" y="939847"/>
+                  </a:lnTo>
+                  <a:lnTo>
+                    <a:pt x="3657913" y="939165"/>
+                  </a:lnTo>
+                  <a:lnTo>
+                    <a:pt x="3728257" y="938481"/>
+                  </a:lnTo>
+                  <a:lnTo>
+                    <a:pt x="3798602" y="937796"/>
+                  </a:lnTo>
+                  <a:lnTo>
+                    <a:pt x="3868946" y="937109"/>
+                  </a:lnTo>
+                  <a:lnTo>
+                    <a:pt x="3939291" y="936421"/>
+                  </a:lnTo>
+                  <a:lnTo>
+                    <a:pt x="4009635" y="935731"/>
+                  </a:lnTo>
+                  <a:lnTo>
+                    <a:pt x="4079980" y="935040"/>
+                  </a:lnTo>
+                  <a:lnTo>
+                    <a:pt x="4150324" y="934347"/>
+                  </a:lnTo>
+                  <a:lnTo>
+                    <a:pt x="4220669" y="933652"/>
+                  </a:lnTo>
+                  <a:lnTo>
+                    <a:pt x="4291013" y="932956"/>
+                  </a:lnTo>
+                  <a:lnTo>
+                    <a:pt x="4361358" y="932258"/>
+                  </a:lnTo>
+                  <a:lnTo>
+                    <a:pt x="4431702" y="931559"/>
+                  </a:lnTo>
+                  <a:lnTo>
+                    <a:pt x="4502047" y="930858"/>
+                  </a:lnTo>
+                  <a:lnTo>
+                    <a:pt x="4572391" y="930156"/>
+                  </a:lnTo>
+                  <a:lnTo>
+                    <a:pt x="4642736" y="929452"/>
+                  </a:lnTo>
+                  <a:lnTo>
+                    <a:pt x="4713080" y="928747"/>
+                  </a:lnTo>
+                  <a:lnTo>
+                    <a:pt x="4783425" y="928039"/>
+                  </a:lnTo>
+                  <a:lnTo>
+                    <a:pt x="4853769" y="927331"/>
+                  </a:lnTo>
+                  <a:lnTo>
+                    <a:pt x="4924114" y="926621"/>
+                  </a:lnTo>
+                  <a:lnTo>
+                    <a:pt x="4994458" y="925909"/>
+                  </a:lnTo>
+                  <a:lnTo>
+                    <a:pt x="5064803" y="925195"/>
+                  </a:lnTo>
+                  <a:lnTo>
+                    <a:pt x="5135147" y="924480"/>
+                  </a:lnTo>
+                  <a:lnTo>
+                    <a:pt x="5205492" y="923763"/>
+                  </a:lnTo>
+                  <a:lnTo>
+                    <a:pt x="5275836" y="923045"/>
+                  </a:lnTo>
+                  <a:lnTo>
+                    <a:pt x="5346181" y="922325"/>
+                  </a:lnTo>
+                  <a:lnTo>
+                    <a:pt x="5416525" y="921604"/>
+                  </a:lnTo>
+                  <a:lnTo>
+                    <a:pt x="5486870" y="920881"/>
+                  </a:lnTo>
+                  <a:lnTo>
+                    <a:pt x="5557214" y="920156"/>
+                  </a:lnTo>
+                  <a:lnTo>
+                    <a:pt x="5627559" y="919430"/>
+                  </a:lnTo>
+                  <a:lnTo>
+                    <a:pt x="5697903" y="918702"/>
+                  </a:lnTo>
+                  <a:lnTo>
+                    <a:pt x="5768248" y="917972"/>
+                  </a:lnTo>
+                  <a:lnTo>
+                    <a:pt x="5838592" y="917241"/>
+                  </a:lnTo>
+                  <a:lnTo>
+                    <a:pt x="5908937" y="916508"/>
+                  </a:lnTo>
+                  <a:lnTo>
+                    <a:pt x="5979281" y="915773"/>
+                  </a:lnTo>
+                  <a:lnTo>
+                    <a:pt x="6049626" y="915037"/>
+                  </a:lnTo>
+                  <a:lnTo>
+                    <a:pt x="6119970" y="914299"/>
+                  </a:lnTo>
+                  <a:lnTo>
+                    <a:pt x="6190315" y="913560"/>
+                  </a:lnTo>
+                  <a:lnTo>
+                    <a:pt x="6260659" y="912819"/>
+                  </a:lnTo>
+                  <a:lnTo>
+                    <a:pt x="6331004" y="912076"/>
+                  </a:lnTo>
+                  <a:lnTo>
+                    <a:pt x="6401348" y="911331"/>
+                  </a:lnTo>
+                  <a:lnTo>
+                    <a:pt x="6471693" y="910585"/>
+                  </a:lnTo>
+                  <a:lnTo>
+                    <a:pt x="6542037" y="909838"/>
+                  </a:lnTo>
+                  <a:lnTo>
+                    <a:pt x="6612382" y="909088"/>
+                  </a:lnTo>
+                  <a:lnTo>
+                    <a:pt x="6682726" y="908337"/>
+                  </a:lnTo>
+                  <a:lnTo>
+                    <a:pt x="6753071" y="907584"/>
+                  </a:lnTo>
+                  <a:lnTo>
+                    <a:pt x="6823415" y="906830"/>
+                  </a:lnTo>
+                  <a:lnTo>
+                    <a:pt x="6893760" y="906073"/>
+                  </a:lnTo>
+                  <a:lnTo>
+                    <a:pt x="6964104" y="905315"/>
+                  </a:lnTo>
+                  <a:lnTo>
+                    <a:pt x="6964104" y="1195307"/>
+                  </a:lnTo>
+                  <a:lnTo>
+                    <a:pt x="6893760" y="1193683"/>
+                  </a:lnTo>
+                  <a:lnTo>
+                    <a:pt x="6823415" y="1192004"/>
+                  </a:lnTo>
+                  <a:lnTo>
+                    <a:pt x="6753071" y="1190269"/>
+                  </a:lnTo>
+                  <a:lnTo>
+                    <a:pt x="6682726" y="1188477"/>
+                  </a:lnTo>
+                  <a:lnTo>
+                    <a:pt x="6612382" y="1186625"/>
+                  </a:lnTo>
+                  <a:lnTo>
+                    <a:pt x="6542037" y="1184712"/>
+                  </a:lnTo>
+                  <a:lnTo>
+                    <a:pt x="6471693" y="1182735"/>
+                  </a:lnTo>
+                  <a:lnTo>
+                    <a:pt x="6401348" y="1180692"/>
+                  </a:lnTo>
+                  <a:lnTo>
+                    <a:pt x="6331004" y="1178581"/>
+                  </a:lnTo>
+                  <a:lnTo>
+                    <a:pt x="6260659" y="1176401"/>
+                  </a:lnTo>
+                  <a:lnTo>
+                    <a:pt x="6190315" y="1174148"/>
+                  </a:lnTo>
+                  <a:lnTo>
+                    <a:pt x="6119970" y="1171820"/>
+                  </a:lnTo>
+                  <a:lnTo>
+                    <a:pt x="6049626" y="1169414"/>
+                  </a:lnTo>
+                  <a:lnTo>
+                    <a:pt x="5979281" y="1166929"/>
+                  </a:lnTo>
+                  <a:lnTo>
+                    <a:pt x="5908937" y="1164361"/>
+                  </a:lnTo>
+                  <a:lnTo>
+                    <a:pt x="5838592" y="1161708"/>
+                  </a:lnTo>
+                  <a:lnTo>
+                    <a:pt x="5768248" y="1158966"/>
+                  </a:lnTo>
+                  <a:lnTo>
+                    <a:pt x="5697903" y="1156134"/>
+                  </a:lnTo>
+                  <a:lnTo>
+                    <a:pt x="5627559" y="1153207"/>
+                  </a:lnTo>
+                  <a:lnTo>
+                    <a:pt x="5557214" y="1150183"/>
+                  </a:lnTo>
+                  <a:lnTo>
+                    <a:pt x="5486870" y="1147058"/>
+                  </a:lnTo>
+                  <a:lnTo>
+                    <a:pt x="5416525" y="1143830"/>
+                  </a:lnTo>
+                  <a:lnTo>
+                    <a:pt x="5346181" y="1140494"/>
+                  </a:lnTo>
+                  <a:lnTo>
+                    <a:pt x="5275836" y="1137048"/>
+                  </a:lnTo>
+                  <a:lnTo>
+                    <a:pt x="5205492" y="1133487"/>
+                  </a:lnTo>
+                  <a:lnTo>
+                    <a:pt x="5135147" y="1129808"/>
+                  </a:lnTo>
+                  <a:lnTo>
+                    <a:pt x="5064803" y="1126006"/>
+                  </a:lnTo>
+                  <a:lnTo>
+                    <a:pt x="4994458" y="1122078"/>
+                  </a:lnTo>
+                  <a:lnTo>
+                    <a:pt x="4924114" y="1118019"/>
+                  </a:lnTo>
+                  <a:lnTo>
+                    <a:pt x="4853769" y="1113826"/>
+                  </a:lnTo>
+                  <a:lnTo>
+                    <a:pt x="4783425" y="1109493"/>
+                  </a:lnTo>
+                  <a:lnTo>
+                    <a:pt x="4713080" y="1105016"/>
+                  </a:lnTo>
+                  <a:lnTo>
+                    <a:pt x="4642736" y="1100391"/>
+                  </a:lnTo>
+                  <a:lnTo>
+                    <a:pt x="4572391" y="1095612"/>
+                  </a:lnTo>
+                  <a:lnTo>
+                    <a:pt x="4502047" y="1090674"/>
+                  </a:lnTo>
+                  <a:lnTo>
+                    <a:pt x="4431702" y="1085571"/>
+                  </a:lnTo>
+                  <a:lnTo>
+                    <a:pt x="4361358" y="1080300"/>
+                  </a:lnTo>
+                  <a:lnTo>
+                    <a:pt x="4291013" y="1074853"/>
+                  </a:lnTo>
+                  <a:lnTo>
+                    <a:pt x="4220669" y="1069225"/>
+                  </a:lnTo>
+                  <a:lnTo>
+                    <a:pt x="4150324" y="1063410"/>
+                  </a:lnTo>
+                  <a:lnTo>
+                    <a:pt x="4079980" y="1057401"/>
+                  </a:lnTo>
+                  <a:lnTo>
+                    <a:pt x="4009635" y="1051193"/>
+                  </a:lnTo>
+                  <a:lnTo>
+                    <a:pt x="3939291" y="1044779"/>
+                  </a:lnTo>
+                  <a:lnTo>
+                    <a:pt x="3868946" y="1038152"/>
+                  </a:lnTo>
+                  <a:lnTo>
+                    <a:pt x="3798602" y="1031304"/>
+                  </a:lnTo>
+                  <a:lnTo>
+                    <a:pt x="3728257" y="1024229"/>
+                  </a:lnTo>
+                  <a:lnTo>
+                    <a:pt x="3657913" y="1016918"/>
+                  </a:lnTo>
+                  <a:lnTo>
+                    <a:pt x="3587569" y="1009365"/>
+                  </a:lnTo>
+                  <a:lnTo>
+                    <a:pt x="3517224" y="1001560"/>
+                  </a:lnTo>
+                  <a:lnTo>
+                    <a:pt x="3446880" y="993497"/>
+                  </a:lnTo>
+                  <a:lnTo>
+                    <a:pt x="3376535" y="985165"/>
+                  </a:lnTo>
+                  <a:lnTo>
+                    <a:pt x="3306191" y="976556"/>
+                  </a:lnTo>
+                  <a:lnTo>
+                    <a:pt x="3235846" y="967661"/>
+                  </a:lnTo>
+                  <a:lnTo>
+                    <a:pt x="3165502" y="958471"/>
+                  </a:lnTo>
+                  <a:lnTo>
+                    <a:pt x="3095157" y="948975"/>
+                  </a:lnTo>
+                  <a:lnTo>
+                    <a:pt x="3024813" y="945251"/>
+                  </a:lnTo>
+                  <a:lnTo>
+                    <a:pt x="2954468" y="945919"/>
+                  </a:lnTo>
+                  <a:lnTo>
+                    <a:pt x="2884124" y="946586"/>
+                  </a:lnTo>
+                  <a:lnTo>
+                    <a:pt x="2813779" y="947252"/>
+                  </a:lnTo>
+                  <a:lnTo>
+                    <a:pt x="2743435" y="947916"/>
+                  </a:lnTo>
+                  <a:lnTo>
+                    <a:pt x="2673090" y="948579"/>
+                  </a:lnTo>
+                  <a:lnTo>
+                    <a:pt x="2602746" y="949240"/>
+                  </a:lnTo>
+                  <a:lnTo>
+                    <a:pt x="2532401" y="949899"/>
+                  </a:lnTo>
+                  <a:lnTo>
+                    <a:pt x="2462057" y="950558"/>
+                  </a:lnTo>
+                  <a:lnTo>
+                    <a:pt x="2391712" y="951214"/>
+                  </a:lnTo>
+                  <a:lnTo>
+                    <a:pt x="2321368" y="951870"/>
+                  </a:lnTo>
+                  <a:lnTo>
+                    <a:pt x="2251023" y="952523"/>
+                  </a:lnTo>
+                  <a:lnTo>
+                    <a:pt x="2180679" y="953176"/>
+                  </a:lnTo>
+                  <a:lnTo>
+                    <a:pt x="2110334" y="953827"/>
+                  </a:lnTo>
+                  <a:lnTo>
+                    <a:pt x="2039990" y="954476"/>
+                  </a:lnTo>
+                  <a:lnTo>
+                    <a:pt x="1969645" y="955124"/>
+                  </a:lnTo>
+                  <a:lnTo>
+                    <a:pt x="1899301" y="955771"/>
+                  </a:lnTo>
+                  <a:lnTo>
+                    <a:pt x="1828956" y="956416"/>
+                  </a:lnTo>
+                  <a:lnTo>
+                    <a:pt x="1758612" y="957059"/>
+                  </a:lnTo>
+                  <a:lnTo>
+                    <a:pt x="1688267" y="957702"/>
+                  </a:lnTo>
+                  <a:lnTo>
+                    <a:pt x="1617923" y="958342"/>
+                  </a:lnTo>
+                  <a:lnTo>
+                    <a:pt x="1547578" y="958982"/>
+                  </a:lnTo>
+                  <a:lnTo>
+                    <a:pt x="1477234" y="959619"/>
+                  </a:lnTo>
+                  <a:lnTo>
+                    <a:pt x="1406889" y="960256"/>
+                  </a:lnTo>
+                  <a:lnTo>
+                    <a:pt x="1336545" y="960891"/>
+                  </a:lnTo>
+                  <a:lnTo>
+                    <a:pt x="1266200" y="961525"/>
+                  </a:lnTo>
+                  <a:lnTo>
+                    <a:pt x="1195856" y="962157"/>
+                  </a:lnTo>
+                  <a:lnTo>
+                    <a:pt x="1125511" y="962788"/>
+                  </a:lnTo>
+                  <a:lnTo>
+                    <a:pt x="1055167" y="963417"/>
+                  </a:lnTo>
+                  <a:lnTo>
+                    <a:pt x="984822" y="964045"/>
+                  </a:lnTo>
+                  <a:lnTo>
+                    <a:pt x="914478" y="964672"/>
+                  </a:lnTo>
+                  <a:lnTo>
+                    <a:pt x="844133" y="965297"/>
+                  </a:lnTo>
+                  <a:lnTo>
+                    <a:pt x="773789" y="965920"/>
+                  </a:lnTo>
+                  <a:lnTo>
+                    <a:pt x="703444" y="966543"/>
+                  </a:lnTo>
+                  <a:lnTo>
+                    <a:pt x="633100" y="967164"/>
+                  </a:lnTo>
+                  <a:lnTo>
+                    <a:pt x="562755" y="967783"/>
+                  </a:lnTo>
+                  <a:lnTo>
+                    <a:pt x="492411" y="968402"/>
+                  </a:lnTo>
+                  <a:lnTo>
+                    <a:pt x="422066" y="969018"/>
+                  </a:lnTo>
+                  <a:lnTo>
+                    <a:pt x="351722" y="969634"/>
+                  </a:lnTo>
+                  <a:lnTo>
+                    <a:pt x="281377" y="970248"/>
+                  </a:lnTo>
+                  <a:lnTo>
+                    <a:pt x="211033" y="970861"/>
+                  </a:lnTo>
+                  <a:lnTo>
+                    <a:pt x="140688" y="971472"/>
+                  </a:lnTo>
+                  <a:lnTo>
+                    <a:pt x="70344" y="972082"/>
+                  </a:lnTo>
+                  <a:lnTo>
+                    <a:pt x="0" y="972691"/>
+                  </a:lnTo>
+                  <a:close/>
+                </a:path>
+              </a:pathLst>
+            </a:custGeom>
+            <a:solidFill>
+              <a:srgbClr val="FF8C00">
+                <a:alpha val="20000"/>
+              </a:srgbClr>
+            </a:solidFill>
+          </p:spPr>
+          <p:txBody>
+            <a:bodyPr/>
+            <a:lstStyle/>
+            <a:p/>
+          </p:txBody>
+        </p:sp>
+        <p:sp>
+          <p:nvSpPr>
+            <p:cNvPr id="72" name="pl72"/>
+            <p:cNvSpPr/>
+            <p:nvPr/>
+          </p:nvSpPr>
+          <p:spPr>
+            <a:xfrm>
+              <a:off x="1235312" y="4349488"/>
+              <a:ext cx="6964104" cy="944580"/>
+            </a:xfrm>
+            <a:custGeom>
+              <a:avLst/>
+              <a:pathLst>
+                <a:path w="6964104" h="944580">
+                  <a:moveTo>
+                    <a:pt x="0" y="0"/>
+                  </a:moveTo>
+                  <a:lnTo>
+                    <a:pt x="70344" y="40019"/>
+                  </a:lnTo>
+                  <a:lnTo>
+                    <a:pt x="140688" y="78751"/>
+                  </a:lnTo>
+                  <a:lnTo>
+                    <a:pt x="211033" y="116238"/>
+                  </a:lnTo>
+                  <a:lnTo>
+                    <a:pt x="281377" y="152519"/>
+                  </a:lnTo>
+                  <a:lnTo>
+                    <a:pt x="351722" y="187632"/>
+                  </a:lnTo>
+                  <a:lnTo>
+                    <a:pt x="422066" y="221617"/>
+                  </a:lnTo>
+                  <a:lnTo>
+                    <a:pt x="492411" y="254508"/>
+                  </a:lnTo>
+                  <a:lnTo>
+                    <a:pt x="562755" y="286341"/>
+                  </a:lnTo>
+                  <a:lnTo>
+                    <a:pt x="633100" y="317150"/>
+                  </a:lnTo>
+                  <a:lnTo>
+                    <a:pt x="703444" y="346969"/>
+                  </a:lnTo>
+                  <a:lnTo>
+                    <a:pt x="773789" y="375828"/>
+                  </a:lnTo>
+                  <a:lnTo>
+                    <a:pt x="844133" y="403759"/>
+                  </a:lnTo>
+                  <a:lnTo>
+                    <a:pt x="914478" y="430792"/>
+                  </a:lnTo>
+                  <a:lnTo>
+                    <a:pt x="984822" y="456955"/>
+                  </a:lnTo>
+                  <a:lnTo>
+                    <a:pt x="1055167" y="482277"/>
+                  </a:lnTo>
+                  <a:lnTo>
+                    <a:pt x="1125511" y="506784"/>
+                  </a:lnTo>
+                  <a:lnTo>
+                    <a:pt x="1195856" y="530503"/>
+                  </a:lnTo>
+                  <a:lnTo>
+                    <a:pt x="1266200" y="553458"/>
+                  </a:lnTo>
+                  <a:lnTo>
+                    <a:pt x="1336545" y="575676"/>
+                  </a:lnTo>
+                  <a:lnTo>
+                    <a:pt x="1406889" y="597179"/>
+                  </a:lnTo>
+                  <a:lnTo>
+                    <a:pt x="1477234" y="617990"/>
+                  </a:lnTo>
+                  <a:lnTo>
+                    <a:pt x="1547578" y="638132"/>
+                  </a:lnTo>
+                  <a:lnTo>
+                    <a:pt x="1617923" y="657626"/>
+                  </a:lnTo>
+                  <a:lnTo>
+                    <a:pt x="1688267" y="676493"/>
+                  </a:lnTo>
+                  <a:lnTo>
+                    <a:pt x="1758612" y="694753"/>
+                  </a:lnTo>
+                  <a:lnTo>
+                    <a:pt x="1828956" y="712426"/>
+                  </a:lnTo>
+                  <a:lnTo>
+                    <a:pt x="1899301" y="729531"/>
+                  </a:lnTo>
+                  <a:lnTo>
+                    <a:pt x="1969645" y="746085"/>
+                  </a:lnTo>
+                  <a:lnTo>
+                    <a:pt x="2039990" y="762107"/>
+                  </a:lnTo>
+                  <a:lnTo>
+                    <a:pt x="2110334" y="777613"/>
+                  </a:lnTo>
+                  <a:lnTo>
+                    <a:pt x="2180679" y="792621"/>
+                  </a:lnTo>
+                  <a:lnTo>
+                    <a:pt x="2251023" y="807146"/>
+                  </a:lnTo>
+                  <a:lnTo>
+                    <a:pt x="2321368" y="821203"/>
+                  </a:lnTo>
+                  <a:lnTo>
+                    <a:pt x="2391712" y="834809"/>
+                  </a:lnTo>
+                  <a:lnTo>
+                    <a:pt x="2462057" y="847977"/>
+                  </a:lnTo>
+                  <a:lnTo>
+                    <a:pt x="2532401" y="860721"/>
+                  </a:lnTo>
+                  <a:lnTo>
+                    <a:pt x="2602746" y="873056"/>
+                  </a:lnTo>
+                  <a:lnTo>
+                    <a:pt x="2673090" y="884994"/>
+                  </a:lnTo>
+                  <a:lnTo>
+                    <a:pt x="2743435" y="896547"/>
+                  </a:lnTo>
+                  <a:lnTo>
+                    <a:pt x="2813779" y="907729"/>
+                  </a:lnTo>
+                  <a:lnTo>
+                    <a:pt x="2884124" y="918552"/>
+                  </a:lnTo>
+                  <a:lnTo>
+                    <a:pt x="2954468" y="929026"/>
+                  </a:lnTo>
+                  <a:lnTo>
+                    <a:pt x="3024813" y="939164"/>
+                  </a:lnTo>
+                  <a:lnTo>
+                    <a:pt x="3095157" y="944580"/>
+                  </a:lnTo>
+                  <a:lnTo>
+                    <a:pt x="3165502" y="943909"/>
+                  </a:lnTo>
+                  <a:lnTo>
+                    <a:pt x="3235846" y="943236"/>
+                  </a:lnTo>
+                  <a:lnTo>
+                    <a:pt x="3306191" y="942561"/>
+                  </a:lnTo>
+                  <a:lnTo>
+                    <a:pt x="3376535" y="941885"/>
+                  </a:lnTo>
+                  <a:lnTo>
+                    <a:pt x="3446880" y="941207"/>
+                  </a:lnTo>
+                  <a:lnTo>
+                    <a:pt x="3517224" y="940528"/>
+                  </a:lnTo>
+                  <a:lnTo>
+                    <a:pt x="3587569" y="939847"/>
+                  </a:lnTo>
+                  <a:lnTo>
+                    <a:pt x="3657913" y="939165"/>
+                  </a:lnTo>
+                  <a:lnTo>
+                    <a:pt x="3728257" y="938481"/>
+                  </a:lnTo>
+                  <a:lnTo>
+                    <a:pt x="3798602" y="937796"/>
+                  </a:lnTo>
+                  <a:lnTo>
+                    <a:pt x="3868946" y="937109"/>
+                  </a:lnTo>
+                  <a:lnTo>
+                    <a:pt x="3939291" y="936421"/>
+                  </a:lnTo>
+                  <a:lnTo>
+                    <a:pt x="4009635" y="935731"/>
+                  </a:lnTo>
+                  <a:lnTo>
+                    <a:pt x="4079980" y="935040"/>
+                  </a:lnTo>
+                  <a:lnTo>
+                    <a:pt x="4150324" y="934347"/>
+                  </a:lnTo>
+                  <a:lnTo>
+                    <a:pt x="4220669" y="933652"/>
+                  </a:lnTo>
+                  <a:lnTo>
+                    <a:pt x="4291013" y="932956"/>
+                  </a:lnTo>
+                  <a:lnTo>
+                    <a:pt x="4361358" y="932258"/>
+                  </a:lnTo>
+                  <a:lnTo>
+                    <a:pt x="4431702" y="931559"/>
+                  </a:lnTo>
+                  <a:lnTo>
+                    <a:pt x="4502047" y="930858"/>
+                  </a:lnTo>
+                  <a:lnTo>
+                    <a:pt x="4572391" y="930156"/>
+                  </a:lnTo>
+                  <a:lnTo>
+                    <a:pt x="4642736" y="929452"/>
+                  </a:lnTo>
+                  <a:lnTo>
+                    <a:pt x="4713080" y="928747"/>
+                  </a:lnTo>
+                  <a:lnTo>
+                    <a:pt x="4783425" y="928039"/>
+                  </a:lnTo>
+                  <a:lnTo>
+                    <a:pt x="4853769" y="927331"/>
+                  </a:lnTo>
+                  <a:lnTo>
+                    <a:pt x="4924114" y="926621"/>
+                  </a:lnTo>
+                  <a:lnTo>
+                    <a:pt x="4994458" y="925909"/>
+                  </a:lnTo>
+                  <a:lnTo>
+                    <a:pt x="5064803" y="925195"/>
+                  </a:lnTo>
+                  <a:lnTo>
+                    <a:pt x="5135147" y="924480"/>
+                  </a:lnTo>
+                  <a:lnTo>
+                    <a:pt x="5205492" y="923763"/>
+                  </a:lnTo>
+                  <a:lnTo>
+                    <a:pt x="5275836" y="923045"/>
+                  </a:lnTo>
+                  <a:lnTo>
+                    <a:pt x="5346181" y="922325"/>
+                  </a:lnTo>
+                  <a:lnTo>
+                    <a:pt x="5416525" y="921604"/>
+                  </a:lnTo>
+                  <a:lnTo>
+                    <a:pt x="5486870" y="920881"/>
+                  </a:lnTo>
+                  <a:lnTo>
+                    <a:pt x="5557214" y="920156"/>
+                  </a:lnTo>
+                  <a:lnTo>
+                    <a:pt x="5627559" y="919430"/>
+                  </a:lnTo>
+                  <a:lnTo>
+                    <a:pt x="5697903" y="918702"/>
+                  </a:lnTo>
+                  <a:lnTo>
+                    <a:pt x="5768248" y="917972"/>
+                  </a:lnTo>
+                  <a:lnTo>
+                    <a:pt x="5838592" y="917241"/>
+                  </a:lnTo>
+                  <a:lnTo>
+                    <a:pt x="5908937" y="916508"/>
+                  </a:lnTo>
+                  <a:lnTo>
+                    <a:pt x="5979281" y="915773"/>
+                  </a:lnTo>
+                  <a:lnTo>
+                    <a:pt x="6049626" y="915037"/>
+                  </a:lnTo>
+                  <a:lnTo>
+                    <a:pt x="6119970" y="914299"/>
+                  </a:lnTo>
+                  <a:lnTo>
+                    <a:pt x="6190315" y="913560"/>
+                  </a:lnTo>
+                  <a:lnTo>
+                    <a:pt x="6260659" y="912819"/>
+                  </a:lnTo>
+                  <a:lnTo>
+                    <a:pt x="6331004" y="912076"/>
+                  </a:lnTo>
+                  <a:lnTo>
+                    <a:pt x="6401348" y="911331"/>
+                  </a:lnTo>
+                  <a:lnTo>
+                    <a:pt x="6471693" y="910585"/>
+                  </a:lnTo>
+                  <a:lnTo>
+                    <a:pt x="6542037" y="909838"/>
+                  </a:lnTo>
+                  <a:lnTo>
+                    <a:pt x="6612382" y="909088"/>
+                  </a:lnTo>
+                  <a:lnTo>
+                    <a:pt x="6682726" y="908337"/>
+                  </a:lnTo>
+                  <a:lnTo>
+                    <a:pt x="6753071" y="907584"/>
+                  </a:lnTo>
+                  <a:lnTo>
+                    <a:pt x="6823415" y="906830"/>
+                  </a:lnTo>
+                  <a:lnTo>
+                    <a:pt x="6893760" y="906073"/>
+                  </a:lnTo>
+                  <a:lnTo>
+                    <a:pt x="6964104" y="905315"/>
+                  </a:lnTo>
+                </a:path>
+              </a:pathLst>
+            </a:custGeom>
+          </p:spPr>
+          <p:txBody>
+            <a:bodyPr/>
+            <a:lstStyle/>
+            <a:p/>
+          </p:txBody>
+        </p:sp>
+        <p:sp>
+          <p:nvSpPr>
+            <p:cNvPr id="73" name="pl73"/>
+            <p:cNvSpPr/>
+            <p:nvPr/>
+          </p:nvSpPr>
+          <p:spPr>
+            <a:xfrm>
+              <a:off x="1235312" y="5294739"/>
+              <a:ext cx="6964104" cy="250056"/>
+            </a:xfrm>
+            <a:custGeom>
+              <a:avLst/>
+              <a:pathLst>
+                <a:path w="6964104" h="250056">
+                  <a:moveTo>
+                    <a:pt x="6964104" y="250056"/>
+                  </a:moveTo>
+                  <a:lnTo>
+                    <a:pt x="6893760" y="248432"/>
+                  </a:lnTo>
+                  <a:lnTo>
+                    <a:pt x="6823415" y="246753"/>
+                  </a:lnTo>
+                  <a:lnTo>
+                    <a:pt x="6753071" y="245018"/>
+                  </a:lnTo>
+                  <a:lnTo>
+                    <a:pt x="6682726" y="243226"/>
+                  </a:lnTo>
+                  <a:lnTo>
+                    <a:pt x="6612382" y="241374"/>
+                  </a:lnTo>
+                  <a:lnTo>
+                    <a:pt x="6542037" y="239461"/>
+                  </a:lnTo>
+                  <a:lnTo>
+                    <a:pt x="6471693" y="237484"/>
+                  </a:lnTo>
+                  <a:lnTo>
+                    <a:pt x="6401348" y="235441"/>
+                  </a:lnTo>
+                  <a:lnTo>
+                    <a:pt x="6331004" y="233330"/>
+                  </a:lnTo>
+                  <a:lnTo>
+                    <a:pt x="6260659" y="231150"/>
+                  </a:lnTo>
+                  <a:lnTo>
+                    <a:pt x="6190315" y="228897"/>
+                  </a:lnTo>
+                  <a:lnTo>
+                    <a:pt x="6119970" y="226569"/>
+                  </a:lnTo>
+                  <a:lnTo>
+                    <a:pt x="6049626" y="224163"/>
+                  </a:lnTo>
+                  <a:lnTo>
+                    <a:pt x="5979281" y="221678"/>
+                  </a:lnTo>
+                  <a:lnTo>
+                    <a:pt x="5908937" y="219110"/>
+                  </a:lnTo>
+                  <a:lnTo>
+                    <a:pt x="5838592" y="216457"/>
+                  </a:lnTo>
+                  <a:lnTo>
+                    <a:pt x="5768248" y="213715"/>
+                  </a:lnTo>
+                  <a:lnTo>
+                    <a:pt x="5697903" y="210883"/>
+                  </a:lnTo>
+                  <a:lnTo>
+                    <a:pt x="5627559" y="207956"/>
+                  </a:lnTo>
+                  <a:lnTo>
+                    <a:pt x="5557214" y="204932"/>
+                  </a:lnTo>
+                  <a:lnTo>
+                    <a:pt x="5486870" y="201807"/>
+                  </a:lnTo>
+                  <a:lnTo>
+                    <a:pt x="5416525" y="198579"/>
+                  </a:lnTo>
+                  <a:lnTo>
+                    <a:pt x="5346181" y="195243"/>
+                  </a:lnTo>
+                  <a:lnTo>
+                    <a:pt x="5275836" y="191797"/>
+                  </a:lnTo>
+                  <a:lnTo>
+                    <a:pt x="5205492" y="188236"/>
+                  </a:lnTo>
+                  <a:lnTo>
+                    <a:pt x="5135147" y="184557"/>
+                  </a:lnTo>
+                  <a:lnTo>
+                    <a:pt x="5064803" y="180755"/>
+                  </a:lnTo>
+                  <a:lnTo>
+                    <a:pt x="4994458" y="176827"/>
+                  </a:lnTo>
+                  <a:lnTo>
+                    <a:pt x="4924114" y="172768"/>
+                  </a:lnTo>
+                  <a:lnTo>
+                    <a:pt x="4853769" y="168575"/>
+                  </a:lnTo>
+                  <a:lnTo>
+                    <a:pt x="4783425" y="164242"/>
+                  </a:lnTo>
+                  <a:lnTo>
+                    <a:pt x="4713080" y="159765"/>
+                  </a:lnTo>
+                  <a:lnTo>
+                    <a:pt x="4642736" y="155140"/>
+                  </a:lnTo>
+                  <a:lnTo>
+                    <a:pt x="4572391" y="150361"/>
+                  </a:lnTo>
+                  <a:lnTo>
+                    <a:pt x="4502047" y="145423"/>
+                  </a:lnTo>
+                  <a:lnTo>
+                    <a:pt x="4431702" y="140320"/>
+                  </a:lnTo>
+                  <a:lnTo>
+                    <a:pt x="4361358" y="135049"/>
+                  </a:lnTo>
+                  <a:lnTo>
+                    <a:pt x="4291013" y="129602"/>
+                  </a:lnTo>
+                  <a:lnTo>
+                    <a:pt x="4220669" y="123974"/>
+                  </a:lnTo>
+                  <a:lnTo>
+                    <a:pt x="4150324" y="118159"/>
+                  </a:lnTo>
+                  <a:lnTo>
+                    <a:pt x="4079980" y="112150"/>
+                  </a:lnTo>
+                  <a:lnTo>
+                    <a:pt x="4009635" y="105942"/>
+                  </a:lnTo>
+                  <a:lnTo>
+                    <a:pt x="3939291" y="99528"/>
+                  </a:lnTo>
+                  <a:lnTo>
+                    <a:pt x="3868946" y="92901"/>
+                  </a:lnTo>
+                  <a:lnTo>
+                    <a:pt x="3798602" y="86053"/>
+                  </a:lnTo>
+                  <a:lnTo>
+                    <a:pt x="3728257" y="78978"/>
+                  </a:lnTo>
+                  <a:lnTo>
+                    <a:pt x="3657913" y="71667"/>
+                  </a:lnTo>
+                  <a:lnTo>
+                    <a:pt x="3587569" y="64114"/>
+                  </a:lnTo>
+                  <a:lnTo>
+                    <a:pt x="3517224" y="56309"/>
+                  </a:lnTo>
+                  <a:lnTo>
+                    <a:pt x="3446880" y="48246"/>
+                  </a:lnTo>
+                  <a:lnTo>
+                    <a:pt x="3376535" y="39914"/>
+                  </a:lnTo>
+                  <a:lnTo>
+                    <a:pt x="3306191" y="31305"/>
+                  </a:lnTo>
+                  <a:lnTo>
+                    <a:pt x="3235846" y="22410"/>
+                  </a:lnTo>
+                  <a:lnTo>
+                    <a:pt x="3165502" y="13220"/>
+                  </a:lnTo>
+                  <a:lnTo>
+                    <a:pt x="3095157" y="3724"/>
+                  </a:lnTo>
+                  <a:lnTo>
+                    <a:pt x="3024813" y="0"/>
+                  </a:lnTo>
+                  <a:lnTo>
+                    <a:pt x="2954468" y="668"/>
+                  </a:lnTo>
+                  <a:lnTo>
+                    <a:pt x="2884124" y="1335"/>
+                  </a:lnTo>
+                  <a:lnTo>
+                    <a:pt x="2813779" y="2001"/>
+                  </a:lnTo>
+                  <a:lnTo>
+                    <a:pt x="2743435" y="2665"/>
+                  </a:lnTo>
+                  <a:lnTo>
+                    <a:pt x="2673090" y="3328"/>
+                  </a:lnTo>
+                  <a:lnTo>
+                    <a:pt x="2602746" y="3989"/>
+                  </a:lnTo>
+                  <a:lnTo>
+                    <a:pt x="2532401" y="4648"/>
+                  </a:lnTo>
+                  <a:lnTo>
+                    <a:pt x="2462057" y="5307"/>
+                  </a:lnTo>
+                  <a:lnTo>
+                    <a:pt x="2391712" y="5963"/>
+                  </a:lnTo>
+                  <a:lnTo>
+                    <a:pt x="2321368" y="6619"/>
+                  </a:lnTo>
+                  <a:lnTo>
+                    <a:pt x="2251023" y="7272"/>
+                  </a:lnTo>
+                  <a:lnTo>
+                    <a:pt x="2180679" y="7925"/>
+                  </a:lnTo>
+                  <a:lnTo>
+                    <a:pt x="2110334" y="8576"/>
+                  </a:lnTo>
+                  <a:lnTo>
+                    <a:pt x="2039990" y="9225"/>
+                  </a:lnTo>
+                  <a:lnTo>
+                    <a:pt x="1969645" y="9873"/>
+                  </a:lnTo>
+                  <a:lnTo>
+                    <a:pt x="1899301" y="10520"/>
+                  </a:lnTo>
+                  <a:lnTo>
+                    <a:pt x="1828956" y="11165"/>
+                  </a:lnTo>
+                  <a:lnTo>
+                    <a:pt x="1758612" y="11808"/>
+                  </a:lnTo>
+                  <a:lnTo>
+                    <a:pt x="1688267" y="12450"/>
+                  </a:lnTo>
+                  <a:lnTo>
+                    <a:pt x="1617923" y="13091"/>
+                  </a:lnTo>
+                  <a:lnTo>
+                    <a:pt x="1547578" y="13731"/>
+                  </a:lnTo>
+                  <a:lnTo>
+                    <a:pt x="1477234" y="14368"/>
+                  </a:lnTo>
+                  <a:lnTo>
+                    <a:pt x="1406889" y="15005"/>
+                  </a:lnTo>
+                  <a:lnTo>
+                    <a:pt x="1336545" y="15640"/>
+                  </a:lnTo>
+                  <a:lnTo>
+                    <a:pt x="1266200" y="16274"/>
+                  </a:lnTo>
+                  <a:lnTo>
+                    <a:pt x="1195856" y="16906"/>
+                  </a:lnTo>
+                  <a:lnTo>
+                    <a:pt x="1125511" y="17537"/>
+                  </a:lnTo>
+                  <a:lnTo>
+                    <a:pt x="1055167" y="18166"/>
+                  </a:lnTo>
+                  <a:lnTo>
+                    <a:pt x="984822" y="18794"/>
+                  </a:lnTo>
+                  <a:lnTo>
+                    <a:pt x="914478" y="19421"/>
+                  </a:lnTo>
+                  <a:lnTo>
+                    <a:pt x="844133" y="20046"/>
+                  </a:lnTo>
+                  <a:lnTo>
+                    <a:pt x="773789" y="20669"/>
+                  </a:lnTo>
+                  <a:lnTo>
+                    <a:pt x="703444" y="21292"/>
+                  </a:lnTo>
+                  <a:lnTo>
+                    <a:pt x="633100" y="21913"/>
+                  </a:lnTo>
+                  <a:lnTo>
+                    <a:pt x="562755" y="22532"/>
+                  </a:lnTo>
+                  <a:lnTo>
+                    <a:pt x="492411" y="23151"/>
+                  </a:lnTo>
+                  <a:lnTo>
+                    <a:pt x="422066" y="23767"/>
+                  </a:lnTo>
+                  <a:lnTo>
+                    <a:pt x="351722" y="24383"/>
+                  </a:lnTo>
+                  <a:lnTo>
+                    <a:pt x="281377" y="24997"/>
+                  </a:lnTo>
+                  <a:lnTo>
+                    <a:pt x="211033" y="25610"/>
+                  </a:lnTo>
+                  <a:lnTo>
+                    <a:pt x="140688" y="26221"/>
+                  </a:lnTo>
+                  <a:lnTo>
+                    <a:pt x="70344" y="26831"/>
+                  </a:lnTo>
+                  <a:lnTo>
+                    <a:pt x="0" y="27440"/>
+                  </a:lnTo>
+                </a:path>
+              </a:pathLst>
+            </a:custGeom>
+          </p:spPr>
+          <p:txBody>
+            <a:bodyPr/>
+            <a:lstStyle/>
+            <a:p/>
+          </p:txBody>
+        </p:sp>
+        <p:sp>
+          <p:nvSpPr>
+            <p:cNvPr id="74" name="pl74"/>
+            <p:cNvSpPr/>
+            <p:nvPr/>
+          </p:nvSpPr>
+          <p:spPr>
+            <a:xfrm>
+              <a:off x="1235312" y="5012473"/>
+              <a:ext cx="6964104" cy="452496"/>
+            </a:xfrm>
+            <a:custGeom>
+              <a:avLst/>
+              <a:pathLst>
+                <a:path w="6964104" h="452496">
+                  <a:moveTo>
+                    <a:pt x="0" y="0"/>
+                  </a:moveTo>
+                  <a:lnTo>
+                    <a:pt x="70344" y="8783"/>
+                  </a:lnTo>
+                  <a:lnTo>
+                    <a:pt x="140688" y="17433"/>
+                  </a:lnTo>
+                  <a:lnTo>
+                    <a:pt x="211033" y="25953"/>
+                  </a:lnTo>
+                  <a:lnTo>
+                    <a:pt x="281377" y="34344"/>
+                  </a:lnTo>
+                  <a:lnTo>
+                    <a:pt x="351722" y="42608"/>
+                  </a:lnTo>
+                  <a:lnTo>
+                    <a:pt x="422066" y="50748"/>
+                  </a:lnTo>
+                  <a:lnTo>
+                    <a:pt x="492411" y="58764"/>
+                  </a:lnTo>
+                  <a:lnTo>
+                    <a:pt x="562755" y="66659"/>
+                  </a:lnTo>
+                  <a:lnTo>
+                    <a:pt x="633100" y="74435"/>
+                  </a:lnTo>
+                  <a:lnTo>
+                    <a:pt x="703444" y="82093"/>
+                  </a:lnTo>
+                  <a:lnTo>
+                    <a:pt x="773789" y="89636"/>
+                  </a:lnTo>
+                  <a:lnTo>
+                    <a:pt x="844133" y="97065"/>
+                  </a:lnTo>
+                  <a:lnTo>
+                    <a:pt x="914478" y="104381"/>
+                  </a:lnTo>
+                  <a:lnTo>
+                    <a:pt x="984822" y="111587"/>
+                  </a:lnTo>
+                  <a:lnTo>
+                    <a:pt x="1055167" y="118684"/>
+                  </a:lnTo>
+                  <a:lnTo>
+                    <a:pt x="1125511" y="125674"/>
+                  </a:lnTo>
+                  <a:lnTo>
+                    <a:pt x="1195856" y="132558"/>
+                  </a:lnTo>
+                  <a:lnTo>
+                    <a:pt x="1266200" y="139338"/>
+                  </a:lnTo>
+                  <a:lnTo>
+                    <a:pt x="1336545" y="146015"/>
+                  </a:lnTo>
+                  <a:lnTo>
+                    <a:pt x="1406889" y="152592"/>
+                  </a:lnTo>
+                  <a:lnTo>
+                    <a:pt x="1477234" y="159069"/>
+                  </a:lnTo>
+                  <a:lnTo>
+                    <a:pt x="1547578" y="165449"/>
+                  </a:lnTo>
+                  <a:lnTo>
+                    <a:pt x="1617923" y="171732"/>
+                  </a:lnTo>
+                  <a:lnTo>
+                    <a:pt x="1688267" y="177920"/>
+                  </a:lnTo>
+                  <a:lnTo>
+                    <a:pt x="1758612" y="184014"/>
+                  </a:lnTo>
+                  <a:lnTo>
+                    <a:pt x="1828956" y="190017"/>
+                  </a:lnTo>
+                  <a:lnTo>
+                    <a:pt x="1899301" y="195928"/>
+                  </a:lnTo>
+                  <a:lnTo>
+                    <a:pt x="1969645" y="201751"/>
+                  </a:lnTo>
+                  <a:lnTo>
+                    <a:pt x="2039990" y="207485"/>
+                  </a:lnTo>
+                  <a:lnTo>
+                    <a:pt x="2110334" y="213133"/>
+                  </a:lnTo>
+                  <a:lnTo>
+                    <a:pt x="2180679" y="218695"/>
+                  </a:lnTo>
+                  <a:lnTo>
+                    <a:pt x="2251023" y="224174"/>
+                  </a:lnTo>
+                  <a:lnTo>
+                    <a:pt x="2321368" y="229569"/>
+                  </a:lnTo>
+                  <a:lnTo>
+                    <a:pt x="2391712" y="234883"/>
+                  </a:lnTo>
+                  <a:lnTo>
+                    <a:pt x="2462057" y="240117"/>
+                  </a:lnTo>
+                  <a:lnTo>
+                    <a:pt x="2532401" y="245272"/>
+                  </a:lnTo>
+                  <a:lnTo>
+                    <a:pt x="2602746" y="250348"/>
+                  </a:lnTo>
+                  <a:lnTo>
+                    <a:pt x="2673090" y="255348"/>
+                  </a:lnTo>
+                  <a:lnTo>
+                    <a:pt x="2743435" y="260273"/>
+                  </a:lnTo>
+                  <a:lnTo>
+                    <a:pt x="2813779" y="265123"/>
+                  </a:lnTo>
+                  <a:lnTo>
+                    <a:pt x="2884124" y="269899"/>
+                  </a:lnTo>
+                  <a:lnTo>
+                    <a:pt x="2954468" y="274604"/>
+                  </a:lnTo>
+                  <a:lnTo>
+                    <a:pt x="3024813" y="279237"/>
+                  </a:lnTo>
+                  <a:lnTo>
+                    <a:pt x="3095157" y="283801"/>
+                  </a:lnTo>
+                  <a:lnTo>
+                    <a:pt x="3165502" y="288295"/>
+                  </a:lnTo>
+                  <a:lnTo>
+                    <a:pt x="3235846" y="292722"/>
+                  </a:lnTo>
+                  <a:lnTo>
+                    <a:pt x="3306191" y="297082"/>
+                  </a:lnTo>
+                  <a:lnTo>
+                    <a:pt x="3376535" y="301375"/>
+                  </a:lnTo>
+                  <a:lnTo>
+                    <a:pt x="3446880" y="305604"/>
+                  </a:lnTo>
+                  <a:lnTo>
+                    <a:pt x="3517224" y="309769"/>
+                  </a:lnTo>
+                  <a:lnTo>
+                    <a:pt x="3587569" y="313871"/>
+                  </a:lnTo>
+                  <a:lnTo>
+                    <a:pt x="3657913" y="317911"/>
+                  </a:lnTo>
+                  <a:lnTo>
+                    <a:pt x="3728257" y="321890"/>
+                  </a:lnTo>
+                  <a:lnTo>
+                    <a:pt x="3798602" y="325809"/>
+                  </a:lnTo>
+                  <a:lnTo>
+                    <a:pt x="3868946" y="329669"/>
+                  </a:lnTo>
+                  <a:lnTo>
+                    <a:pt x="3939291" y="333470"/>
+                  </a:lnTo>
+                  <a:lnTo>
+                    <a:pt x="4009635" y="337214"/>
+                  </a:lnTo>
+                  <a:lnTo>
+                    <a:pt x="4079980" y="340901"/>
+                  </a:lnTo>
+                  <a:lnTo>
+                    <a:pt x="4150324" y="344533"/>
+                  </a:lnTo>
+                  <a:lnTo>
+                    <a:pt x="4220669" y="348109"/>
+                  </a:lnTo>
+                  <a:lnTo>
+                    <a:pt x="4291013" y="351632"/>
+                  </a:lnTo>
+                  <a:lnTo>
+                    <a:pt x="4361358" y="355102"/>
+                  </a:lnTo>
+                  <a:lnTo>
+                    <a:pt x="4431702" y="358518"/>
+                  </a:lnTo>
+                  <a:lnTo>
+                    <a:pt x="4502047" y="361884"/>
+                  </a:lnTo>
+                  <a:lnTo>
+                    <a:pt x="4572391" y="365198"/>
+                  </a:lnTo>
+                  <a:lnTo>
+                    <a:pt x="4642736" y="368463"/>
+                  </a:lnTo>
+                  <a:lnTo>
+                    <a:pt x="4713080" y="371678"/>
+                  </a:lnTo>
+                  <a:lnTo>
+                    <a:pt x="4783425" y="374844"/>
+                  </a:lnTo>
+                  <a:lnTo>
+                    <a:pt x="4853769" y="377963"/>
+                  </a:lnTo>
+                  <a:lnTo>
+                    <a:pt x="4924114" y="381034"/>
+                  </a:lnTo>
+                  <a:lnTo>
+                    <a:pt x="4994458" y="384059"/>
+                  </a:lnTo>
+                  <a:lnTo>
+                    <a:pt x="5064803" y="387039"/>
+                  </a:lnTo>
+                  <a:lnTo>
+                    <a:pt x="5135147" y="389973"/>
+                  </a:lnTo>
+                  <a:lnTo>
+                    <a:pt x="5205492" y="392863"/>
+                  </a:lnTo>
+                  <a:lnTo>
+                    <a:pt x="5275836" y="395709"/>
+                  </a:lnTo>
+                  <a:lnTo>
+                    <a:pt x="5346181" y="398513"/>
+                  </a:lnTo>
+                  <a:lnTo>
+                    <a:pt x="5416525" y="401274"/>
+                  </a:lnTo>
+                  <a:lnTo>
+                    <a:pt x="5486870" y="403993"/>
+                  </a:lnTo>
+                  <a:lnTo>
+                    <a:pt x="5557214" y="406671"/>
+                  </a:lnTo>
+                  <a:lnTo>
+                    <a:pt x="5627559" y="409309"/>
+                  </a:lnTo>
+                  <a:lnTo>
+                    <a:pt x="5697903" y="411907"/>
+                  </a:lnTo>
+                  <a:lnTo>
+                    <a:pt x="5768248" y="414465"/>
+                  </a:lnTo>
+                  <a:lnTo>
+                    <a:pt x="5838592" y="416985"/>
+                  </a:lnTo>
+                  <a:lnTo>
+                    <a:pt x="5908937" y="419467"/>
+                  </a:lnTo>
+                  <a:lnTo>
+                    <a:pt x="5979281" y="421911"/>
+                  </a:lnTo>
+                  <a:lnTo>
+                    <a:pt x="6049626" y="424318"/>
+                  </a:lnTo>
+                  <a:lnTo>
+                    <a:pt x="6119970" y="426689"/>
+                  </a:lnTo>
+                  <a:lnTo>
+                    <a:pt x="6190315" y="429025"/>
+                  </a:lnTo>
+                  <a:lnTo>
+                    <a:pt x="6260659" y="431324"/>
+                  </a:lnTo>
+                  <a:lnTo>
+                    <a:pt x="6331004" y="433589"/>
+                  </a:lnTo>
+                  <a:lnTo>
+                    <a:pt x="6401348" y="435820"/>
+                  </a:lnTo>
+                  <a:lnTo>
+                    <a:pt x="6471693" y="438018"/>
+                  </a:lnTo>
+                  <a:lnTo>
+                    <a:pt x="6542037" y="440181"/>
+                  </a:lnTo>
+                  <a:lnTo>
+                    <a:pt x="6612382" y="442313"/>
+                  </a:lnTo>
+                  <a:lnTo>
+                    <a:pt x="6682726" y="444412"/>
+                  </a:lnTo>
+                  <a:lnTo>
+                    <a:pt x="6753071" y="446479"/>
+                  </a:lnTo>
+                  <a:lnTo>
+                    <a:pt x="6823415" y="448515"/>
+                  </a:lnTo>
+                  <a:lnTo>
+                    <a:pt x="6893760" y="450521"/>
+                  </a:lnTo>
+                  <a:lnTo>
+                    <a:pt x="6964104" y="452496"/>
+                  </a:lnTo>
+                </a:path>
+              </a:pathLst>
+            </a:custGeom>
+            <a:ln w="27101" cap="flat">
+              <a:solidFill>
+                <a:srgbClr val="FF8C00">
+                  <a:alpha val="100000"/>
+                </a:srgbClr>
+              </a:solidFill>
+              <a:prstDash val="solid"/>
+              <a:round/>
+            </a:ln>
+          </p:spPr>
+          <p:txBody>
+            <a:bodyPr/>
+            <a:lstStyle/>
+            <a:p/>
+          </p:txBody>
+        </p:sp>
+        <p:sp>
+          <p:nvSpPr>
+            <p:cNvPr id="75" name="pl75"/>
+            <p:cNvSpPr/>
+            <p:nvPr/>
+          </p:nvSpPr>
+          <p:spPr>
+            <a:xfrm>
+              <a:off x="887106" y="5294352"/>
+              <a:ext cx="7660515" cy="0"/>
+            </a:xfrm>
+            <a:custGeom>
+              <a:avLst/>
+              <a:pathLst>
+                <a:path w="7660515" h="0">
+                  <a:moveTo>
+                    <a:pt x="0" y="0"/>
+                  </a:moveTo>
+                  <a:lnTo>
+                    <a:pt x="7660515" y="0"/>
+                  </a:lnTo>
+                  <a:lnTo>
+                    <a:pt x="7660515" y="0"/>
+                  </a:lnTo>
+                </a:path>
+              </a:pathLst>
+            </a:custGeom>
+            <a:ln w="13550" cap="flat">
+              <a:solidFill>
+                <a:srgbClr val="7F7F7F">
+                  <a:alpha val="100000"/>
+                </a:srgbClr>
+              </a:solidFill>
+              <a:prstDash val="dash"/>
+              <a:round/>
+            </a:ln>
+          </p:spPr>
+          <p:txBody>
+            <a:bodyPr/>
+            <a:lstStyle/>
+            <a:p/>
+          </p:txBody>
+        </p:sp>
+        <p:sp>
+          <p:nvSpPr>
+            <p:cNvPr id="76" name="pl76"/>
+            <p:cNvSpPr/>
+            <p:nvPr/>
+          </p:nvSpPr>
+          <p:spPr>
+            <a:xfrm>
+              <a:off x="4300713" y="4336484"/>
+              <a:ext cx="0" cy="1317069"/>
+            </a:xfrm>
+            <a:custGeom>
+              <a:avLst/>
+              <a:pathLst>
+                <a:path w="0" h="1317069">
+                  <a:moveTo>
+                    <a:pt x="0" y="1317069"/>
+                  </a:moveTo>
+                  <a:lnTo>
+                    <a:pt x="0" y="0"/>
+                  </a:lnTo>
+                  <a:lnTo>
+                    <a:pt x="0" y="0"/>
+                  </a:lnTo>
+                </a:path>
+              </a:pathLst>
+            </a:custGeom>
+            <a:ln w="13550" cap="flat">
+              <a:solidFill>
+                <a:srgbClr val="666666">
+                  <a:alpha val="100000"/>
+                </a:srgbClr>
+              </a:solidFill>
+              <a:prstDash val="dot"/>
+              <a:round/>
+            </a:ln>
+          </p:spPr>
+          <p:txBody>
+            <a:bodyPr/>
+            <a:lstStyle/>
+            <a:p/>
+          </p:txBody>
+        </p:sp>
+        <p:sp>
+          <p:nvSpPr>
+            <p:cNvPr id="77" name="pl77"/>
+            <p:cNvSpPr/>
+            <p:nvPr/>
+          </p:nvSpPr>
+          <p:spPr>
+            <a:xfrm>
+              <a:off x="3103710" y="4336484"/>
+              <a:ext cx="0" cy="1317069"/>
+            </a:xfrm>
+            <a:custGeom>
+              <a:avLst/>
+              <a:pathLst>
+                <a:path w="0" h="1317069">
+                  <a:moveTo>
+                    <a:pt x="0" y="1317069"/>
+                  </a:moveTo>
+                  <a:lnTo>
+                    <a:pt x="0" y="0"/>
+                  </a:lnTo>
+                  <a:lnTo>
+                    <a:pt x="0" y="0"/>
+                  </a:lnTo>
+                </a:path>
+              </a:pathLst>
+            </a:custGeom>
+            <a:ln w="13550" cap="flat">
+              <a:solidFill>
+                <a:srgbClr val="4682B4">
+                  <a:alpha val="69803"/>
+                </a:srgbClr>
+              </a:solidFill>
+              <a:prstDash val="dash"/>
+              <a:round/>
+            </a:ln>
+          </p:spPr>
+          <p:txBody>
+            <a:bodyPr/>
+            <a:lstStyle/>
+            <a:p/>
+          </p:txBody>
+        </p:sp>
+        <p:sp>
+          <p:nvSpPr>
+            <p:cNvPr id="78" name="pl78"/>
+            <p:cNvSpPr/>
+            <p:nvPr/>
+          </p:nvSpPr>
+          <p:spPr>
+            <a:xfrm>
+              <a:off x="5504283" y="4336484"/>
+              <a:ext cx="0" cy="1317069"/>
+            </a:xfrm>
+            <a:custGeom>
+              <a:avLst/>
+              <a:pathLst>
+                <a:path w="0" h="1317069">
+                  <a:moveTo>
+                    <a:pt x="0" y="1317069"/>
+                  </a:moveTo>
+                  <a:lnTo>
+                    <a:pt x="0" y="0"/>
+                  </a:lnTo>
+                  <a:lnTo>
+                    <a:pt x="0" y="0"/>
+                  </a:lnTo>
+                </a:path>
+              </a:pathLst>
+            </a:custGeom>
+            <a:ln w="13550" cap="flat">
+              <a:solidFill>
+                <a:srgbClr val="4682B4">
+                  <a:alpha val="69803"/>
+                </a:srgbClr>
+              </a:solidFill>
+              <a:prstDash val="dash"/>
+              <a:round/>
+            </a:ln>
+          </p:spPr>
+          <p:txBody>
+            <a:bodyPr/>
+            <a:lstStyle/>
+            <a:p/>
+          </p:txBody>
+        </p:sp>
+        <p:sp>
+          <p:nvSpPr>
+            <p:cNvPr id="79" name="tx79"/>
+            <p:cNvSpPr/>
+            <p:nvPr/>
+          </p:nvSpPr>
+          <p:spPr>
+            <a:xfrm>
+              <a:off x="762297" y="5553636"/>
+              <a:ext cx="62179" cy="80101"/>
+            </a:xfrm>
+            <a:prstGeom prst="rect">
+              <a:avLst/>
+            </a:prstGeom>
+            <a:noFill/>
+          </p:spPr>
+          <p:txBody>
+            <a:bodyPr lIns="0" rIns="0" tIns="0" bIns="0" anchorCtr="1" anchor="ctr" wrap="none"/>
+            <a:lstStyle/>
+            <a:p>
+              <a:pPr algn="l" marL="0" marR="0" indent="0">
+                <a:lnSpc>
+                  <a:spcPts val="880"/>
+                </a:lnSpc>
+                <a:spcBef>
+                  <a:spcPts val="0"/>
+                </a:spcBef>
+                <a:spcAft>
+                  <a:spcPts val="0"/>
+                </a:spcAft>
+              </a:pPr>
+              <a:r>
+                <a:rPr sz="880">
+                  <a:solidFill>
+                    <a:srgbClr val="4D4D4D">
+                      <a:alpha val="100000"/>
+                    </a:srgbClr>
+                  </a:solidFill>
+                  <a:latin typeface="Helvetica"/>
+                  <a:cs typeface="Helvetica"/>
+                </a:rPr>
+                <a:t>0</a:t>
+              </a:r>
+            </a:p>
+          </p:txBody>
+        </p:sp>
+        <p:sp>
+          <p:nvSpPr>
+            <p:cNvPr id="80" name="tx80"/>
+            <p:cNvSpPr/>
+            <p:nvPr/>
+          </p:nvSpPr>
+          <p:spPr>
+            <a:xfrm>
+              <a:off x="762297" y="5254302"/>
+              <a:ext cx="62179" cy="80101"/>
+            </a:xfrm>
+            <a:prstGeom prst="rect">
+              <a:avLst/>
+            </a:prstGeom>
+            <a:noFill/>
+          </p:spPr>
+          <p:txBody>
+            <a:bodyPr lIns="0" rIns="0" tIns="0" bIns="0" anchorCtr="1" anchor="ctr" wrap="none"/>
+            <a:lstStyle/>
+            <a:p>
+              <a:pPr algn="l" marL="0" marR="0" indent="0">
+                <a:lnSpc>
+                  <a:spcPts val="880"/>
+                </a:lnSpc>
+                <a:spcBef>
+                  <a:spcPts val="0"/>
+                </a:spcBef>
+                <a:spcAft>
+                  <a:spcPts val="0"/>
+                </a:spcAft>
+              </a:pPr>
+              <a:r>
+                <a:rPr sz="880">
+                  <a:solidFill>
+                    <a:srgbClr val="4D4D4D">
+                      <a:alpha val="100000"/>
+                    </a:srgbClr>
+                  </a:solidFill>
+                  <a:latin typeface="Helvetica"/>
+                  <a:cs typeface="Helvetica"/>
+                </a:rPr>
+                <a:t>1</a:t>
+              </a:r>
+            </a:p>
+          </p:txBody>
+        </p:sp>
+        <p:sp>
+          <p:nvSpPr>
+            <p:cNvPr id="81" name="tx81"/>
+            <p:cNvSpPr/>
+            <p:nvPr/>
+          </p:nvSpPr>
+          <p:spPr>
+            <a:xfrm>
+              <a:off x="762297" y="4954968"/>
+              <a:ext cx="62179" cy="80101"/>
+            </a:xfrm>
+            <a:prstGeom prst="rect">
+              <a:avLst/>
+            </a:prstGeom>
+            <a:noFill/>
+          </p:spPr>
+          <p:txBody>
+            <a:bodyPr lIns="0" rIns="0" tIns="0" bIns="0" anchorCtr="1" anchor="ctr" wrap="none"/>
+            <a:lstStyle/>
+            <a:p>
+              <a:pPr algn="l" marL="0" marR="0" indent="0">
+                <a:lnSpc>
+                  <a:spcPts val="880"/>
+                </a:lnSpc>
+                <a:spcBef>
+                  <a:spcPts val="0"/>
+                </a:spcBef>
+                <a:spcAft>
+                  <a:spcPts val="0"/>
+                </a:spcAft>
+              </a:pPr>
+              <a:r>
+                <a:rPr sz="880">
+                  <a:solidFill>
+                    <a:srgbClr val="4D4D4D">
+                      <a:alpha val="100000"/>
+                    </a:srgbClr>
+                  </a:solidFill>
+                  <a:latin typeface="Helvetica"/>
+                  <a:cs typeface="Helvetica"/>
+                </a:rPr>
+                <a:t>2</a:t>
+              </a:r>
+            </a:p>
+          </p:txBody>
+        </p:sp>
+        <p:sp>
+          <p:nvSpPr>
+            <p:cNvPr id="82" name="tx82"/>
+            <p:cNvSpPr/>
+            <p:nvPr/>
+          </p:nvSpPr>
+          <p:spPr>
+            <a:xfrm>
+              <a:off x="762297" y="4655634"/>
+              <a:ext cx="62179" cy="80101"/>
+            </a:xfrm>
+            <a:prstGeom prst="rect">
+              <a:avLst/>
+            </a:prstGeom>
+            <a:noFill/>
+          </p:spPr>
+          <p:txBody>
+            <a:bodyPr lIns="0" rIns="0" tIns="0" bIns="0" anchorCtr="1" anchor="ctr" wrap="none"/>
+            <a:lstStyle/>
+            <a:p>
+              <a:pPr algn="l" marL="0" marR="0" indent="0">
+                <a:lnSpc>
+                  <a:spcPts val="880"/>
+                </a:lnSpc>
+                <a:spcBef>
+                  <a:spcPts val="0"/>
+                </a:spcBef>
+                <a:spcAft>
+                  <a:spcPts val="0"/>
+                </a:spcAft>
+              </a:pPr>
+              <a:r>
+                <a:rPr sz="880">
+                  <a:solidFill>
+                    <a:srgbClr val="4D4D4D">
+                      <a:alpha val="100000"/>
+                    </a:srgbClr>
+                  </a:solidFill>
+                  <a:latin typeface="Helvetica"/>
+                  <a:cs typeface="Helvetica"/>
+                </a:rPr>
+                <a:t>3</a:t>
+              </a:r>
+            </a:p>
+          </p:txBody>
+        </p:sp>
+        <p:sp>
+          <p:nvSpPr>
+            <p:cNvPr id="83" name="tx83"/>
+            <p:cNvSpPr/>
+            <p:nvPr/>
+          </p:nvSpPr>
+          <p:spPr>
+            <a:xfrm>
+              <a:off x="762297" y="4356300"/>
+              <a:ext cx="62179" cy="80101"/>
+            </a:xfrm>
+            <a:prstGeom prst="rect">
+              <a:avLst/>
+            </a:prstGeom>
+            <a:noFill/>
+          </p:spPr>
+          <p:txBody>
+            <a:bodyPr lIns="0" rIns="0" tIns="0" bIns="0" anchorCtr="1" anchor="ctr" wrap="none"/>
+            <a:lstStyle/>
+            <a:p>
+              <a:pPr algn="l" marL="0" marR="0" indent="0">
+                <a:lnSpc>
+                  <a:spcPts val="880"/>
+                </a:lnSpc>
+                <a:spcBef>
+                  <a:spcPts val="0"/>
+                </a:spcBef>
+                <a:spcAft>
+                  <a:spcPts val="0"/>
+                </a:spcAft>
+              </a:pPr>
+              <a:r>
+                <a:rPr sz="880">
+                  <a:solidFill>
+                    <a:srgbClr val="4D4D4D">
+                      <a:alpha val="100000"/>
+                    </a:srgbClr>
+                  </a:solidFill>
+                  <a:latin typeface="Helvetica"/>
+                  <a:cs typeface="Helvetica"/>
+                </a:rPr>
+                <a:t>4</a:t>
+              </a:r>
+            </a:p>
+          </p:txBody>
+        </p:sp>
+        <p:sp>
+          <p:nvSpPr>
+            <p:cNvPr id="84" name="tx84"/>
+            <p:cNvSpPr/>
+            <p:nvPr/>
+          </p:nvSpPr>
+          <p:spPr>
+            <a:xfrm>
+              <a:off x="1324230" y="5716183"/>
+              <a:ext cx="161574" cy="80101"/>
+            </a:xfrm>
+            <a:prstGeom prst="rect">
+              <a:avLst/>
+            </a:prstGeom>
+            <a:noFill/>
+          </p:spPr>
+          <p:txBody>
+            <a:bodyPr lIns="0" rIns="0" tIns="0" bIns="0" anchorCtr="1" anchor="ctr" wrap="none"/>
+            <a:lstStyle/>
+            <a:p>
+              <a:pPr algn="l" marL="0" marR="0" indent="0">
+                <a:lnSpc>
+                  <a:spcPts val="880"/>
+                </a:lnSpc>
+                <a:spcBef>
+                  <a:spcPts val="0"/>
+                </a:spcBef>
+                <a:spcAft>
+                  <a:spcPts val="0"/>
+                </a:spcAft>
+              </a:pPr>
+              <a:r>
+                <a:rPr sz="880">
+                  <a:solidFill>
+                    <a:srgbClr val="4D4D4D">
+                      <a:alpha val="100000"/>
+                    </a:srgbClr>
+                  </a:solidFill>
+                  <a:latin typeface="Helvetica"/>
+                  <a:cs typeface="Helvetica"/>
+                </a:rPr>
+                <a:t>-50</a:t>
+              </a:r>
+            </a:p>
+          </p:txBody>
+        </p:sp>
+        <p:sp>
+          <p:nvSpPr>
+            <p:cNvPr id="85" name="tx85"/>
+            <p:cNvSpPr/>
+            <p:nvPr/>
+          </p:nvSpPr>
+          <p:spPr>
+            <a:xfrm>
+              <a:off x="2179256" y="5716183"/>
+              <a:ext cx="161574" cy="80101"/>
+            </a:xfrm>
+            <a:prstGeom prst="rect">
+              <a:avLst/>
+            </a:prstGeom>
+            <a:noFill/>
+          </p:spPr>
+          <p:txBody>
+            <a:bodyPr lIns="0" rIns="0" tIns="0" bIns="0" anchorCtr="1" anchor="ctr" wrap="none"/>
+            <a:lstStyle/>
+            <a:p>
+              <a:pPr algn="l" marL="0" marR="0" indent="0">
+                <a:lnSpc>
+                  <a:spcPts val="880"/>
+                </a:lnSpc>
+                <a:spcBef>
+                  <a:spcPts val="0"/>
+                </a:spcBef>
+                <a:spcAft>
+                  <a:spcPts val="0"/>
+                </a:spcAft>
+              </a:pPr>
+              <a:r>
+                <a:rPr sz="880">
+                  <a:solidFill>
+                    <a:srgbClr val="4D4D4D">
+                      <a:alpha val="100000"/>
+                    </a:srgbClr>
+                  </a:solidFill>
+                  <a:latin typeface="Helvetica"/>
+                  <a:cs typeface="Helvetica"/>
+                </a:rPr>
+                <a:t>-40</a:t>
+              </a:r>
+            </a:p>
+          </p:txBody>
+        </p:sp>
+        <p:sp>
+          <p:nvSpPr>
+            <p:cNvPr id="86" name="tx86"/>
+            <p:cNvSpPr/>
+            <p:nvPr/>
+          </p:nvSpPr>
+          <p:spPr>
+            <a:xfrm>
+              <a:off x="3034282" y="5716183"/>
+              <a:ext cx="161574" cy="80101"/>
+            </a:xfrm>
+            <a:prstGeom prst="rect">
+              <a:avLst/>
+            </a:prstGeom>
+            <a:noFill/>
+          </p:spPr>
+          <p:txBody>
+            <a:bodyPr lIns="0" rIns="0" tIns="0" bIns="0" anchorCtr="1" anchor="ctr" wrap="none"/>
+            <a:lstStyle/>
+            <a:p>
+              <a:pPr algn="l" marL="0" marR="0" indent="0">
+                <a:lnSpc>
+                  <a:spcPts val="880"/>
+                </a:lnSpc>
+                <a:spcBef>
+                  <a:spcPts val="0"/>
+                </a:spcBef>
+                <a:spcAft>
+                  <a:spcPts val="0"/>
+                </a:spcAft>
+              </a:pPr>
+              <a:r>
+                <a:rPr sz="880">
+                  <a:solidFill>
+                    <a:srgbClr val="4D4D4D">
+                      <a:alpha val="100000"/>
+                    </a:srgbClr>
+                  </a:solidFill>
+                  <a:latin typeface="Helvetica"/>
+                  <a:cs typeface="Helvetica"/>
+                </a:rPr>
+                <a:t>-30</a:t>
+              </a:r>
+            </a:p>
+          </p:txBody>
+        </p:sp>
+        <p:sp>
+          <p:nvSpPr>
+            <p:cNvPr id="87" name="tx87"/>
+            <p:cNvSpPr/>
+            <p:nvPr/>
+          </p:nvSpPr>
+          <p:spPr>
+            <a:xfrm>
+              <a:off x="3889308" y="5716183"/>
+              <a:ext cx="161574" cy="80101"/>
+            </a:xfrm>
+            <a:prstGeom prst="rect">
+              <a:avLst/>
+            </a:prstGeom>
+            <a:noFill/>
+          </p:spPr>
+          <p:txBody>
+            <a:bodyPr lIns="0" rIns="0" tIns="0" bIns="0" anchorCtr="1" anchor="ctr" wrap="none"/>
+            <a:lstStyle/>
+            <a:p>
+              <a:pPr algn="l" marL="0" marR="0" indent="0">
+                <a:lnSpc>
+                  <a:spcPts val="880"/>
+                </a:lnSpc>
+                <a:spcBef>
+                  <a:spcPts val="0"/>
+                </a:spcBef>
+                <a:spcAft>
+                  <a:spcPts val="0"/>
+                </a:spcAft>
+              </a:pPr>
+              <a:r>
+                <a:rPr sz="880">
+                  <a:solidFill>
+                    <a:srgbClr val="4D4D4D">
+                      <a:alpha val="100000"/>
+                    </a:srgbClr>
+                  </a:solidFill>
+                  <a:latin typeface="Helvetica"/>
+                  <a:cs typeface="Helvetica"/>
+                </a:rPr>
+                <a:t>-20</a:t>
+              </a:r>
+            </a:p>
+          </p:txBody>
+        </p:sp>
+        <p:sp>
+          <p:nvSpPr>
+            <p:cNvPr id="88" name="tx88"/>
+            <p:cNvSpPr/>
+            <p:nvPr/>
+          </p:nvSpPr>
+          <p:spPr>
+            <a:xfrm>
+              <a:off x="4744334" y="5716183"/>
+              <a:ext cx="161574" cy="80101"/>
+            </a:xfrm>
+            <a:prstGeom prst="rect">
+              <a:avLst/>
+            </a:prstGeom>
+            <a:noFill/>
+          </p:spPr>
+          <p:txBody>
+            <a:bodyPr lIns="0" rIns="0" tIns="0" bIns="0" anchorCtr="1" anchor="ctr" wrap="none"/>
+            <a:lstStyle/>
+            <a:p>
+              <a:pPr algn="l" marL="0" marR="0" indent="0">
+                <a:lnSpc>
+                  <a:spcPts val="880"/>
+                </a:lnSpc>
+                <a:spcBef>
+                  <a:spcPts val="0"/>
+                </a:spcBef>
+                <a:spcAft>
+                  <a:spcPts val="0"/>
+                </a:spcAft>
+              </a:pPr>
+              <a:r>
+                <a:rPr sz="880">
+                  <a:solidFill>
+                    <a:srgbClr val="4D4D4D">
+                      <a:alpha val="100000"/>
+                    </a:srgbClr>
+                  </a:solidFill>
+                  <a:latin typeface="Helvetica"/>
+                  <a:cs typeface="Helvetica"/>
+                </a:rPr>
+                <a:t>-10</a:t>
+              </a:r>
+            </a:p>
+          </p:txBody>
+        </p:sp>
+        <p:sp>
+          <p:nvSpPr>
+            <p:cNvPr id="89" name="tx89"/>
+            <p:cNvSpPr/>
+            <p:nvPr/>
+          </p:nvSpPr>
+          <p:spPr>
+            <a:xfrm>
+              <a:off x="5649057" y="5716183"/>
+              <a:ext cx="62179" cy="80101"/>
+            </a:xfrm>
+            <a:prstGeom prst="rect">
+              <a:avLst/>
+            </a:prstGeom>
+            <a:noFill/>
+          </p:spPr>
+          <p:txBody>
+            <a:bodyPr lIns="0" rIns="0" tIns="0" bIns="0" anchorCtr="1" anchor="ctr" wrap="none"/>
+            <a:lstStyle/>
+            <a:p>
+              <a:pPr algn="l" marL="0" marR="0" indent="0">
+                <a:lnSpc>
+                  <a:spcPts val="880"/>
+                </a:lnSpc>
+                <a:spcBef>
+                  <a:spcPts val="0"/>
+                </a:spcBef>
+                <a:spcAft>
+                  <a:spcPts val="0"/>
+                </a:spcAft>
+              </a:pPr>
+              <a:r>
+                <a:rPr sz="880">
+                  <a:solidFill>
+                    <a:srgbClr val="4D4D4D">
+                      <a:alpha val="100000"/>
+                    </a:srgbClr>
+                  </a:solidFill>
+                  <a:latin typeface="Helvetica"/>
+                  <a:cs typeface="Helvetica"/>
+                </a:rPr>
+                <a:t>0</a:t>
+              </a:r>
+            </a:p>
+          </p:txBody>
+        </p:sp>
+        <p:sp>
+          <p:nvSpPr>
+            <p:cNvPr id="90" name="tx90"/>
+            <p:cNvSpPr/>
+            <p:nvPr/>
+          </p:nvSpPr>
+          <p:spPr>
+            <a:xfrm>
+              <a:off x="6472994" y="5716183"/>
+              <a:ext cx="124358" cy="80101"/>
+            </a:xfrm>
+            <a:prstGeom prst="rect">
+              <a:avLst/>
+            </a:prstGeom>
+            <a:noFill/>
+          </p:spPr>
+          <p:txBody>
+            <a:bodyPr lIns="0" rIns="0" tIns="0" bIns="0" anchorCtr="1" anchor="ctr" wrap="none"/>
+            <a:lstStyle/>
+            <a:p>
+              <a:pPr algn="l" marL="0" marR="0" indent="0">
+                <a:lnSpc>
+                  <a:spcPts val="880"/>
+                </a:lnSpc>
+                <a:spcBef>
+                  <a:spcPts val="0"/>
+                </a:spcBef>
+                <a:spcAft>
+                  <a:spcPts val="0"/>
+                </a:spcAft>
+              </a:pPr>
+              <a:r>
+                <a:rPr sz="880">
+                  <a:solidFill>
+                    <a:srgbClr val="4D4D4D">
+                      <a:alpha val="100000"/>
+                    </a:srgbClr>
+                  </a:solidFill>
+                  <a:latin typeface="Helvetica"/>
+                  <a:cs typeface="Helvetica"/>
+                </a:rPr>
+                <a:t>10</a:t>
+              </a:r>
+            </a:p>
+          </p:txBody>
+        </p:sp>
+        <p:sp>
+          <p:nvSpPr>
+            <p:cNvPr id="91" name="tx91"/>
+            <p:cNvSpPr/>
+            <p:nvPr/>
+          </p:nvSpPr>
+          <p:spPr>
+            <a:xfrm>
+              <a:off x="7328020" y="5716183"/>
+              <a:ext cx="124358" cy="80101"/>
+            </a:xfrm>
+            <a:prstGeom prst="rect">
+              <a:avLst/>
+            </a:prstGeom>
+            <a:noFill/>
+          </p:spPr>
+          <p:txBody>
+            <a:bodyPr lIns="0" rIns="0" tIns="0" bIns="0" anchorCtr="1" anchor="ctr" wrap="none"/>
+            <a:lstStyle/>
+            <a:p>
+              <a:pPr algn="l" marL="0" marR="0" indent="0">
+                <a:lnSpc>
+                  <a:spcPts val="880"/>
+                </a:lnSpc>
+                <a:spcBef>
+                  <a:spcPts val="0"/>
+                </a:spcBef>
+                <a:spcAft>
+                  <a:spcPts val="0"/>
+                </a:spcAft>
+              </a:pPr>
+              <a:r>
+                <a:rPr sz="880">
+                  <a:solidFill>
+                    <a:srgbClr val="4D4D4D">
+                      <a:alpha val="100000"/>
+                    </a:srgbClr>
+                  </a:solidFill>
+                  <a:latin typeface="Helvetica"/>
+                  <a:cs typeface="Helvetica"/>
+                </a:rPr>
+                <a:t>20</a:t>
+              </a:r>
+            </a:p>
+          </p:txBody>
+        </p:sp>
+        <p:sp>
+          <p:nvSpPr>
+            <p:cNvPr id="92" name="tx92"/>
+            <p:cNvSpPr/>
+            <p:nvPr/>
+          </p:nvSpPr>
+          <p:spPr>
+            <a:xfrm>
+              <a:off x="8183046" y="5716183"/>
+              <a:ext cx="124358" cy="80101"/>
+            </a:xfrm>
+            <a:prstGeom prst="rect">
+              <a:avLst/>
+            </a:prstGeom>
+            <a:noFill/>
+          </p:spPr>
+          <p:txBody>
+            <a:bodyPr lIns="0" rIns="0" tIns="0" bIns="0" anchorCtr="1" anchor="ctr" wrap="none"/>
+            <a:lstStyle/>
+            <a:p>
+              <a:pPr algn="l" marL="0" marR="0" indent="0">
+                <a:lnSpc>
+                  <a:spcPts val="880"/>
+                </a:lnSpc>
+                <a:spcBef>
+                  <a:spcPts val="0"/>
+                </a:spcBef>
+                <a:spcAft>
+                  <a:spcPts val="0"/>
+                </a:spcAft>
+              </a:pPr>
+              <a:r>
+                <a:rPr sz="880">
+                  <a:solidFill>
+                    <a:srgbClr val="4D4D4D">
+                      <a:alpha val="100000"/>
+                    </a:srgbClr>
+                  </a:solidFill>
+                  <a:latin typeface="Helvetica"/>
+                  <a:cs typeface="Helvetica"/>
+                </a:rPr>
+                <a:t>30</a:t>
+              </a:r>
+            </a:p>
+          </p:txBody>
+        </p:sp>
+        <p:sp>
+          <p:nvSpPr>
+            <p:cNvPr id="93" name="tx93"/>
+            <p:cNvSpPr/>
+            <p:nvPr/>
+          </p:nvSpPr>
+          <p:spPr>
+            <a:xfrm>
+              <a:off x="1561815" y="5855859"/>
+              <a:ext cx="6311097" cy="100218"/>
+            </a:xfrm>
+            <a:prstGeom prst="rect">
+              <a:avLst/>
+            </a:prstGeom>
+            <a:noFill/>
+          </p:spPr>
+          <p:txBody>
+            <a:bodyPr lIns="0" rIns="0" tIns="0" bIns="0" anchorCtr="1" anchor="ctr" wrap="none"/>
+            <a:lstStyle/>
+            <a:p>
+              <a:pPr algn="l" marL="0" marR="0" indent="0">
+                <a:lnSpc>
+                  <a:spcPts val="1100"/>
+                </a:lnSpc>
+                <a:spcBef>
+                  <a:spcPts val="0"/>
+                </a:spcBef>
+                <a:spcAft>
+                  <a:spcPts val="0"/>
+                </a:spcAft>
+              </a:pPr>
+              <a:r>
+                <a:rPr sz="1100">
+                  <a:solidFill>
+                    <a:srgbClr val="000000">
+                      <a:alpha val="100000"/>
+                    </a:srgbClr>
+                  </a:solidFill>
+                  <a:latin typeface="Helvetica"/>
+                  <a:cs typeface="Helvetica"/>
+                </a:rPr>
+                <a:t>Sensitivity eGFR Difference (%): 100 × (CKD-EPI 2012 CysC − CKD-EPI 2021 Cr) / CKD-EPI 2021 Cr</a:t>
+              </a:r>
+            </a:p>
+          </p:txBody>
+        </p:sp>
+        <p:sp>
+          <p:nvSpPr>
+            <p:cNvPr id="94" name="tx94"/>
+            <p:cNvSpPr/>
+            <p:nvPr/>
+          </p:nvSpPr>
+          <p:spPr>
+            <a:xfrm rot="-5400000">
+              <a:off x="138035" y="4944909"/>
+              <a:ext cx="1016904" cy="100218"/>
+            </a:xfrm>
+            <a:prstGeom prst="rect">
+              <a:avLst/>
+            </a:prstGeom>
+            <a:noFill/>
+          </p:spPr>
+          <p:txBody>
+            <a:bodyPr lIns="0" rIns="0" tIns="0" bIns="0" anchorCtr="1" anchor="ctr" wrap="none"/>
+            <a:lstStyle/>
+            <a:p>
+              <a:pPr algn="l" marL="0" marR="0" indent="0">
+                <a:lnSpc>
+                  <a:spcPts val="1100"/>
+                </a:lnSpc>
+                <a:spcBef>
+                  <a:spcPts val="0"/>
+                </a:spcBef>
+                <a:spcAft>
+                  <a:spcPts val="0"/>
+                </a:spcAft>
+              </a:pPr>
+              <a:r>
+                <a:rPr sz="1100">
+                  <a:solidFill>
+                    <a:srgbClr val="000000">
+                      <a:alpha val="100000"/>
+                    </a:srgbClr>
+                  </a:solidFill>
+                  <a:latin typeface="Helvetica"/>
+                  <a:cs typeface="Helvetica"/>
+                </a:rPr>
+                <a:t>subHR (95% CI)</a:t>
+              </a:r>
+            </a:p>
+          </p:txBody>
+        </p:sp>
+        <p:sp>
+          <p:nvSpPr>
+            <p:cNvPr id="95" name="tx95"/>
+            <p:cNvSpPr/>
+            <p:nvPr/>
+          </p:nvSpPr>
+          <p:spPr>
+            <a:xfrm>
+              <a:off x="887106" y="4159544"/>
+              <a:ext cx="6959864" cy="82021"/>
+            </a:xfrm>
+            <a:prstGeom prst="rect">
+              <a:avLst/>
+            </a:prstGeom>
+            <a:noFill/>
+          </p:spPr>
+          <p:txBody>
+            <a:bodyPr lIns="0" rIns="0" tIns="0" bIns="0" anchorCtr="1" anchor="ctr" wrap="none"/>
+            <a:lstStyle/>
+            <a:p>
+              <a:pPr algn="l" marL="0" marR="0" indent="0">
+                <a:lnSpc>
+                  <a:spcPts val="900"/>
+                </a:lnSpc>
+                <a:spcBef>
+                  <a:spcPts val="0"/>
+                </a:spcBef>
+                <a:spcAft>
+                  <a:spcPts val="0"/>
+                </a:spcAft>
+              </a:pPr>
+              <a:r>
+                <a:rPr sz="900">
+                  <a:solidFill>
+                    <a:srgbClr val="404040">
+                      <a:alpha val="100000"/>
+                    </a:srgbClr>
+                  </a:solidFill>
+                  <a:latin typeface="Helvetica"/>
+                  <a:cs typeface="Helvetica"/>
+                </a:rPr>
+                <a:t>subHR per 10 % decline: 1.20 (0.97-1.49), p_Bonf = 0.525 (n = 6)  |  per IQR decline (Δ = 28.1 %): 1.68 (0.93-3.05)  |  IQR: [-30.1, -2.1] %</a:t>
+              </a:r>
+            </a:p>
+          </p:txBody>
+        </p:sp>
+        <p:sp>
+          <p:nvSpPr>
+            <p:cNvPr id="96" name="tx96"/>
+            <p:cNvSpPr/>
+            <p:nvPr/>
+          </p:nvSpPr>
+          <p:spPr>
+            <a:xfrm>
+              <a:off x="887106" y="3932770"/>
               <a:ext cx="3462375" cy="120152"/>
             </a:xfrm>
             <a:prstGeom prst="rect">
